--- a/slides_p10_p12.pptx
+++ b/slides_p10_p12.pptx
@@ -3241,7 +3241,7 @@
                 </a:solidFill>
                 <a:latin typeface="Meiryo UI"/>
               </a:rPr>
-              <a:t>貴社の成長戦略は「No.1 Backoffice AI Company」の実現。「SaaS価値向上」「AIプロダクト」「M&amp;A」を3本柱とし、FY28で売上高900億円を目指す。</a:t>
+              <a:t>FY28売上900億円の道筋は明確。SaaS・AI・M&amp;Aの3本柱でTAMを5倍に拡大する。</a:t>
             </a:r>
           </a:p>
         </p:txBody>
@@ -3306,7 +3306,7 @@
                           </a:solidFill>
                           <a:latin typeface="Meiryo UI"/>
                         </a:rPr>
-                        <a:t>内容</a:t>
+                        <a:t>戦略の核心</a:t>
                       </a:r>
                     </a:p>
                   </a:txBody>
@@ -3329,7 +3329,7 @@
                           </a:solidFill>
                           <a:latin typeface="Meiryo UI"/>
                         </a:rPr>
-                        <a:t>詳細</a:t>
+                        <a:t>目指す状態</a:t>
                       </a:r>
                     </a:p>
                   </a:txBody>
@@ -3354,7 +3354,7 @@
                           </a:solidFill>
                           <a:latin typeface="Meiryo UI"/>
                         </a:rPr>
-                        <a:t>SaaS：バックオフィスSaaSの価値向上</a:t>
+                        <a:t>SaaS：バックオフィス価値向上</a:t>
                       </a:r>
                     </a:p>
                   </a:txBody>
@@ -3377,7 +3377,7 @@
                           </a:solidFill>
                           <a:latin typeface="Meiryo UI"/>
                         </a:rPr>
-                        <a:t>60超のプロダクトで会計・人事・法務を網羅</a:t>
+                        <a:t>60超プロダクトで会計・人事・法務を網羅</a:t>
                       </a:r>
                     </a:p>
                   </a:txBody>
@@ -3400,7 +3400,7 @@
                           </a:solidFill>
                           <a:latin typeface="Meiryo UI"/>
                         </a:rPr>
-                        <a:t>顧客基盤の拡大とARPA向上</a:t>
+                        <a:t>顧客基盤拡大とARPA向上</a:t>
                       </a:r>
                     </a:p>
                   </a:txBody>
@@ -3425,7 +3425,7 @@
                           </a:solidFill>
                           <a:latin typeface="Meiryo UI"/>
                         </a:rPr>
-                        <a:t>AI：AIプロダクトの開発・提供</a:t>
+                        <a:t>AI：AIプロダクト開発・提供</a:t>
                       </a:r>
                     </a:p>
                   </a:txBody>
@@ -3448,7 +3448,7 @@
                           </a:solidFill>
                           <a:latin typeface="Meiryo UI"/>
                         </a:rPr>
-                        <a:t>AIエージェント・AIネイティブプロダクト・AI×BPO</a:t>
+                        <a:t>AIエージェント・AIネイティブ・AI×BPO</a:t>
                       </a:r>
                     </a:p>
                   </a:txBody>
@@ -3471,7 +3471,7 @@
                           </a:solidFill>
                           <a:latin typeface="Meiryo UI"/>
                         </a:rPr>
-                        <a:t>業務を自律処理</a:t>
+                        <a:t>業務の自律処理</a:t>
                       </a:r>
                     </a:p>
                   </a:txBody>
@@ -3496,7 +3496,30 @@
                           </a:solidFill>
                           <a:latin typeface="Meiryo UI"/>
                         </a:rPr>
-                        <a:t>M&amp;A：M&amp;A戦略の遂行</a:t>
+                        <a:t>M&amp;A：戦略的サービス拡充</a:t>
+                      </a:r>
+                    </a:p>
+                  </a:txBody>
+                  <a:tcPr>
+                    <a:solidFill>
+                      <a:srgbClr val="F5F7FA"/>
+                    </a:solidFill>
+                  </a:tcPr>
+                </a:tc>
+                <a:tc>
+                  <a:txBody>
+                    <a:bodyPr/>
+                    <a:lstStyle/>
+                    <a:p>
+                      <a:pPr algn="l"/>
+                      <a:r>
+                        <a:rPr sz="1400" b="0" i="0">
+                          <a:solidFill>
+                            <a:srgbClr val="1A1A1A"/>
+                          </a:solidFill>
+                          <a:latin typeface="Meiryo UI"/>
+                        </a:rPr>
+                        <a:t>経営管理領域を全方位でカバー</a:t>
                       </a:r>
                     </a:p>
                   </a:txBody>
@@ -3529,29 +3552,6 @@
                     </a:solidFill>
                   </a:tcPr>
                 </a:tc>
-                <a:tc>
-                  <a:txBody>
-                    <a:bodyPr/>
-                    <a:lstStyle/>
-                    <a:p>
-                      <a:pPr algn="l"/>
-                      <a:r>
-                        <a:rPr sz="1400" b="0" i="0">
-                          <a:solidFill>
-                            <a:srgbClr val="1A1A1A"/>
-                          </a:solidFill>
-                          <a:latin typeface="Meiryo UI"/>
-                        </a:rPr>
-                        <a:t>経営管理領域を全方位でカバーする体制を構築</a:t>
-                      </a:r>
-                    </a:p>
-                  </a:txBody>
-                  <a:tcPr>
-                    <a:solidFill>
-                      <a:srgbClr val="F5F7FA"/>
-                    </a:solidFill>
-                  </a:tcPr>
-                </a:tc>
               </a:tr>
             </a:tbl>
           </a:graphicData>
@@ -3601,85 +3601,128 @@
           </a:p>
         </p:txBody>
       </p:sp>
-      <p:sp>
-        <p:nvSpPr>
-          <p:cNvPr id="8" name="TextBox 7"/>
-          <p:cNvSpPr txBox="1"/>
+      <p:graphicFrame>
+        <p:nvGraphicFramePr>
+          <p:cNvPr id="8" name="Table 7"/>
+          <p:cNvGraphicFramePr>
+            <a:graphicFrameLocks noGrp="1"/>
+          </p:cNvGraphicFramePr>
           <p:nvPr/>
-        </p:nvSpPr>
-        <p:spPr>
-          <a:xfrm>
-            <a:off x="838504" y="2868168"/>
-            <a:ext cx="10515600" cy="3396386"/>
-          </a:xfrm>
-          <a:prstGeom prst="rect">
-            <a:avLst/>
-          </a:prstGeom>
-          <a:noFill/>
-        </p:spPr>
-        <p:txBody>
-          <a:bodyPr wrap="square">
-            <a:spAutoFit/>
-          </a:bodyPr>
-          <a:lstStyle/>
-          <a:p>
-            <a:pPr>
-              <a:spcBef>
-                <a:spcPts val="600"/>
-              </a:spcBef>
-              <a:spcAft>
-                <a:spcPts val="200"/>
-              </a:spcAft>
-            </a:pPr>
-            <a:r>
-              <a:rPr sz="1600" b="0" i="0">
-                <a:solidFill>
-                  <a:srgbClr val="0066CD"/>
-                </a:solidFill>
-                <a:latin typeface="Meiryo UI"/>
-              </a:rPr>
-              <a:t>● </a:t>
-            </a:r>
-            <a:r>
-              <a:rPr sz="1600" b="0" i="0">
-                <a:solidFill>
-                  <a:srgbClr val="1A1A1A"/>
-                </a:solidFill>
-                <a:latin typeface="Meiryo UI"/>
-              </a:rPr>
-              <a:t>TAMの5倍拡大：デジタルツール市場（2.8兆円）→ デジタルワーカー市場（14.1兆円）へ</a:t>
-            </a:r>
-          </a:p>
-          <a:p>
-            <a:pPr>
-              <a:spcBef>
-                <a:spcPts val="600"/>
-              </a:spcBef>
-              <a:spcAft>
-                <a:spcPts val="200"/>
-              </a:spcAft>
-            </a:pPr>
-            <a:r>
-              <a:rPr sz="1600" b="0" i="0">
-                <a:solidFill>
-                  <a:srgbClr val="0066CD"/>
-                </a:solidFill>
-                <a:latin typeface="Meiryo UI"/>
-              </a:rPr>
-              <a:t>● </a:t>
-            </a:r>
-            <a:r>
-              <a:rPr sz="1600" b="0" i="0">
-                <a:solidFill>
-                  <a:srgbClr val="1A1A1A"/>
-                </a:solidFill>
-                <a:latin typeface="Meiryo UI"/>
-              </a:rPr>
-              <a:t>FY28目標：売上高900億円以上 / EBITDA270億円以上 / 事業CF180億円以上</a:t>
-            </a:r>
-          </a:p>
-        </p:txBody>
-      </p:sp>
+        </p:nvGraphicFramePr>
+        <p:xfrm>
+          <a:off x="838504" y="5469026.0"/>
+          <a:ext cx="10515600" cy="685800"/>
+        </p:xfrm>
+        <a:graphic>
+          <a:graphicData uri="http://schemas.openxmlformats.org/drawingml/2006/table">
+            <a:tbl>
+              <a:tblPr firstRow="1" bandRow="1">
+                <a:tableStyleId>{5C22544A-7EE6-4342-B048-85BDC9FD1C3A}</a:tableStyleId>
+              </a:tblPr>
+              <a:tblGrid>
+                <a:gridCol w="5257800"/>
+                <a:gridCol w="5257800"/>
+              </a:tblGrid>
+              <a:tr h="365760">
+                <a:tc>
+                  <a:txBody>
+                    <a:bodyPr/>
+                    <a:lstStyle/>
+                    <a:p>
+                      <a:pPr algn="ctr"/>
+                      <a:r>
+                        <a:rPr sz="1400" b="1" i="0">
+                          <a:solidFill>
+                            <a:srgbClr val="FFFFFF"/>
+                          </a:solidFill>
+                          <a:latin typeface="Meiryo UI"/>
+                        </a:rPr>
+                        <a:t>TAM拡大</a:t>
+                      </a:r>
+                    </a:p>
+                  </a:txBody>
+                  <a:tcPr>
+                    <a:solidFill>
+                      <a:srgbClr val="1D3461"/>
+                    </a:solidFill>
+                  </a:tcPr>
+                </a:tc>
+                <a:tc>
+                  <a:txBody>
+                    <a:bodyPr/>
+                    <a:lstStyle/>
+                    <a:p>
+                      <a:pPr algn="ctr"/>
+                      <a:r>
+                        <a:rPr sz="1400" b="1" i="0">
+                          <a:solidFill>
+                            <a:srgbClr val="FFFFFF"/>
+                          </a:solidFill>
+                          <a:latin typeface="Meiryo UI"/>
+                        </a:rPr>
+                        <a:t>FY28財務目標</a:t>
+                      </a:r>
+                    </a:p>
+                  </a:txBody>
+                  <a:tcPr>
+                    <a:solidFill>
+                      <a:srgbClr val="1D3461"/>
+                    </a:solidFill>
+                  </a:tcPr>
+                </a:tc>
+              </a:tr>
+              <a:tr h="320040">
+                <a:tc>
+                  <a:txBody>
+                    <a:bodyPr/>
+                    <a:lstStyle/>
+                    <a:p>
+                      <a:pPr algn="l"/>
+                      <a:r>
+                        <a:rPr sz="1400" b="0" i="0">
+                          <a:solidFill>
+                            <a:srgbClr val="1A1A1A"/>
+                          </a:solidFill>
+                          <a:latin typeface="Meiryo UI"/>
+                        </a:rPr>
+                        <a:t>デジタルツール市場 2.8兆円 → **デジタルワーカー市場 14.1兆円**（5倍）</a:t>
+                      </a:r>
+                    </a:p>
+                  </a:txBody>
+                  <a:tcPr>
+                    <a:solidFill>
+                      <a:srgbClr val="F5F7FA"/>
+                    </a:solidFill>
+                  </a:tcPr>
+                </a:tc>
+                <a:tc>
+                  <a:txBody>
+                    <a:bodyPr/>
+                    <a:lstStyle/>
+                    <a:p>
+                      <a:pPr algn="l"/>
+                      <a:r>
+                        <a:rPr sz="1400" b="0" i="0">
+                          <a:solidFill>
+                            <a:srgbClr val="1A1A1A"/>
+                          </a:solidFill>
+                          <a:latin typeface="Meiryo UI"/>
+                        </a:rPr>
+                        <a:t>売上900億・EBITDA270億・事業CF180億</a:t>
+                      </a:r>
+                    </a:p>
+                  </a:txBody>
+                  <a:tcPr>
+                    <a:solidFill>
+                      <a:srgbClr val="F5F7FA"/>
+                    </a:solidFill>
+                  </a:tcPr>
+                </a:tc>
+              </a:tr>
+            </a:tbl>
+          </a:graphicData>
+        </a:graphic>
+      </p:graphicFrame>
       <p:pic>
         <p:nvPicPr>
           <p:cNvPr id="9" name="Picture 8" descr="logo.png"/>
@@ -3986,7 +4029,7 @@
                 </a:solidFill>
                 <a:latin typeface="Meiryo UI"/>
               </a:rPr>
-              <a:t>お電話でお伺いした内容を整理し、貴社固有の課題仮説を立てさせていただきました。合っている・合っていないも含めて率直にお聞かせいただければと思います。</a:t>
+              <a:t>**3つの事象は全て「営業の型が可視化されていない」1点に帰着する。** ここを解くと全てが動く。</a:t>
             </a:r>
           </a:p>
         </p:txBody>
@@ -4027,7 +4070,7 @@
                           </a:solidFill>
                           <a:latin typeface="Meiryo UI"/>
                         </a:rPr>
-                        <a:t>お伺いした事実</a:t>
+                        <a:t>事象（Fact）</a:t>
                       </a:r>
                     </a:p>
                   </a:txBody>
@@ -4050,7 +4093,7 @@
                           </a:solidFill>
                           <a:latin typeface="Meiryo UI"/>
                         </a:rPr>
-                        <a:t>そこから立てた課題仮説（貴社固有の構造的要因）</a:t>
+                        <a:t>課題の核心（Insight）</a:t>
                       </a:r>
                     </a:p>
                   </a:txBody>
@@ -4075,7 +4118,7 @@
                           </a:solidFill>
                           <a:latin typeface="Meiryo UI"/>
                         </a:rPr>
-                        <a:t>受注率に個人間バラつき（特に受注率に差分。機能売りになりがち、仮説もばらつく）</a:t>
+                        <a:t>受注率に個人間バラつき</a:t>
                       </a:r>
                     </a:p>
                   </a:txBody>
@@ -4098,7 +4141,7 @@
                           </a:solidFill>
                           <a:latin typeface="Meiryo UI"/>
                         </a:rPr>
-                        <a:t>「課題パターン×プロダクト組み合わせ」の型がない。会計領域は業種×規模×フェーズで業務フローが根本的に異なり、汎用トークスクリプトでは対応不可。60超のプロダクトから最適な組み合わせを判断する型がないため、FSの商品知識の差＝受注率の差に。競合（freee/弥生/OBC）との機能比較になると価格勝負に陥りやすい。</a:t>
+                        <a:t>**提案の型がない。** 60超プロダクトの最適組み合わせは個人知識依存。型なし＝商品知識の差＝受注率の差</a:t>
                       </a:r>
                     </a:p>
                   </a:txBody>
@@ -4123,7 +4166,7 @@
                           </a:solidFill>
                           <a:latin typeface="Meiryo UI"/>
                         </a:rPr>
-                        <a:t>中途がワークしない（1人あたり売上低下）中途採用を増やしているが全員がワークしていない</a:t>
+                        <a:t>中途がワークしない（1人あたり売上低下）</a:t>
                       </a:r>
                     </a:p>
                   </a:txBody>
@@ -4146,7 +4189,7 @@
                           </a:solidFill>
                           <a:latin typeface="Meiryo UI"/>
                         </a:rPr>
-                        <a:t>マネフォ固有の複雑さ×採用市場の構造変化が重なっている。SaaS業界の求人倍率高止まりにより、面接評価と実配属後のパフォーマンスにギャップ。「会計×60超プロダクト×SaaS/Fintech/AI三層構造」は他SaaSと比較にならない複雑さ。前職スキルがそのまま通用せず、得意な1-2商品に偏る。</a:t>
+                        <a:t>**マネフォ固有の複雑さが前職スキルを無効化。** 会計×60超×SaaS/Fintech/AI三層構造は他SaaSと別次元</a:t>
                       </a:r>
                     </a:p>
                   </a:txBody>
@@ -4171,7 +4214,7 @@
                           </a:solidFill>
                           <a:latin typeface="Meiryo UI"/>
                         </a:rPr>
-                        <a:t>Salesforce利用中だがExcel併用（集計にはエクセルも使用。楠木先生のセミナーにも参加）</a:t>
+                        <a:t>Salesforceあり・Excel併用</a:t>
                       </a:r>
                     </a:p>
                   </a:txBody>
@@ -4194,7 +4237,7 @@
                           </a:solidFill>
                           <a:latin typeface="Meiryo UI"/>
                         </a:rPr>
-                        <a:t>受注率低下の原因をデータで特定できず、介入ポイントが見えない。Salesforceにデータはあるが、受注率がどのフェーズで落ちているかやリードソース×担当者別の分析ができていない。Excel併用＝ドリルダウンできない＝営業企画部として介入ポイントが判断できない状態。</a:t>
+                        <a:t>**介入ポイントが見えない。** フェーズ別受注率・担当者別分析不可。戦略はあるが実行を支える基盤がない</a:t>
                       </a:r>
                     </a:p>
                   </a:txBody>
@@ -4299,7 +4342,7 @@
                 </a:solidFill>
                 <a:latin typeface="Meiryo UI"/>
               </a:rPr>
-              <a:t>3つの仮説は突き詰めると **「営業の型が可視化されていないこと」** に帰着すると考えています</a:t>
+              <a:t>3仮説の帰着点：**「営業の型が可視化されていないこと」**</a:t>
             </a:r>
           </a:p>
         </p:txBody>
@@ -4610,7 +4653,7 @@
                 </a:solidFill>
                 <a:latin typeface="Meiryo UI"/>
               </a:rPr>
-              <a:t>ASIS：戦略推進にあたっての仮説障壁 → TOBE：解決策・ご提案骨子</a:t>
+              <a:t>**型の設計×データ可視化×伴走の3施策セットで、採用数に比例して売上が伸びる組織を構築する。**</a:t>
             </a:r>
           </a:p>
         </p:txBody>
@@ -4644,7 +4687,7 @@
                 </a:solidFill>
                 <a:latin typeface="Meiryo UI"/>
               </a:rPr>
-              <a:t>ASIS：仮説障壁</a:t>
+              <a:t>ASIS：3つの仮説障壁</a:t>
             </a:r>
           </a:p>
         </p:txBody>
@@ -4678,7 +4721,7 @@
                 </a:solidFill>
                 <a:latin typeface="Meiryo UI"/>
               </a:rPr>
-              <a:t>TOBE：解決策・ご提案骨子</a:t>
+              <a:t>TOBE：3つの解決施策</a:t>
             </a:r>
           </a:p>
         </p:txBody>
@@ -4758,13 +4801,13 @@
               </a:spcAft>
             </a:pPr>
             <a:r>
-              <a:rPr sz="1600" b="0" i="0">
+              <a:rPr sz="1600" b="1" i="0">
                 <a:solidFill>
                   <a:srgbClr val="0066CD"/>
                 </a:solidFill>
                 <a:latin typeface="Meiryo UI"/>
               </a:rPr>
-              <a:t>● </a:t>
+              <a:t>1. </a:t>
             </a:r>
             <a:r>
               <a:rPr sz="1600" b="0" i="0">
@@ -4801,7 +4844,7 @@
                 </a:solidFill>
                 <a:latin typeface="Meiryo UI"/>
               </a:rPr>
-              <a:t>会計領域×60超プロダクトの「課題パターン×組み合わせ提案」の型がなく、個人の商品知識に依存</a:t>
+              <a:t>提案の型なし→個人の商品知識に依存</a:t>
             </a:r>
           </a:p>
           <a:p>
@@ -4829,7 +4872,7 @@
                 </a:solidFill>
                 <a:latin typeface="Meiryo UI"/>
               </a:rPr>
-              <a:t>ヒアリングが浅いまま提案に入り、機能売りに逃げる構造</a:t>
+              <a:t>ヒアリング浅→機能売りに逃げる構造</a:t>
             </a:r>
           </a:p>
           <a:p>
@@ -4842,13 +4885,13 @@
               </a:spcAft>
             </a:pPr>
             <a:r>
-              <a:rPr sz="1600" b="0" i="0">
+              <a:rPr sz="1600" b="1" i="0">
                 <a:solidFill>
                   <a:srgbClr val="0066CD"/>
                 </a:solidFill>
                 <a:latin typeface="Meiryo UI"/>
               </a:rPr>
-              <a:t>● </a:t>
+              <a:t>2. </a:t>
             </a:r>
             <a:r>
               <a:rPr sz="1600" b="0" i="0">
@@ -4885,7 +4928,7 @@
                 </a:solidFill>
                 <a:latin typeface="Meiryo UI"/>
               </a:rPr>
-              <a:t>採用市場の構造変化＋マネフォ固有の複雑さにより、想定期間で立ち上がれない</a:t>
+              <a:t>採用市場変化＋マネフォ固有の複雑さ</a:t>
             </a:r>
           </a:p>
           <a:p>
@@ -4913,7 +4956,7 @@
                 </a:solidFill>
                 <a:latin typeface="Meiryo UI"/>
               </a:rPr>
-              <a:t>前職の得意商品に偏り、ポートフォリオ全体を活かせない</a:t>
+              <a:t>前職スキルが通用せず1-2商品に偏る</a:t>
             </a:r>
           </a:p>
           <a:p>
@@ -4926,13 +4969,13 @@
               </a:spcAft>
             </a:pPr>
             <a:r>
-              <a:rPr sz="1600" b="0" i="0">
+              <a:rPr sz="1600" b="1" i="0">
                 <a:solidFill>
                   <a:srgbClr val="0066CD"/>
                 </a:solidFill>
                 <a:latin typeface="Meiryo UI"/>
               </a:rPr>
-              <a:t>● </a:t>
+              <a:t>3. </a:t>
             </a:r>
             <a:r>
               <a:rPr sz="1600" b="0" i="0">
@@ -4969,7 +5012,7 @@
                 </a:solidFill>
                 <a:latin typeface="Meiryo UI"/>
               </a:rPr>
-              <a:t>Salesforceにデータはあるが、どのフェーズで受注率が落ちているか可視化されていない</a:t>
+              <a:t>フェーズ別受注率が可視化されていない</a:t>
             </a:r>
           </a:p>
           <a:p>
@@ -4997,7 +5040,7 @@
                 </a:solidFill>
                 <a:latin typeface="Meiryo UI"/>
               </a:rPr>
-              <a:t>Excel併用によりPDCA回転速度が遅い</a:t>
+              <a:t>Excel併用→PDCAが回せない</a:t>
             </a:r>
           </a:p>
         </p:txBody>
@@ -5033,13 +5076,13 @@
               </a:spcAft>
             </a:pPr>
             <a:r>
-              <a:rPr sz="1600" b="0" i="0">
+              <a:rPr sz="1600" b="1" i="0">
                 <a:solidFill>
                   <a:srgbClr val="0066CD"/>
                 </a:solidFill>
                 <a:latin typeface="Meiryo UI"/>
               </a:rPr>
-              <a:t>● </a:t>
+              <a:t>1. </a:t>
             </a:r>
             <a:r>
               <a:rPr sz="1600" b="0" i="0">
@@ -5048,7 +5091,7 @@
                 </a:solidFill>
                 <a:latin typeface="Meiryo UI"/>
               </a:rPr>
-              <a:t>**SEP：会計領域特化の営業の型を設計**</a:t>
+              <a:t>**SEP：会計特化の営業の型を設計**</a:t>
             </a:r>
           </a:p>
           <a:p>
@@ -5076,7 +5119,7 @@
                 </a:solidFill>
                 <a:latin typeface="Meiryo UI"/>
               </a:rPr>
-              <a:t>カスタマーパス設計により「意思決定プロセス」に沿ったヒアリング・提案の型を実装</a:t>
+              <a:t>カスタマーパスで「意思決定プロセス」に沿った提案型を実装</a:t>
             </a:r>
           </a:p>
           <a:p>
@@ -5104,7 +5147,35 @@
                 </a:solidFill>
                 <a:latin typeface="Meiryo UI"/>
               </a:rPr>
-              <a:t>ニーズマップで「課題パターン×プロダクト組み合わせ」を体系化</a:t>
+              <a:t>中途でも型に沿えば最適提案が可能</a:t>
+            </a:r>
+          </a:p>
+          <a:p>
+            <a:pPr>
+              <a:spcBef>
+                <a:spcPts val="600"/>
+              </a:spcBef>
+              <a:spcAft>
+                <a:spcPts val="200"/>
+              </a:spcAft>
+            </a:pPr>
+            <a:r>
+              <a:rPr sz="1600" b="1" i="0">
+                <a:solidFill>
+                  <a:srgbClr val="0066CD"/>
+                </a:solidFill>
+                <a:latin typeface="Meiryo UI"/>
+              </a:rPr>
+              <a:t>2. </a:t>
+            </a:r>
+            <a:r>
+              <a:rPr sz="1600" b="0" i="0">
+                <a:solidFill>
+                  <a:srgbClr val="1A1A1A"/>
+                </a:solidFill>
+                <a:latin typeface="Meiryo UI"/>
+              </a:rPr>
+              <a:t>**VISUALIZE：介入ポイントを可視化**</a:t>
             </a:r>
           </a:p>
           <a:p>
@@ -5132,7 +5203,35 @@
                 </a:solidFill>
                 <a:latin typeface="Meiryo UI"/>
               </a:rPr>
-              <a:t>中途でも型に沿えば最適提案が可能に</a:t>
+              <a:t>受注率×フェーズ移行率をリアルタイム可視化</a:t>
+            </a:r>
+          </a:p>
+          <a:p>
+            <a:pPr>
+              <a:spcBef>
+                <a:spcPts val="300"/>
+              </a:spcBef>
+              <a:spcAft>
+                <a:spcPts val="100"/>
+              </a:spcAft>
+            </a:pPr>
+            <a:r>
+              <a:rPr sz="1400" b="0" i="0">
+                <a:solidFill>
+                  <a:srgbClr val="888888"/>
+                </a:solidFill>
+                <a:latin typeface="Meiryo UI"/>
+              </a:rPr>
+              <a:t>      – </a:t>
+            </a:r>
+            <a:r>
+              <a:rPr sz="1400" b="0" i="0">
+                <a:solidFill>
+                  <a:srgbClr val="1A1A1A"/>
+                </a:solidFill>
+                <a:latin typeface="Meiryo UI"/>
+              </a:rPr>
+              <a:t>Excel撤廃→営業企画がデータで介入判断</a:t>
             </a:r>
           </a:p>
           <a:p>
@@ -5145,13 +5244,13 @@
               </a:spcAft>
             </a:pPr>
             <a:r>
-              <a:rPr sz="1600" b="0" i="0">
+              <a:rPr sz="1600" b="1" i="0">
                 <a:solidFill>
                   <a:srgbClr val="0066CD"/>
                 </a:solidFill>
                 <a:latin typeface="Meiryo UI"/>
               </a:rPr>
-              <a:t>● </a:t>
+              <a:t>3. </a:t>
             </a:r>
             <a:r>
               <a:rPr sz="1600" b="0" i="0">
@@ -5160,7 +5259,7 @@
                 </a:solidFill>
                 <a:latin typeface="Meiryo UI"/>
               </a:rPr>
-              <a:t>**VISUALIZE：介入ポイントの可視化**</a:t>
+              <a:t>**Buddy伴走：戦略と実行の断絶を埋める**</a:t>
             </a:r>
           </a:p>
           <a:p>
@@ -5188,7 +5287,7 @@
                 </a:solidFill>
                 <a:latin typeface="Meiryo UI"/>
               </a:rPr>
-              <a:t>受注率×フェーズ移行率をリアルタイム可視化</a:t>
+              <a:t>型を知る→実行できる→文化になるまで定着支援</a:t>
             </a:r>
           </a:p>
           <a:p>
@@ -5216,147 +5315,7 @@
                 </a:solidFill>
                 <a:latin typeface="Meiryo UI"/>
               </a:rPr>
-              <a:t>リードソース×担当者別のドリルダウン分析が可能に</a:t>
-            </a:r>
-          </a:p>
-          <a:p>
-            <a:pPr>
-              <a:spcBef>
-                <a:spcPts val="300"/>
-              </a:spcBef>
-              <a:spcAft>
-                <a:spcPts val="100"/>
-              </a:spcAft>
-            </a:pPr>
-            <a:r>
-              <a:rPr sz="1400" b="0" i="0">
-                <a:solidFill>
-                  <a:srgbClr val="888888"/>
-                </a:solidFill>
-                <a:latin typeface="Meiryo UI"/>
-              </a:rPr>
-              <a:t>      – </a:t>
-            </a:r>
-            <a:r>
-              <a:rPr sz="1400" b="0" i="0">
-                <a:solidFill>
-                  <a:srgbClr val="1A1A1A"/>
-                </a:solidFill>
-                <a:latin typeface="Meiryo UI"/>
-              </a:rPr>
-              <a:t>Excel集計を撤廃し、営業企画部がデータで介入判断できる状態を構築</a:t>
-            </a:r>
-          </a:p>
-          <a:p>
-            <a:pPr>
-              <a:spcBef>
-                <a:spcPts val="600"/>
-              </a:spcBef>
-              <a:spcAft>
-                <a:spcPts val="200"/>
-              </a:spcAft>
-            </a:pPr>
-            <a:r>
-              <a:rPr sz="1600" b="0" i="0">
-                <a:solidFill>
-                  <a:srgbClr val="0066CD"/>
-                </a:solidFill>
-                <a:latin typeface="Meiryo UI"/>
-              </a:rPr>
-              <a:t>● </a:t>
-            </a:r>
-            <a:r>
-              <a:rPr sz="1600" b="0" i="0">
-                <a:solidFill>
-                  <a:srgbClr val="1A1A1A"/>
-                </a:solidFill>
-                <a:latin typeface="Meiryo UI"/>
-              </a:rPr>
-              <a:t>**Buddy伴走：戦略と実行の断絶を埋める**</a:t>
-            </a:r>
-          </a:p>
-          <a:p>
-            <a:pPr>
-              <a:spcBef>
-                <a:spcPts val="300"/>
-              </a:spcBef>
-              <a:spcAft>
-                <a:spcPts val="100"/>
-              </a:spcAft>
-            </a:pPr>
-            <a:r>
-              <a:rPr sz="1400" b="0" i="0">
-                <a:solidFill>
-                  <a:srgbClr val="888888"/>
-                </a:solidFill>
-                <a:latin typeface="Meiryo UI"/>
-              </a:rPr>
-              <a:t>      – </a:t>
-            </a:r>
-            <a:r>
-              <a:rPr sz="1400" b="0" i="0">
-                <a:solidFill>
-                  <a:srgbClr val="1A1A1A"/>
-                </a:solidFill>
-                <a:latin typeface="Meiryo UI"/>
-              </a:rPr>
-              <a:t>朝会夕会の運用設計と専任Buddy伴走により定着支援</a:t>
-            </a:r>
-          </a:p>
-          <a:p>
-            <a:pPr>
-              <a:spcBef>
-                <a:spcPts val="300"/>
-              </a:spcBef>
-              <a:spcAft>
-                <a:spcPts val="100"/>
-              </a:spcAft>
-            </a:pPr>
-            <a:r>
-              <a:rPr sz="1400" b="0" i="0">
-                <a:solidFill>
-                  <a:srgbClr val="888888"/>
-                </a:solidFill>
-                <a:latin typeface="Meiryo UI"/>
-              </a:rPr>
-              <a:t>      – </a:t>
-            </a:r>
-            <a:r>
-              <a:rPr sz="1400" b="0" i="0">
-                <a:solidFill>
-                  <a:srgbClr val="1A1A1A"/>
-                </a:solidFill>
-                <a:latin typeface="Meiryo UI"/>
-              </a:rPr>
-              <a:t>「型を知っている」→「型を実行できる」→「型が文化になる」まで</a:t>
-            </a:r>
-          </a:p>
-          <a:p>
-            <a:pPr>
-              <a:spcBef>
-                <a:spcPts val="300"/>
-              </a:spcBef>
-              <a:spcAft>
-                <a:spcPts val="100"/>
-              </a:spcAft>
-            </a:pPr>
-            <a:r>
-              <a:rPr sz="1400" b="0" i="0">
-                <a:solidFill>
-                  <a:srgbClr val="888888"/>
-                </a:solidFill>
-                <a:latin typeface="Meiryo UI"/>
-              </a:rPr>
-              <a:t>      – </a:t>
-            </a:r>
-            <a:r>
-              <a:rPr sz="1400" b="0" i="0">
-                <a:solidFill>
-                  <a:srgbClr val="1A1A1A"/>
-                </a:solidFill>
-                <a:latin typeface="Meiryo UI"/>
-              </a:rPr>
-              <a:t>FY28に向けて採用数に比例して売上が伸びる組織構造を構築</a:t>
+              <a:t>FY28へ向け採用数比例の成長組織を構築</a:t>
             </a:r>
           </a:p>
         </p:txBody>
@@ -5451,7 +5410,7 @@
                 </a:solidFill>
                 <a:latin typeface="Meiryo UI"/>
               </a:rPr>
-              <a:t>貴社の営業の型を可視化（カスタマーパス作成）し再現性ある営業組織を構築 ＋ **データ基盤で介入ポイントを可視化** の2点が第一歩</a:t>
+              <a:t>**第一歩：** 営業の型の可視化（カスタマーパス作成）＋ データ基盤で介入ポイントを可視化</a:t>
             </a:r>
           </a:p>
         </p:txBody>

--- a/slides_p10_p12.pptx
+++ b/slides_p10_p12.pptx
@@ -3256,7 +3256,7 @@
         </p:nvGraphicFramePr>
         <p:xfrm>
           <a:off x="838504" y="1280160"/>
-          <a:ext cx="10515600" cy="1325880"/>
+          <a:ext cx="10515600" cy="2437332"/>
         </p:xfrm>
         <a:graphic>
           <a:graphicData uri="http://schemas.openxmlformats.org/drawingml/2006/table">
@@ -3272,7 +3272,7 @@
               <a:tr h="365760">
                 <a:tc>
                   <a:txBody>
-                    <a:bodyPr/>
+                    <a:bodyPr wrap="square"/>
                     <a:lstStyle/>
                     <a:p>
                       <a:pPr algn="ctr"/>
@@ -3295,7 +3295,7 @@
                 </a:tc>
                 <a:tc>
                   <a:txBody>
-                    <a:bodyPr/>
+                    <a:bodyPr wrap="square"/>
                     <a:lstStyle/>
                     <a:p>
                       <a:pPr algn="ctr"/>
@@ -3318,7 +3318,7 @@
                 </a:tc>
                 <a:tc>
                   <a:txBody>
-                    <a:bodyPr/>
+                    <a:bodyPr wrap="square"/>
                     <a:lstStyle/>
                     <a:p>
                       <a:pPr algn="ctr"/>
@@ -3340,10 +3340,10 @@
                   </a:tcPr>
                 </a:tc>
               </a:tr>
-              <a:tr h="320040">
+              <a:tr h="690524">
                 <a:tc>
                   <a:txBody>
-                    <a:bodyPr/>
+                    <a:bodyPr wrap="square"/>
                     <a:lstStyle/>
                     <a:p>
                       <a:pPr algn="l"/>
@@ -3366,7 +3366,7 @@
                 </a:tc>
                 <a:tc>
                   <a:txBody>
-                    <a:bodyPr/>
+                    <a:bodyPr wrap="square"/>
                     <a:lstStyle/>
                     <a:p>
                       <a:pPr algn="l"/>
@@ -3389,7 +3389,7 @@
                 </a:tc>
                 <a:tc>
                   <a:txBody>
-                    <a:bodyPr/>
+                    <a:bodyPr wrap="square"/>
                     <a:lstStyle/>
                     <a:p>
                       <a:pPr algn="l"/>
@@ -3411,10 +3411,10 @@
                   </a:tcPr>
                 </a:tc>
               </a:tr>
-              <a:tr h="320040">
+              <a:tr h="690524">
                 <a:tc>
                   <a:txBody>
-                    <a:bodyPr/>
+                    <a:bodyPr wrap="square"/>
                     <a:lstStyle/>
                     <a:p>
                       <a:pPr algn="l"/>
@@ -3437,7 +3437,7 @@
                 </a:tc>
                 <a:tc>
                   <a:txBody>
-                    <a:bodyPr/>
+                    <a:bodyPr wrap="square"/>
                     <a:lstStyle/>
                     <a:p>
                       <a:pPr algn="l"/>
@@ -3460,7 +3460,7 @@
                 </a:tc>
                 <a:tc>
                   <a:txBody>
-                    <a:bodyPr/>
+                    <a:bodyPr wrap="square"/>
                     <a:lstStyle/>
                     <a:p>
                       <a:pPr algn="l"/>
@@ -3482,10 +3482,10 @@
                   </a:tcPr>
                 </a:tc>
               </a:tr>
-              <a:tr h="320040">
+              <a:tr h="690524">
                 <a:tc>
                   <a:txBody>
-                    <a:bodyPr/>
+                    <a:bodyPr wrap="square"/>
                     <a:lstStyle/>
                     <a:p>
                       <a:pPr algn="l"/>
@@ -3508,7 +3508,7 @@
                 </a:tc>
                 <a:tc>
                   <a:txBody>
-                    <a:bodyPr/>
+                    <a:bodyPr wrap="square"/>
                     <a:lstStyle/>
                     <a:p>
                       <a:pPr algn="l"/>
@@ -3531,7 +3531,7 @@
                 </a:tc>
                 <a:tc>
                   <a:txBody>
-                    <a:bodyPr/>
+                    <a:bodyPr wrap="square"/>
                     <a:lstStyle/>
                     <a:p>
                       <a:pPr algn="l"/>
@@ -3565,7 +3565,7 @@
         </p:nvSpPr>
         <p:spPr>
           <a:xfrm>
-            <a:off x="838504" y="2766568"/>
+            <a:off x="838504" y="3878021"/>
             <a:ext cx="10515600" cy="12700"/>
           </a:xfrm>
           <a:prstGeom prst="rect">
@@ -3610,8 +3610,8 @@
           <p:nvPr/>
         </p:nvGraphicFramePr>
         <p:xfrm>
-          <a:off x="838504" y="5469026.0"/>
-          <a:ext cx="10515600" cy="685800"/>
+          <a:off x="838504" y="8811615.0"/>
+          <a:ext cx="10515600" cy="1463040"/>
         </p:xfrm>
         <a:graphic>
           <a:graphicData uri="http://schemas.openxmlformats.org/drawingml/2006/table">
@@ -3626,7 +3626,7 @@
               <a:tr h="365760">
                 <a:tc>
                   <a:txBody>
-                    <a:bodyPr/>
+                    <a:bodyPr wrap="square"/>
                     <a:lstStyle/>
                     <a:p>
                       <a:pPr algn="ctr"/>
@@ -3649,7 +3649,7 @@
                 </a:tc>
                 <a:tc>
                   <a:txBody>
-                    <a:bodyPr/>
+                    <a:bodyPr wrap="square"/>
                     <a:lstStyle/>
                     <a:p>
                       <a:pPr algn="ctr"/>
@@ -3671,10 +3671,10 @@
                   </a:tcPr>
                 </a:tc>
               </a:tr>
-              <a:tr h="320040">
+              <a:tr h="1097280">
                 <a:tc>
                   <a:txBody>
-                    <a:bodyPr/>
+                    <a:bodyPr wrap="square"/>
                     <a:lstStyle/>
                     <a:p>
                       <a:pPr algn="l"/>
@@ -3685,7 +3685,25 @@
                           </a:solidFill>
                           <a:latin typeface="Meiryo UI"/>
                         </a:rPr>
-                        <a:t>デジタルツール市場 2.8兆円 → **デジタルワーカー市場 14.1兆円**（5倍）</a:t>
+                        <a:t>デジタルツール市場 2.8兆円 → </a:t>
+                      </a:r>
+                      <a:r>
+                        <a:rPr sz="1400" b="1" i="0">
+                          <a:solidFill>
+                            <a:srgbClr val="1A1A1A"/>
+                          </a:solidFill>
+                          <a:latin typeface="Meiryo UI"/>
+                        </a:rPr>
+                        <a:t>デジタルワーカー市場 14.1兆円</a:t>
+                      </a:r>
+                      <a:r>
+                        <a:rPr sz="1400" b="0" i="0">
+                          <a:solidFill>
+                            <a:srgbClr val="1A1A1A"/>
+                          </a:solidFill>
+                          <a:latin typeface="Meiryo UI"/>
+                        </a:rPr>
+                        <a:t>（5倍）</a:t>
                       </a:r>
                     </a:p>
                   </a:txBody>
@@ -3697,7 +3715,7 @@
                 </a:tc>
                 <a:tc>
                   <a:txBody>
-                    <a:bodyPr/>
+                    <a:bodyPr wrap="square"/>
                     <a:lstStyle/>
                     <a:p>
                       <a:pPr algn="l"/>
@@ -4023,13 +4041,22 @@
           <a:lstStyle/>
           <a:p>
             <a:r>
-              <a:rPr sz="1800" b="0" i="0">
+              <a:rPr sz="1800" b="1" i="0">
                 <a:solidFill>
                   <a:srgbClr val="1A1A1A"/>
                 </a:solidFill>
                 <a:latin typeface="Meiryo UI"/>
               </a:rPr>
-              <a:t>**3つの事象は全て「営業の型が可視化されていない」1点に帰着する。** ここを解くと全てが動く。</a:t>
+              <a:t>3つの事象は全て「営業の型が可視化されていない」1点に帰着する。</a:t>
+            </a:r>
+            <a:r>
+              <a:rPr sz="1800" b="0" i="0">
+                <a:solidFill>
+                  <a:srgbClr val="1A1A1A"/>
+                </a:solidFill>
+                <a:latin typeface="Meiryo UI"/>
+              </a:rPr>
+              <a:t> ここを解くと全てが動く。</a:t>
             </a:r>
           </a:p>
         </p:txBody>
@@ -4044,7 +4071,7 @@
         </p:nvGraphicFramePr>
         <p:xfrm>
           <a:off x="838504" y="1280160"/>
-          <a:ext cx="10515600" cy="1325880"/>
+          <a:ext cx="10515600" cy="3657600"/>
         </p:xfrm>
         <a:graphic>
           <a:graphicData uri="http://schemas.openxmlformats.org/drawingml/2006/table">
@@ -4059,7 +4086,7 @@
               <a:tr h="365760">
                 <a:tc>
                   <a:txBody>
-                    <a:bodyPr/>
+                    <a:bodyPr wrap="square"/>
                     <a:lstStyle/>
                     <a:p>
                       <a:pPr algn="ctr"/>
@@ -4082,7 +4109,7 @@
                 </a:tc>
                 <a:tc>
                   <a:txBody>
-                    <a:bodyPr/>
+                    <a:bodyPr wrap="square"/>
                     <a:lstStyle/>
                     <a:p>
                       <a:pPr algn="ctr"/>
@@ -4104,10 +4131,10 @@
                   </a:tcPr>
                 </a:tc>
               </a:tr>
-              <a:tr h="320040">
+              <a:tr h="1097280">
                 <a:tc>
                   <a:txBody>
-                    <a:bodyPr/>
+                    <a:bodyPr wrap="square"/>
                     <a:lstStyle/>
                     <a:p>
                       <a:pPr algn="l"/>
@@ -4130,10 +4157,19 @@
                 </a:tc>
                 <a:tc>
                   <a:txBody>
-                    <a:bodyPr/>
+                    <a:bodyPr wrap="square"/>
                     <a:lstStyle/>
                     <a:p>
                       <a:pPr algn="l"/>
+                      <a:r>
+                        <a:rPr sz="1400" b="1" i="0">
+                          <a:solidFill>
+                            <a:srgbClr val="1A1A1A"/>
+                          </a:solidFill>
+                          <a:latin typeface="Meiryo UI"/>
+                        </a:rPr>
+                        <a:t>提案の型がない。</a:t>
+                      </a:r>
                       <a:r>
                         <a:rPr sz="1400" b="0" i="0">
                           <a:solidFill>
@@ -4141,7 +4177,7 @@
                           </a:solidFill>
                           <a:latin typeface="Meiryo UI"/>
                         </a:rPr>
-                        <a:t>**提案の型がない。** 60超プロダクトの最適組み合わせは個人知識依存。型なし＝商品知識の差＝受注率の差</a:t>
+                        <a:t> 60超プロダクトの最適組み合わせは個人知識依存。型なし＝商品知識の差＝受注率の差</a:t>
                       </a:r>
                     </a:p>
                   </a:txBody>
@@ -4152,10 +4188,10 @@
                   </a:tcPr>
                 </a:tc>
               </a:tr>
-              <a:tr h="320040">
+              <a:tr h="1097280">
                 <a:tc>
                   <a:txBody>
-                    <a:bodyPr/>
+                    <a:bodyPr wrap="square"/>
                     <a:lstStyle/>
                     <a:p>
                       <a:pPr algn="l"/>
@@ -4178,10 +4214,19 @@
                 </a:tc>
                 <a:tc>
                   <a:txBody>
-                    <a:bodyPr/>
+                    <a:bodyPr wrap="square"/>
                     <a:lstStyle/>
                     <a:p>
                       <a:pPr algn="l"/>
+                      <a:r>
+                        <a:rPr sz="1400" b="1" i="0">
+                          <a:solidFill>
+                            <a:srgbClr val="1A1A1A"/>
+                          </a:solidFill>
+                          <a:latin typeface="Meiryo UI"/>
+                        </a:rPr>
+                        <a:t>マネフォ固有の複雑さが前職スキルを無効化。</a:t>
+                      </a:r>
                       <a:r>
                         <a:rPr sz="1400" b="0" i="0">
                           <a:solidFill>
@@ -4189,7 +4234,7 @@
                           </a:solidFill>
                           <a:latin typeface="Meiryo UI"/>
                         </a:rPr>
-                        <a:t>**マネフォ固有の複雑さが前職スキルを無効化。** 会計×60超×SaaS/Fintech/AI三層構造は他SaaSと別次元</a:t>
+                        <a:t> 会計×60超×SaaS/Fintech/AI三層構造は他SaaSと別次元</a:t>
                       </a:r>
                     </a:p>
                   </a:txBody>
@@ -4200,10 +4245,10 @@
                   </a:tcPr>
                 </a:tc>
               </a:tr>
-              <a:tr h="320040">
+              <a:tr h="1097280">
                 <a:tc>
                   <a:txBody>
-                    <a:bodyPr/>
+                    <a:bodyPr wrap="square"/>
                     <a:lstStyle/>
                     <a:p>
                       <a:pPr algn="l"/>
@@ -4226,10 +4271,19 @@
                 </a:tc>
                 <a:tc>
                   <a:txBody>
-                    <a:bodyPr/>
+                    <a:bodyPr wrap="square"/>
                     <a:lstStyle/>
                     <a:p>
                       <a:pPr algn="l"/>
+                      <a:r>
+                        <a:rPr sz="1400" b="1" i="0">
+                          <a:solidFill>
+                            <a:srgbClr val="1A1A1A"/>
+                          </a:solidFill>
+                          <a:latin typeface="Meiryo UI"/>
+                        </a:rPr>
+                        <a:t>介入ポイントが見えない。</a:t>
+                      </a:r>
                       <a:r>
                         <a:rPr sz="1400" b="0" i="0">
                           <a:solidFill>
@@ -4237,7 +4291,7 @@
                           </a:solidFill>
                           <a:latin typeface="Meiryo UI"/>
                         </a:rPr>
-                        <a:t>**介入ポイントが見えない。** フェーズ別受注率・担当者別分析不可。戦略はあるが実行を支える基盤がない</a:t>
+                        <a:t> フェーズ別受注率・担当者別分析不可。戦略はあるが実行を支える基盤がない</a:t>
                       </a:r>
                     </a:p>
                   </a:txBody>
@@ -4260,7 +4314,7 @@
         </p:nvSpPr>
         <p:spPr>
           <a:xfrm>
-            <a:off x="838504" y="2766568"/>
+            <a:off x="838504" y="5098288"/>
             <a:ext cx="10515600" cy="12700"/>
           </a:xfrm>
           <a:prstGeom prst="rect">
@@ -4304,8 +4358,8 @@
         </p:nvSpPr>
         <p:spPr>
           <a:xfrm>
-            <a:off x="838504" y="2868168"/>
-            <a:ext cx="10515600" cy="3396386"/>
+            <a:off x="838504" y="5199888"/>
+            <a:ext cx="10515600" cy="1174394"/>
           </a:xfrm>
           <a:prstGeom prst="rect">
             <a:avLst/>
@@ -4342,7 +4396,16 @@
                 </a:solidFill>
                 <a:latin typeface="Meiryo UI"/>
               </a:rPr>
-              <a:t>3仮説の帰着点：**「営業の型が可視化されていないこと」**</a:t>
+              <a:t>3仮説の帰着点：</a:t>
+            </a:r>
+            <a:r>
+              <a:rPr sz="1600" b="1" i="0">
+                <a:solidFill>
+                  <a:srgbClr val="1A1A1A"/>
+                </a:solidFill>
+                <a:latin typeface="Meiryo UI"/>
+              </a:rPr>
+              <a:t>「営業の型が可視化されていないこと」</a:t>
             </a:r>
           </a:p>
         </p:txBody>
@@ -4647,13 +4710,13 @@
           <a:lstStyle/>
           <a:p>
             <a:r>
-              <a:rPr sz="1800" b="0" i="0">
+              <a:rPr sz="1800" b="1" i="0">
                 <a:solidFill>
                   <a:srgbClr val="1A1A1A"/>
                 </a:solidFill>
                 <a:latin typeface="Meiryo UI"/>
               </a:rPr>
-              <a:t>**型の設計×データ可視化×伴走の3施策セットで、採用数に比例して売上が伸びる組織を構築する。**</a:t>
+              <a:t>型の設計×データ可視化×伴走の3施策セットで、採用数に比例して売上が伸びる組織を構築する。</a:t>
             </a:r>
           </a:p>
         </p:txBody>
@@ -4735,7 +4798,7 @@
         <p:spPr>
           <a:xfrm>
             <a:off x="6089954" y="1280160"/>
-            <a:ext cx="12700" cy="2492197"/>
+            <a:ext cx="12700" cy="4984394"/>
           </a:xfrm>
           <a:prstGeom prst="rect">
             <a:avLst/>
@@ -4779,7 +4842,7 @@
         <p:spPr>
           <a:xfrm>
             <a:off x="838504" y="1627632"/>
-            <a:ext cx="5097780" cy="2144725"/>
+            <a:ext cx="5097780" cy="4636922"/>
           </a:xfrm>
           <a:prstGeom prst="rect">
             <a:avLst/>
@@ -4810,13 +4873,13 @@
               <a:t>1. </a:t>
             </a:r>
             <a:r>
-              <a:rPr sz="1600" b="0" i="0">
+              <a:rPr sz="1600" b="1" i="0">
                 <a:solidFill>
                   <a:srgbClr val="1A1A1A"/>
                 </a:solidFill>
                 <a:latin typeface="Meiryo UI"/>
               </a:rPr>
-              <a:t>**受注率のバラつき**</a:t>
+              <a:t>受注率のバラつき</a:t>
             </a:r>
           </a:p>
           <a:p>
@@ -4894,13 +4957,13 @@
               <a:t>2. </a:t>
             </a:r>
             <a:r>
-              <a:rPr sz="1600" b="0" i="0">
+              <a:rPr sz="1600" b="1" i="0">
                 <a:solidFill>
                   <a:srgbClr val="1A1A1A"/>
                 </a:solidFill>
                 <a:latin typeface="Meiryo UI"/>
               </a:rPr>
-              <a:t>**中途がワークしない**</a:t>
+              <a:t>中途がワークしない</a:t>
             </a:r>
           </a:p>
           <a:p>
@@ -4978,13 +5041,13 @@
               <a:t>3. </a:t>
             </a:r>
             <a:r>
-              <a:rPr sz="1600" b="0" i="0">
+              <a:rPr sz="1600" b="1" i="0">
                 <a:solidFill>
                   <a:srgbClr val="1A1A1A"/>
                 </a:solidFill>
                 <a:latin typeface="Meiryo UI"/>
               </a:rPr>
-              <a:t>**介入ポイントが見えない**</a:t>
+              <a:t>介入ポイントが見えない</a:t>
             </a:r>
           </a:p>
           <a:p>
@@ -5054,7 +5117,7 @@
         <p:spPr>
           <a:xfrm>
             <a:off x="6256324" y="1627632"/>
-            <a:ext cx="5097780" cy="2144725"/>
+            <a:ext cx="5097780" cy="4636922"/>
           </a:xfrm>
           <a:prstGeom prst="rect">
             <a:avLst/>
@@ -5085,13 +5148,13 @@
               <a:t>1. </a:t>
             </a:r>
             <a:r>
-              <a:rPr sz="1600" b="0" i="0">
+              <a:rPr sz="1600" b="1" i="0">
                 <a:solidFill>
                   <a:srgbClr val="1A1A1A"/>
                 </a:solidFill>
                 <a:latin typeface="Meiryo UI"/>
               </a:rPr>
-              <a:t>**SEP：会計特化の営業の型を設計**</a:t>
+              <a:t>SEP：会計特化の営業の型を設計</a:t>
             </a:r>
           </a:p>
           <a:p>
@@ -5169,13 +5232,13 @@
               <a:t>2. </a:t>
             </a:r>
             <a:r>
-              <a:rPr sz="1600" b="0" i="0">
+              <a:rPr sz="1600" b="1" i="0">
                 <a:solidFill>
                   <a:srgbClr val="1A1A1A"/>
                 </a:solidFill>
                 <a:latin typeface="Meiryo UI"/>
               </a:rPr>
-              <a:t>**VISUALIZE：介入ポイントを可視化**</a:t>
+              <a:t>VISUALIZE：介入ポイントを可視化</a:t>
             </a:r>
           </a:p>
           <a:p>
@@ -5253,13 +5316,13 @@
               <a:t>3. </a:t>
             </a:r>
             <a:r>
-              <a:rPr sz="1600" b="0" i="0">
+              <a:rPr sz="1600" b="1" i="0">
                 <a:solidFill>
                   <a:srgbClr val="1A1A1A"/>
                 </a:solidFill>
                 <a:latin typeface="Meiryo UI"/>
               </a:rPr>
-              <a:t>**Buddy伴走：戦略と実行の断絶を埋める**</a:t>
+              <a:t>Buddy伴走：戦略と実行の断絶を埋める</a:t>
             </a:r>
           </a:p>
           <a:p>
@@ -5328,7 +5391,7 @@
         </p:nvSpPr>
         <p:spPr>
           <a:xfrm>
-            <a:off x="838504" y="3823157"/>
+            <a:off x="838504" y="6315354"/>
             <a:ext cx="10515600" cy="12700"/>
           </a:xfrm>
           <a:prstGeom prst="rect">
@@ -5372,8 +5435,8 @@
         </p:nvSpPr>
         <p:spPr>
           <a:xfrm>
-            <a:off x="838504" y="3924757"/>
-            <a:ext cx="10515600" cy="2339797"/>
+            <a:off x="838504" y="6416954"/>
+            <a:ext cx="10515600" cy="4831994"/>
           </a:xfrm>
           <a:prstGeom prst="rect">
             <a:avLst/>
@@ -5404,13 +5467,22 @@
               <a:t>● </a:t>
             </a:r>
             <a:r>
-              <a:rPr sz="1600" b="0" i="0">
+              <a:rPr sz="1600" b="1" i="0">
                 <a:solidFill>
                   <a:srgbClr val="1A1A1A"/>
                 </a:solidFill>
                 <a:latin typeface="Meiryo UI"/>
               </a:rPr>
-              <a:t>**第一歩：** 営業の型の可視化（カスタマーパス作成）＋ データ基盤で介入ポイントを可視化</a:t>
+              <a:t>第一歩：</a:t>
+            </a:r>
+            <a:r>
+              <a:rPr sz="1600" b="0" i="0">
+                <a:solidFill>
+                  <a:srgbClr val="1A1A1A"/>
+                </a:solidFill>
+                <a:latin typeface="Meiryo UI"/>
+              </a:rPr>
+              <a:t> 営業の型の可視化（カスタマーパス作成）＋ データ基盤で介入ポイントを可視化</a:t>
             </a:r>
           </a:p>
         </p:txBody>

--- a/slides_p10_p12.pptx
+++ b/slides_p10_p12.pptx
@@ -3565,7 +3565,7 @@
         </p:nvSpPr>
         <p:spPr>
           <a:xfrm>
-            <a:off x="838504" y="3878021"/>
+            <a:off x="838504" y="3878020"/>
             <a:ext cx="10515600" cy="12700"/>
           </a:xfrm>
           <a:prstGeom prst="rect">
@@ -3610,7 +3610,7 @@
           <p:nvPr/>
         </p:nvGraphicFramePr>
         <p:xfrm>
-          <a:off x="838504" y="8811615.0"/>
+          <a:off x="838504" y="3991812"/>
           <a:ext cx="10515600" cy="1463040"/>
         </p:xfrm>
         <a:graphic>
@@ -4359,7 +4359,7 @@
         <p:spPr>
           <a:xfrm>
             <a:off x="838504" y="5199888"/>
-            <a:ext cx="10515600" cy="1174394"/>
+            <a:ext cx="10515600" cy="1064666"/>
           </a:xfrm>
           <a:prstGeom prst="rect">
             <a:avLst/>
@@ -4798,7 +4798,7 @@
         <p:spPr>
           <a:xfrm>
             <a:off x="6089954" y="1280160"/>
-            <a:ext cx="12700" cy="4984394"/>
+            <a:ext cx="12700" cy="2492197"/>
           </a:xfrm>
           <a:prstGeom prst="rect">
             <a:avLst/>
@@ -4842,7 +4842,7 @@
         <p:spPr>
           <a:xfrm>
             <a:off x="838504" y="1627632"/>
-            <a:ext cx="5097780" cy="4636922"/>
+            <a:ext cx="5097780" cy="2144725"/>
           </a:xfrm>
           <a:prstGeom prst="rect">
             <a:avLst/>
@@ -5117,7 +5117,7 @@
         <p:spPr>
           <a:xfrm>
             <a:off x="6256324" y="1627632"/>
-            <a:ext cx="5097780" cy="4636922"/>
+            <a:ext cx="5097780" cy="2144725"/>
           </a:xfrm>
           <a:prstGeom prst="rect">
             <a:avLst/>
@@ -5391,7 +5391,7 @@
         </p:nvSpPr>
         <p:spPr>
           <a:xfrm>
-            <a:off x="838504" y="6315354"/>
+            <a:off x="838504" y="3823157"/>
             <a:ext cx="10515600" cy="12700"/>
           </a:xfrm>
           <a:prstGeom prst="rect">
@@ -5435,8 +5435,8 @@
         </p:nvSpPr>
         <p:spPr>
           <a:xfrm>
-            <a:off x="838504" y="6416954"/>
-            <a:ext cx="10515600" cy="4831994"/>
+            <a:off x="838504" y="3924757"/>
+            <a:ext cx="10515600" cy="2339797"/>
           </a:xfrm>
           <a:prstGeom prst="rect">
             <a:avLst/>

--- a/slides_p10_p12.pptx
+++ b/slides_p10_p12.pptx
@@ -3241,338 +3241,27 @@
                 </a:solidFill>
                 <a:latin typeface="Meiryo UI"/>
               </a:rPr>
-              <a:t>FY28売上900億円の道筋は明確。SaaS・AI・M&amp;Aの3本柱でTAMを5倍に拡大する。</a:t>
-            </a:r>
-          </a:p>
-        </p:txBody>
-      </p:sp>
-      <p:graphicFrame>
-        <p:nvGraphicFramePr>
-          <p:cNvPr id="6" name="Table 5"/>
-          <p:cNvGraphicFramePr>
-            <a:graphicFrameLocks noGrp="1"/>
-          </p:cNvGraphicFramePr>
-          <p:nvPr/>
-        </p:nvGraphicFramePr>
-        <p:xfrm>
-          <a:off x="838504" y="1280160"/>
-          <a:ext cx="10515600" cy="2437332"/>
-        </p:xfrm>
-        <a:graphic>
-          <a:graphicData uri="http://schemas.openxmlformats.org/drawingml/2006/table">
-            <a:tbl>
-              <a:tblPr firstRow="1" bandRow="1">
-                <a:tableStyleId>{5C22544A-7EE6-4342-B048-85BDC9FD1C3A}</a:tableStyleId>
-              </a:tblPr>
-              <a:tblGrid>
-                <a:gridCol w="3505200"/>
-                <a:gridCol w="3505200"/>
-                <a:gridCol w="3505200"/>
-              </a:tblGrid>
-              <a:tr h="365760">
-                <a:tc>
-                  <a:txBody>
-                    <a:bodyPr wrap="square"/>
-                    <a:lstStyle/>
-                    <a:p>
-                      <a:pPr algn="ctr"/>
-                      <a:r>
-                        <a:rPr sz="1400" b="1" i="0">
-                          <a:solidFill>
-                            <a:srgbClr val="FFFFFF"/>
-                          </a:solidFill>
-                          <a:latin typeface="Meiryo UI"/>
-                        </a:rPr>
-                        <a:t>柱</a:t>
-                      </a:r>
-                    </a:p>
-                  </a:txBody>
-                  <a:tcPr>
-                    <a:solidFill>
-                      <a:srgbClr val="1D3461"/>
-                    </a:solidFill>
-                  </a:tcPr>
-                </a:tc>
-                <a:tc>
-                  <a:txBody>
-                    <a:bodyPr wrap="square"/>
-                    <a:lstStyle/>
-                    <a:p>
-                      <a:pPr algn="ctr"/>
-                      <a:r>
-                        <a:rPr sz="1400" b="1" i="0">
-                          <a:solidFill>
-                            <a:srgbClr val="FFFFFF"/>
-                          </a:solidFill>
-                          <a:latin typeface="Meiryo UI"/>
-                        </a:rPr>
-                        <a:t>戦略の核心</a:t>
-                      </a:r>
-                    </a:p>
-                  </a:txBody>
-                  <a:tcPr>
-                    <a:solidFill>
-                      <a:srgbClr val="1D3461"/>
-                    </a:solidFill>
-                  </a:tcPr>
-                </a:tc>
-                <a:tc>
-                  <a:txBody>
-                    <a:bodyPr wrap="square"/>
-                    <a:lstStyle/>
-                    <a:p>
-                      <a:pPr algn="ctr"/>
-                      <a:r>
-                        <a:rPr sz="1400" b="1" i="0">
-                          <a:solidFill>
-                            <a:srgbClr val="FFFFFF"/>
-                          </a:solidFill>
-                          <a:latin typeface="Meiryo UI"/>
-                        </a:rPr>
-                        <a:t>目指す状態</a:t>
-                      </a:r>
-                    </a:p>
-                  </a:txBody>
-                  <a:tcPr>
-                    <a:solidFill>
-                      <a:srgbClr val="1D3461"/>
-                    </a:solidFill>
-                  </a:tcPr>
-                </a:tc>
-              </a:tr>
-              <a:tr h="690524">
-                <a:tc>
-                  <a:txBody>
-                    <a:bodyPr wrap="square"/>
-                    <a:lstStyle/>
-                    <a:p>
-                      <a:pPr algn="l"/>
-                      <a:r>
-                        <a:rPr sz="1400" b="0" i="0">
-                          <a:solidFill>
-                            <a:srgbClr val="1A1A1A"/>
-                          </a:solidFill>
-                          <a:latin typeface="Meiryo UI"/>
-                        </a:rPr>
-                        <a:t>SaaS：バックオフィス価値向上</a:t>
-                      </a:r>
-                    </a:p>
-                  </a:txBody>
-                  <a:tcPr>
-                    <a:solidFill>
-                      <a:srgbClr val="F5F7FA"/>
-                    </a:solidFill>
-                  </a:tcPr>
-                </a:tc>
-                <a:tc>
-                  <a:txBody>
-                    <a:bodyPr wrap="square"/>
-                    <a:lstStyle/>
-                    <a:p>
-                      <a:pPr algn="l"/>
-                      <a:r>
-                        <a:rPr sz="1400" b="0" i="0">
-                          <a:solidFill>
-                            <a:srgbClr val="1A1A1A"/>
-                          </a:solidFill>
-                          <a:latin typeface="Meiryo UI"/>
-                        </a:rPr>
-                        <a:t>60超プロダクトで会計・人事・法務を網羅</a:t>
-                      </a:r>
-                    </a:p>
-                  </a:txBody>
-                  <a:tcPr>
-                    <a:solidFill>
-                      <a:srgbClr val="F5F7FA"/>
-                    </a:solidFill>
-                  </a:tcPr>
-                </a:tc>
-                <a:tc>
-                  <a:txBody>
-                    <a:bodyPr wrap="square"/>
-                    <a:lstStyle/>
-                    <a:p>
-                      <a:pPr algn="l"/>
-                      <a:r>
-                        <a:rPr sz="1400" b="0" i="0">
-                          <a:solidFill>
-                            <a:srgbClr val="1A1A1A"/>
-                          </a:solidFill>
-                          <a:latin typeface="Meiryo UI"/>
-                        </a:rPr>
-                        <a:t>顧客基盤拡大とARPA向上</a:t>
-                      </a:r>
-                    </a:p>
-                  </a:txBody>
-                  <a:tcPr>
-                    <a:solidFill>
-                      <a:srgbClr val="F5F7FA"/>
-                    </a:solidFill>
-                  </a:tcPr>
-                </a:tc>
-              </a:tr>
-              <a:tr h="690524">
-                <a:tc>
-                  <a:txBody>
-                    <a:bodyPr wrap="square"/>
-                    <a:lstStyle/>
-                    <a:p>
-                      <a:pPr algn="l"/>
-                      <a:r>
-                        <a:rPr sz="1400" b="0" i="0">
-                          <a:solidFill>
-                            <a:srgbClr val="1A1A1A"/>
-                          </a:solidFill>
-                          <a:latin typeface="Meiryo UI"/>
-                        </a:rPr>
-                        <a:t>AI：AIプロダクト開発・提供</a:t>
-                      </a:r>
-                    </a:p>
-                  </a:txBody>
-                  <a:tcPr>
-                    <a:solidFill>
-                      <a:srgbClr val="FFFFFF"/>
-                    </a:solidFill>
-                  </a:tcPr>
-                </a:tc>
-                <a:tc>
-                  <a:txBody>
-                    <a:bodyPr wrap="square"/>
-                    <a:lstStyle/>
-                    <a:p>
-                      <a:pPr algn="l"/>
-                      <a:r>
-                        <a:rPr sz="1400" b="0" i="0">
-                          <a:solidFill>
-                            <a:srgbClr val="1A1A1A"/>
-                          </a:solidFill>
-                          <a:latin typeface="Meiryo UI"/>
-                        </a:rPr>
-                        <a:t>AIエージェント・AIネイティブ・AI×BPO</a:t>
-                      </a:r>
-                    </a:p>
-                  </a:txBody>
-                  <a:tcPr>
-                    <a:solidFill>
-                      <a:srgbClr val="FFFFFF"/>
-                    </a:solidFill>
-                  </a:tcPr>
-                </a:tc>
-                <a:tc>
-                  <a:txBody>
-                    <a:bodyPr wrap="square"/>
-                    <a:lstStyle/>
-                    <a:p>
-                      <a:pPr algn="l"/>
-                      <a:r>
-                        <a:rPr sz="1400" b="0" i="0">
-                          <a:solidFill>
-                            <a:srgbClr val="1A1A1A"/>
-                          </a:solidFill>
-                          <a:latin typeface="Meiryo UI"/>
-                        </a:rPr>
-                        <a:t>業務の自律処理</a:t>
-                      </a:r>
-                    </a:p>
-                  </a:txBody>
-                  <a:tcPr>
-                    <a:solidFill>
-                      <a:srgbClr val="FFFFFF"/>
-                    </a:solidFill>
-                  </a:tcPr>
-                </a:tc>
-              </a:tr>
-              <a:tr h="690524">
-                <a:tc>
-                  <a:txBody>
-                    <a:bodyPr wrap="square"/>
-                    <a:lstStyle/>
-                    <a:p>
-                      <a:pPr algn="l"/>
-                      <a:r>
-                        <a:rPr sz="1400" b="0" i="0">
-                          <a:solidFill>
-                            <a:srgbClr val="1A1A1A"/>
-                          </a:solidFill>
-                          <a:latin typeface="Meiryo UI"/>
-                        </a:rPr>
-                        <a:t>M&amp;A：戦略的サービス拡充</a:t>
-                      </a:r>
-                    </a:p>
-                  </a:txBody>
-                  <a:tcPr>
-                    <a:solidFill>
-                      <a:srgbClr val="F5F7FA"/>
-                    </a:solidFill>
-                  </a:tcPr>
-                </a:tc>
-                <a:tc>
-                  <a:txBody>
-                    <a:bodyPr wrap="square"/>
-                    <a:lstStyle/>
-                    <a:p>
-                      <a:pPr algn="l"/>
-                      <a:r>
-                        <a:rPr sz="1400" b="0" i="0">
-                          <a:solidFill>
-                            <a:srgbClr val="1A1A1A"/>
-                          </a:solidFill>
-                          <a:latin typeface="Meiryo UI"/>
-                        </a:rPr>
-                        <a:t>経営管理領域を全方位でカバー</a:t>
-                      </a:r>
-                    </a:p>
-                  </a:txBody>
-                  <a:tcPr>
-                    <a:solidFill>
-                      <a:srgbClr val="F5F7FA"/>
-                    </a:solidFill>
-                  </a:tcPr>
-                </a:tc>
-                <a:tc>
-                  <a:txBody>
-                    <a:bodyPr wrap="square"/>
-                    <a:lstStyle/>
-                    <a:p>
-                      <a:pPr algn="l"/>
-                      <a:r>
-                        <a:rPr sz="1400" b="0" i="0">
-                          <a:solidFill>
-                            <a:srgbClr val="1A1A1A"/>
-                          </a:solidFill>
-                          <a:latin typeface="Meiryo UI"/>
-                        </a:rPr>
-                        <a:t>サービスラインナップ拡充</a:t>
-                      </a:r>
-                    </a:p>
-                  </a:txBody>
-                  <a:tcPr>
-                    <a:solidFill>
-                      <a:srgbClr val="F5F7FA"/>
-                    </a:solidFill>
-                  </a:tcPr>
-                </a:tc>
-              </a:tr>
-            </a:tbl>
-          </a:graphicData>
-        </a:graphic>
-      </p:graphicFrame>
-      <p:sp>
-        <p:nvSpPr>
-          <p:cNvPr id="7" name="Rectangle 6"/>
+              <a:t>貴社の成長戦略は「No.1 Backoffice AI Company」の実現。「SaaS価値向上」「AIプロダクト」「M&amp;A」を3本柱とし、FY28で売上高900億円を目指す。</a:t>
+            </a:r>
+          </a:p>
+        </p:txBody>
+      </p:sp>
+      <p:sp>
+        <p:nvSpPr>
+          <p:cNvPr id="6" name="Rectangle 5"/>
           <p:cNvSpPr/>
           <p:nvPr/>
         </p:nvSpPr>
         <p:spPr>
           <a:xfrm>
-            <a:off x="838504" y="3878020"/>
-            <a:ext cx="10515600" cy="12700"/>
+            <a:off x="838504" y="1280160"/>
+            <a:ext cx="3352800" cy="4408322"/>
           </a:xfrm>
           <a:prstGeom prst="rect">
             <a:avLst/>
           </a:prstGeom>
           <a:solidFill>
-            <a:srgbClr val="CCCCCC"/>
+            <a:srgbClr val="F5F5F5"/>
           </a:solidFill>
           <a:ln>
             <a:noFill/>
@@ -3601,149 +3290,693 @@
           </a:p>
         </p:txBody>
       </p:sp>
-      <p:graphicFrame>
-        <p:nvGraphicFramePr>
-          <p:cNvPr id="8" name="Table 7"/>
-          <p:cNvGraphicFramePr>
-            <a:graphicFrameLocks noGrp="1"/>
-          </p:cNvGraphicFramePr>
+      <p:sp>
+        <p:nvSpPr>
+          <p:cNvPr id="7" name="Rectangle 6"/>
+          <p:cNvSpPr/>
           <p:nvPr/>
-        </p:nvGraphicFramePr>
-        <p:xfrm>
-          <a:off x="838504" y="3991812"/>
-          <a:ext cx="10515600" cy="1463040"/>
-        </p:xfrm>
-        <a:graphic>
-          <a:graphicData uri="http://schemas.openxmlformats.org/drawingml/2006/table">
-            <a:tbl>
-              <a:tblPr firstRow="1" bandRow="1">
-                <a:tableStyleId>{5C22544A-7EE6-4342-B048-85BDC9FD1C3A}</a:tableStyleId>
-              </a:tblPr>
-              <a:tblGrid>
-                <a:gridCol w="5257800"/>
-                <a:gridCol w="5257800"/>
-              </a:tblGrid>
-              <a:tr h="365760">
-                <a:tc>
-                  <a:txBody>
-                    <a:bodyPr wrap="square"/>
-                    <a:lstStyle/>
-                    <a:p>
-                      <a:pPr algn="ctr"/>
-                      <a:r>
-                        <a:rPr sz="1400" b="1" i="0">
-                          <a:solidFill>
-                            <a:srgbClr val="FFFFFF"/>
-                          </a:solidFill>
-                          <a:latin typeface="Meiryo UI"/>
-                        </a:rPr>
-                        <a:t>TAM拡大</a:t>
-                      </a:r>
-                    </a:p>
-                  </a:txBody>
-                  <a:tcPr>
-                    <a:solidFill>
-                      <a:srgbClr val="1D3461"/>
-                    </a:solidFill>
-                  </a:tcPr>
-                </a:tc>
-                <a:tc>
-                  <a:txBody>
-                    <a:bodyPr wrap="square"/>
-                    <a:lstStyle/>
-                    <a:p>
-                      <a:pPr algn="ctr"/>
-                      <a:r>
-                        <a:rPr sz="1400" b="1" i="0">
-                          <a:solidFill>
-                            <a:srgbClr val="FFFFFF"/>
-                          </a:solidFill>
-                          <a:latin typeface="Meiryo UI"/>
-                        </a:rPr>
-                        <a:t>FY28財務目標</a:t>
-                      </a:r>
-                    </a:p>
-                  </a:txBody>
-                  <a:tcPr>
-                    <a:solidFill>
-                      <a:srgbClr val="1D3461"/>
-                    </a:solidFill>
-                  </a:tcPr>
-                </a:tc>
-              </a:tr>
-              <a:tr h="1097280">
-                <a:tc>
-                  <a:txBody>
-                    <a:bodyPr wrap="square"/>
-                    <a:lstStyle/>
-                    <a:p>
-                      <a:pPr algn="l"/>
-                      <a:r>
-                        <a:rPr sz="1400" b="0" i="0">
-                          <a:solidFill>
-                            <a:srgbClr val="1A1A1A"/>
-                          </a:solidFill>
-                          <a:latin typeface="Meiryo UI"/>
-                        </a:rPr>
-                        <a:t>デジタルツール市場 2.8兆円 → </a:t>
-                      </a:r>
-                      <a:r>
-                        <a:rPr sz="1400" b="1" i="0">
-                          <a:solidFill>
-                            <a:srgbClr val="1A1A1A"/>
-                          </a:solidFill>
-                          <a:latin typeface="Meiryo UI"/>
-                        </a:rPr>
-                        <a:t>デジタルワーカー市場 14.1兆円</a:t>
-                      </a:r>
-                      <a:r>
-                        <a:rPr sz="1400" b="0" i="0">
-                          <a:solidFill>
-                            <a:srgbClr val="1A1A1A"/>
-                          </a:solidFill>
-                          <a:latin typeface="Meiryo UI"/>
-                        </a:rPr>
-                        <a:t>（5倍）</a:t>
-                      </a:r>
-                    </a:p>
-                  </a:txBody>
-                  <a:tcPr>
-                    <a:solidFill>
-                      <a:srgbClr val="F5F7FA"/>
-                    </a:solidFill>
-                  </a:tcPr>
-                </a:tc>
-                <a:tc>
-                  <a:txBody>
-                    <a:bodyPr wrap="square"/>
-                    <a:lstStyle/>
-                    <a:p>
-                      <a:pPr algn="l"/>
-                      <a:r>
-                        <a:rPr sz="1400" b="0" i="0">
-                          <a:solidFill>
-                            <a:srgbClr val="1A1A1A"/>
-                          </a:solidFill>
-                          <a:latin typeface="Meiryo UI"/>
-                        </a:rPr>
-                        <a:t>売上900億・EBITDA270億・事業CF180億</a:t>
-                      </a:r>
-                    </a:p>
-                  </a:txBody>
-                  <a:tcPr>
-                    <a:solidFill>
-                      <a:srgbClr val="F5F7FA"/>
-                    </a:solidFill>
-                  </a:tcPr>
-                </a:tc>
-              </a:tr>
-            </a:tbl>
-          </a:graphicData>
-        </a:graphic>
-      </p:graphicFrame>
+        </p:nvSpPr>
+        <p:spPr>
+          <a:xfrm>
+            <a:off x="838504" y="1280160"/>
+            <a:ext cx="3352800" cy="101600"/>
+          </a:xfrm>
+          <a:prstGeom prst="rect">
+            <a:avLst/>
+          </a:prstGeom>
+          <a:solidFill>
+            <a:srgbClr val="0066CD"/>
+          </a:solidFill>
+          <a:ln>
+            <a:noFill/>
+          </a:ln>
+          <a:effectLst/>
+        </p:spPr>
+        <p:style>
+          <a:lnRef idx="1">
+            <a:schemeClr val="accent1"/>
+          </a:lnRef>
+          <a:fillRef idx="3">
+            <a:schemeClr val="accent1"/>
+          </a:fillRef>
+          <a:effectRef idx="2">
+            <a:schemeClr val="accent1"/>
+          </a:effectRef>
+          <a:fontRef idx="minor">
+            <a:schemeClr val="lt1"/>
+          </a:fontRef>
+        </p:style>
+        <p:txBody>
+          <a:bodyPr rtlCol="0" anchor="ctr"/>
+          <a:lstStyle/>
+          <a:p>
+            <a:pPr algn="ctr"/>
+          </a:p>
+        </p:txBody>
+      </p:sp>
+      <p:sp>
+        <p:nvSpPr>
+          <p:cNvPr id="8" name="Oval 7"/>
+          <p:cNvSpPr/>
+          <p:nvPr/>
+        </p:nvSpPr>
+        <p:spPr>
+          <a:xfrm>
+            <a:off x="2286304" y="1518920"/>
+            <a:ext cx="457200" cy="457200"/>
+          </a:xfrm>
+          <a:prstGeom prst="ellipse">
+            <a:avLst/>
+          </a:prstGeom>
+          <a:solidFill>
+            <a:srgbClr val="0066CD"/>
+          </a:solidFill>
+          <a:ln>
+            <a:noFill/>
+          </a:ln>
+          <a:effectLst/>
+        </p:spPr>
+        <p:style>
+          <a:lnRef idx="1">
+            <a:schemeClr val="accent1"/>
+          </a:lnRef>
+          <a:fillRef idx="3">
+            <a:schemeClr val="accent1"/>
+          </a:fillRef>
+          <a:effectRef idx="2">
+            <a:schemeClr val="accent1"/>
+          </a:effectRef>
+          <a:fontRef idx="minor">
+            <a:schemeClr val="lt1"/>
+          </a:fontRef>
+        </p:style>
+        <p:txBody>
+          <a:bodyPr rtlCol="0" anchor="ctr" wrap="none"/>
+          <a:lstStyle/>
+          <a:p>
+            <a:pPr algn="ctr"/>
+            <a:r>
+              <a:rPr sz="1000" b="1" i="0">
+                <a:solidFill>
+                  <a:srgbClr val="FFFFFF"/>
+                </a:solidFill>
+                <a:latin typeface="Meiryo UI"/>
+              </a:rPr>
+              <a:t>SaaS</a:t>
+            </a:r>
+          </a:p>
+        </p:txBody>
+      </p:sp>
+      <p:sp>
+        <p:nvSpPr>
+          <p:cNvPr id="9" name="TextBox 8"/>
+          <p:cNvSpPr txBox="1"/>
+          <p:nvPr/>
+        </p:nvSpPr>
+        <p:spPr>
+          <a:xfrm>
+            <a:off x="948232" y="2067560"/>
+            <a:ext cx="3133344" cy="457200"/>
+          </a:xfrm>
+          <a:prstGeom prst="rect">
+            <a:avLst/>
+          </a:prstGeom>
+          <a:noFill/>
+          <a:effectLst/>
+        </p:spPr>
+        <p:txBody>
+          <a:bodyPr wrap="square">
+            <a:spAutoFit/>
+          </a:bodyPr>
+          <a:lstStyle/>
+          <a:p>
+            <a:pPr algn="ctr"/>
+            <a:r>
+              <a:rPr sz="1400" b="1" i="0">
+                <a:solidFill>
+                  <a:srgbClr val="1A1A1A"/>
+                </a:solidFill>
+                <a:latin typeface="Meiryo UI"/>
+              </a:rPr>
+              <a:t>バックオフィスSaaSの価値向上</a:t>
+            </a:r>
+          </a:p>
+        </p:txBody>
+      </p:sp>
+      <p:sp>
+        <p:nvSpPr>
+          <p:cNvPr id="10" name="TextBox 9"/>
+          <p:cNvSpPr txBox="1"/>
+          <p:nvPr/>
+        </p:nvSpPr>
+        <p:spPr>
+          <a:xfrm>
+            <a:off x="948232" y="2524760"/>
+            <a:ext cx="3133344" cy="3163722"/>
+          </a:xfrm>
+          <a:prstGeom prst="rect">
+            <a:avLst/>
+          </a:prstGeom>
+          <a:noFill/>
+          <a:effectLst/>
+        </p:spPr>
+        <p:txBody>
+          <a:bodyPr wrap="square">
+            <a:spAutoFit/>
+          </a:bodyPr>
+          <a:lstStyle/>
+          <a:p>
+            <a:pPr algn="ctr"/>
+            <a:r>
+              <a:rPr sz="1200" b="0" i="0">
+                <a:solidFill>
+                  <a:srgbClr val="888888"/>
+                </a:solidFill>
+                <a:latin typeface="Meiryo UI"/>
+              </a:rPr>
+              <a:t>60超のプロダクトで会計・人事・法務を網羅。顧客基盤の拡大とARPA向上</a:t>
+            </a:r>
+          </a:p>
+        </p:txBody>
+      </p:sp>
+      <p:sp>
+        <p:nvSpPr>
+          <p:cNvPr id="11" name="Rectangle 10"/>
+          <p:cNvSpPr/>
+          <p:nvPr/>
+        </p:nvSpPr>
+        <p:spPr>
+          <a:xfrm>
+            <a:off x="4419904" y="1280160"/>
+            <a:ext cx="3352800" cy="4408322"/>
+          </a:xfrm>
+          <a:prstGeom prst="rect">
+            <a:avLst/>
+          </a:prstGeom>
+          <a:solidFill>
+            <a:srgbClr val="F5F5F5"/>
+          </a:solidFill>
+          <a:ln>
+            <a:noFill/>
+          </a:ln>
+          <a:effectLst/>
+        </p:spPr>
+        <p:style>
+          <a:lnRef idx="1">
+            <a:schemeClr val="accent1"/>
+          </a:lnRef>
+          <a:fillRef idx="3">
+            <a:schemeClr val="accent1"/>
+          </a:fillRef>
+          <a:effectRef idx="2">
+            <a:schemeClr val="accent1"/>
+          </a:effectRef>
+          <a:fontRef idx="minor">
+            <a:schemeClr val="lt1"/>
+          </a:fontRef>
+        </p:style>
+        <p:txBody>
+          <a:bodyPr rtlCol="0" anchor="ctr"/>
+          <a:lstStyle/>
+          <a:p>
+            <a:pPr algn="ctr"/>
+          </a:p>
+        </p:txBody>
+      </p:sp>
+      <p:sp>
+        <p:nvSpPr>
+          <p:cNvPr id="12" name="Rectangle 11"/>
+          <p:cNvSpPr/>
+          <p:nvPr/>
+        </p:nvSpPr>
+        <p:spPr>
+          <a:xfrm>
+            <a:off x="4419904" y="1280160"/>
+            <a:ext cx="3352800" cy="101600"/>
+          </a:xfrm>
+          <a:prstGeom prst="rect">
+            <a:avLst/>
+          </a:prstGeom>
+          <a:solidFill>
+            <a:srgbClr val="E07F30"/>
+          </a:solidFill>
+          <a:ln>
+            <a:noFill/>
+          </a:ln>
+          <a:effectLst/>
+        </p:spPr>
+        <p:style>
+          <a:lnRef idx="1">
+            <a:schemeClr val="accent1"/>
+          </a:lnRef>
+          <a:fillRef idx="3">
+            <a:schemeClr val="accent1"/>
+          </a:fillRef>
+          <a:effectRef idx="2">
+            <a:schemeClr val="accent1"/>
+          </a:effectRef>
+          <a:fontRef idx="minor">
+            <a:schemeClr val="lt1"/>
+          </a:fontRef>
+        </p:style>
+        <p:txBody>
+          <a:bodyPr rtlCol="0" anchor="ctr"/>
+          <a:lstStyle/>
+          <a:p>
+            <a:pPr algn="ctr"/>
+          </a:p>
+        </p:txBody>
+      </p:sp>
+      <p:sp>
+        <p:nvSpPr>
+          <p:cNvPr id="13" name="Oval 12"/>
+          <p:cNvSpPr/>
+          <p:nvPr/>
+        </p:nvSpPr>
+        <p:spPr>
+          <a:xfrm>
+            <a:off x="5867704" y="1518920"/>
+            <a:ext cx="457200" cy="457200"/>
+          </a:xfrm>
+          <a:prstGeom prst="ellipse">
+            <a:avLst/>
+          </a:prstGeom>
+          <a:solidFill>
+            <a:srgbClr val="E07F30"/>
+          </a:solidFill>
+          <a:ln>
+            <a:noFill/>
+          </a:ln>
+          <a:effectLst/>
+        </p:spPr>
+        <p:style>
+          <a:lnRef idx="1">
+            <a:schemeClr val="accent1"/>
+          </a:lnRef>
+          <a:fillRef idx="3">
+            <a:schemeClr val="accent1"/>
+          </a:fillRef>
+          <a:effectRef idx="2">
+            <a:schemeClr val="accent1"/>
+          </a:effectRef>
+          <a:fontRef idx="minor">
+            <a:schemeClr val="lt1"/>
+          </a:fontRef>
+        </p:style>
+        <p:txBody>
+          <a:bodyPr rtlCol="0" anchor="ctr" wrap="none"/>
+          <a:lstStyle/>
+          <a:p>
+            <a:pPr algn="ctr"/>
+            <a:r>
+              <a:rPr sz="1000" b="1" i="0">
+                <a:solidFill>
+                  <a:srgbClr val="FFFFFF"/>
+                </a:solidFill>
+                <a:latin typeface="Meiryo UI"/>
+              </a:rPr>
+              <a:t>AI</a:t>
+            </a:r>
+          </a:p>
+        </p:txBody>
+      </p:sp>
+      <p:sp>
+        <p:nvSpPr>
+          <p:cNvPr id="14" name="TextBox 13"/>
+          <p:cNvSpPr txBox="1"/>
+          <p:nvPr/>
+        </p:nvSpPr>
+        <p:spPr>
+          <a:xfrm>
+            <a:off x="4529632" y="2067560"/>
+            <a:ext cx="3133344" cy="457200"/>
+          </a:xfrm>
+          <a:prstGeom prst="rect">
+            <a:avLst/>
+          </a:prstGeom>
+          <a:noFill/>
+          <a:effectLst/>
+        </p:spPr>
+        <p:txBody>
+          <a:bodyPr wrap="square">
+            <a:spAutoFit/>
+          </a:bodyPr>
+          <a:lstStyle/>
+          <a:p>
+            <a:pPr algn="ctr"/>
+            <a:r>
+              <a:rPr sz="1400" b="1" i="0">
+                <a:solidFill>
+                  <a:srgbClr val="1A1A1A"/>
+                </a:solidFill>
+                <a:latin typeface="Meiryo UI"/>
+              </a:rPr>
+              <a:t>AIプロダクトの開発・提供</a:t>
+            </a:r>
+          </a:p>
+        </p:txBody>
+      </p:sp>
+      <p:sp>
+        <p:nvSpPr>
+          <p:cNvPr id="15" name="TextBox 14"/>
+          <p:cNvSpPr txBox="1"/>
+          <p:nvPr/>
+        </p:nvSpPr>
+        <p:spPr>
+          <a:xfrm>
+            <a:off x="4529632" y="2524760"/>
+            <a:ext cx="3133344" cy="3163722"/>
+          </a:xfrm>
+          <a:prstGeom prst="rect">
+            <a:avLst/>
+          </a:prstGeom>
+          <a:noFill/>
+          <a:effectLst/>
+        </p:spPr>
+        <p:txBody>
+          <a:bodyPr wrap="square">
+            <a:spAutoFit/>
+          </a:bodyPr>
+          <a:lstStyle/>
+          <a:p>
+            <a:pPr algn="ctr"/>
+            <a:r>
+              <a:rPr sz="1200" b="0" i="0">
+                <a:solidFill>
+                  <a:srgbClr val="888888"/>
+                </a:solidFill>
+                <a:latin typeface="Meiryo UI"/>
+              </a:rPr>
+              <a:t>AIエージェント・AIネイティブプロダクト・AI×BPOで業務を自律処理</a:t>
+            </a:r>
+          </a:p>
+        </p:txBody>
+      </p:sp>
+      <p:sp>
+        <p:nvSpPr>
+          <p:cNvPr id="16" name="Rectangle 15"/>
+          <p:cNvSpPr/>
+          <p:nvPr/>
+        </p:nvSpPr>
+        <p:spPr>
+          <a:xfrm>
+            <a:off x="8001304" y="1280160"/>
+            <a:ext cx="3352800" cy="4408322"/>
+          </a:xfrm>
+          <a:prstGeom prst="rect">
+            <a:avLst/>
+          </a:prstGeom>
+          <a:solidFill>
+            <a:srgbClr val="F5F5F5"/>
+          </a:solidFill>
+          <a:ln>
+            <a:noFill/>
+          </a:ln>
+          <a:effectLst/>
+        </p:spPr>
+        <p:style>
+          <a:lnRef idx="1">
+            <a:schemeClr val="accent1"/>
+          </a:lnRef>
+          <a:fillRef idx="3">
+            <a:schemeClr val="accent1"/>
+          </a:fillRef>
+          <a:effectRef idx="2">
+            <a:schemeClr val="accent1"/>
+          </a:effectRef>
+          <a:fontRef idx="minor">
+            <a:schemeClr val="lt1"/>
+          </a:fontRef>
+        </p:style>
+        <p:txBody>
+          <a:bodyPr rtlCol="0" anchor="ctr"/>
+          <a:lstStyle/>
+          <a:p>
+            <a:pPr algn="ctr"/>
+          </a:p>
+        </p:txBody>
+      </p:sp>
+      <p:sp>
+        <p:nvSpPr>
+          <p:cNvPr id="17" name="Rectangle 16"/>
+          <p:cNvSpPr/>
+          <p:nvPr/>
+        </p:nvSpPr>
+        <p:spPr>
+          <a:xfrm>
+            <a:off x="8001304" y="1280160"/>
+            <a:ext cx="3352800" cy="101600"/>
+          </a:xfrm>
+          <a:prstGeom prst="rect">
+            <a:avLst/>
+          </a:prstGeom>
+          <a:solidFill>
+            <a:srgbClr val="7B61C5"/>
+          </a:solidFill>
+          <a:ln>
+            <a:noFill/>
+          </a:ln>
+          <a:effectLst/>
+        </p:spPr>
+        <p:style>
+          <a:lnRef idx="1">
+            <a:schemeClr val="accent1"/>
+          </a:lnRef>
+          <a:fillRef idx="3">
+            <a:schemeClr val="accent1"/>
+          </a:fillRef>
+          <a:effectRef idx="2">
+            <a:schemeClr val="accent1"/>
+          </a:effectRef>
+          <a:fontRef idx="minor">
+            <a:schemeClr val="lt1"/>
+          </a:fontRef>
+        </p:style>
+        <p:txBody>
+          <a:bodyPr rtlCol="0" anchor="ctr"/>
+          <a:lstStyle/>
+          <a:p>
+            <a:pPr algn="ctr"/>
+          </a:p>
+        </p:txBody>
+      </p:sp>
+      <p:sp>
+        <p:nvSpPr>
+          <p:cNvPr id="18" name="Oval 17"/>
+          <p:cNvSpPr/>
+          <p:nvPr/>
+        </p:nvSpPr>
+        <p:spPr>
+          <a:xfrm>
+            <a:off x="9449104" y="1518920"/>
+            <a:ext cx="457200" cy="457200"/>
+          </a:xfrm>
+          <a:prstGeom prst="ellipse">
+            <a:avLst/>
+          </a:prstGeom>
+          <a:solidFill>
+            <a:srgbClr val="7B61C5"/>
+          </a:solidFill>
+          <a:ln>
+            <a:noFill/>
+          </a:ln>
+          <a:effectLst/>
+        </p:spPr>
+        <p:style>
+          <a:lnRef idx="1">
+            <a:schemeClr val="accent1"/>
+          </a:lnRef>
+          <a:fillRef idx="3">
+            <a:schemeClr val="accent1"/>
+          </a:fillRef>
+          <a:effectRef idx="2">
+            <a:schemeClr val="accent1"/>
+          </a:effectRef>
+          <a:fontRef idx="minor">
+            <a:schemeClr val="lt1"/>
+          </a:fontRef>
+        </p:style>
+        <p:txBody>
+          <a:bodyPr rtlCol="0" anchor="ctr" wrap="none"/>
+          <a:lstStyle/>
+          <a:p>
+            <a:pPr algn="ctr"/>
+            <a:r>
+              <a:rPr sz="1000" b="1" i="0">
+                <a:solidFill>
+                  <a:srgbClr val="FFFFFF"/>
+                </a:solidFill>
+                <a:latin typeface="Meiryo UI"/>
+              </a:rPr>
+              <a:t>M&amp;A</a:t>
+            </a:r>
+          </a:p>
+        </p:txBody>
+      </p:sp>
+      <p:sp>
+        <p:nvSpPr>
+          <p:cNvPr id="19" name="TextBox 18"/>
+          <p:cNvSpPr txBox="1"/>
+          <p:nvPr/>
+        </p:nvSpPr>
+        <p:spPr>
+          <a:xfrm>
+            <a:off x="8111032" y="2067560"/>
+            <a:ext cx="3133344" cy="457200"/>
+          </a:xfrm>
+          <a:prstGeom prst="rect">
+            <a:avLst/>
+          </a:prstGeom>
+          <a:noFill/>
+          <a:effectLst/>
+        </p:spPr>
+        <p:txBody>
+          <a:bodyPr wrap="square">
+            <a:spAutoFit/>
+          </a:bodyPr>
+          <a:lstStyle/>
+          <a:p>
+            <a:pPr algn="ctr"/>
+            <a:r>
+              <a:rPr sz="1400" b="1" i="0">
+                <a:solidFill>
+                  <a:srgbClr val="1A1A1A"/>
+                </a:solidFill>
+                <a:latin typeface="Meiryo UI"/>
+              </a:rPr>
+              <a:t>M&amp;A戦略の遂行</a:t>
+            </a:r>
+          </a:p>
+        </p:txBody>
+      </p:sp>
+      <p:sp>
+        <p:nvSpPr>
+          <p:cNvPr id="20" name="TextBox 19"/>
+          <p:cNvSpPr txBox="1"/>
+          <p:nvPr/>
+        </p:nvSpPr>
+        <p:spPr>
+          <a:xfrm>
+            <a:off x="8111032" y="2524760"/>
+            <a:ext cx="3133344" cy="3163722"/>
+          </a:xfrm>
+          <a:prstGeom prst="rect">
+            <a:avLst/>
+          </a:prstGeom>
+          <a:noFill/>
+          <a:effectLst/>
+        </p:spPr>
+        <p:txBody>
+          <a:bodyPr wrap="square">
+            <a:spAutoFit/>
+          </a:bodyPr>
+          <a:lstStyle/>
+          <a:p>
+            <a:pPr algn="ctr"/>
+            <a:r>
+              <a:rPr sz="1200" b="0" i="0">
+                <a:solidFill>
+                  <a:srgbClr val="888888"/>
+                </a:solidFill>
+                <a:latin typeface="Meiryo UI"/>
+              </a:rPr>
+              <a:t>サービスラインナップ拡充。経営管理領域を全方位でカバーする体制を構築</a:t>
+            </a:r>
+          </a:p>
+        </p:txBody>
+      </p:sp>
+      <p:sp>
+        <p:nvSpPr>
+          <p:cNvPr id="21" name="Rectangle 20"/>
+          <p:cNvSpPr/>
+          <p:nvPr/>
+        </p:nvSpPr>
+        <p:spPr>
+          <a:xfrm>
+            <a:off x="838504" y="5779922"/>
+            <a:ext cx="10515600" cy="502920"/>
+          </a:xfrm>
+          <a:prstGeom prst="rect">
+            <a:avLst/>
+          </a:prstGeom>
+          <a:solidFill>
+            <a:srgbClr val="1D3461"/>
+          </a:solidFill>
+          <a:ln>
+            <a:noFill/>
+          </a:ln>
+          <a:effectLst/>
+        </p:spPr>
+        <p:style>
+          <a:lnRef idx="1">
+            <a:schemeClr val="accent1"/>
+          </a:lnRef>
+          <a:fillRef idx="3">
+            <a:schemeClr val="accent1"/>
+          </a:fillRef>
+          <a:effectRef idx="2">
+            <a:schemeClr val="accent1"/>
+          </a:effectRef>
+          <a:fontRef idx="minor">
+            <a:schemeClr val="lt1"/>
+          </a:fontRef>
+        </p:style>
+        <p:txBody>
+          <a:bodyPr rtlCol="0" anchor="ctr"/>
+          <a:lstStyle/>
+          <a:p>
+            <a:pPr algn="ctr"/>
+          </a:p>
+        </p:txBody>
+      </p:sp>
+      <p:sp>
+        <p:nvSpPr>
+          <p:cNvPr id="22" name="TextBox 21"/>
+          <p:cNvSpPr txBox="1"/>
+          <p:nvPr/>
+        </p:nvSpPr>
+        <p:spPr>
+          <a:xfrm>
+            <a:off x="1021384" y="5779922"/>
+            <a:ext cx="10149840" cy="502920"/>
+          </a:xfrm>
+          <a:prstGeom prst="rect">
+            <a:avLst/>
+          </a:prstGeom>
+          <a:noFill/>
+          <a:effectLst/>
+        </p:spPr>
+        <p:txBody>
+          <a:bodyPr wrap="square">
+            <a:spAutoFit/>
+          </a:bodyPr>
+          <a:lstStyle/>
+          <a:p>
+            <a:pPr algn="ctr"/>
+            <a:r>
+              <a:rPr sz="1400" b="1" i="0">
+                <a:solidFill>
+                  <a:srgbClr val="FFFFFF"/>
+                </a:solidFill>
+                <a:latin typeface="Meiryo UI"/>
+              </a:rPr>
+              <a:t>TAMの5倍拡大：</a:t>
+            </a:r>
+            <a:r>
+              <a:rPr sz="1400" b="0" i="0">
+                <a:solidFill>
+                  <a:srgbClr val="FFFFFF"/>
+                </a:solidFill>
+                <a:latin typeface="Meiryo UI"/>
+              </a:rPr>
+              <a:t> デジタルツール市場（2.8兆円）→ デジタルワーカー市場（14.1兆円）へ　｜　FY28目標：売上900億円以上 / EBITDA270億円以上 / 事業CF180億円以上</a:t>
+            </a:r>
+          </a:p>
+        </p:txBody>
+      </p:sp>
       <p:pic>
         <p:nvPicPr>
-          <p:cNvPr id="9" name="Picture 8" descr="logo.png"/>
+          <p:cNvPr id="23" name="Picture 22" descr="logo.png"/>
           <p:cNvPicPr>
             <a:picLocks noChangeAspect="1"/>
           </p:cNvPicPr>
@@ -3767,7 +4000,7 @@
       </p:pic>
       <p:sp>
         <p:nvSpPr>
-          <p:cNvPr id="10" name="Rectangle 9"/>
+          <p:cNvPr id="24" name="Rectangle 23"/>
           <p:cNvSpPr/>
           <p:nvPr/>
         </p:nvSpPr>
@@ -3811,7 +4044,7 @@
       </p:sp>
       <p:sp>
         <p:nvSpPr>
-          <p:cNvPr id="11" name="TextBox 10"/>
+          <p:cNvPr id="25" name="TextBox 24"/>
           <p:cNvSpPr txBox="1"/>
           <p:nvPr/>
         </p:nvSpPr>
@@ -3845,7 +4078,7 @@
       </p:sp>
       <p:sp>
         <p:nvSpPr>
-          <p:cNvPr id="12" name="TextBox 11"/>
+          <p:cNvPr id="26" name="TextBox 25"/>
           <p:cNvSpPr txBox="1"/>
           <p:nvPr/>
         </p:nvSpPr>
@@ -4041,22 +4274,13 @@
           <a:lstStyle/>
           <a:p>
             <a:r>
-              <a:rPr sz="1800" b="1" i="0">
+              <a:rPr sz="1800" b="0" i="0">
                 <a:solidFill>
                   <a:srgbClr val="1A1A1A"/>
                 </a:solidFill>
                 <a:latin typeface="Meiryo UI"/>
               </a:rPr>
-              <a:t>3つの事象は全て「営業の型が可視化されていない」1点に帰着する。</a:t>
-            </a:r>
-            <a:r>
-              <a:rPr sz="1800" b="0" i="0">
-                <a:solidFill>
-                  <a:srgbClr val="1A1A1A"/>
-                </a:solidFill>
-                <a:latin typeface="Meiryo UI"/>
-              </a:rPr>
-              <a:t> ここを解くと全てが動く。</a:t>
+              <a:t>お電話でお伺いした内容を整理し、貴社固有の課題仮説を立てさせていただきました。合っている・合っていないも含めて率直にお聞かせいただければと思います。</a:t>
             </a:r>
           </a:p>
         </p:txBody>
@@ -4314,14 +4538,14 @@
         </p:nvSpPr>
         <p:spPr>
           <a:xfrm>
-            <a:off x="838504" y="5098288"/>
-            <a:ext cx="10515600" cy="12700"/>
+            <a:off x="838504" y="5779922"/>
+            <a:ext cx="10515600" cy="502920"/>
           </a:xfrm>
           <a:prstGeom prst="rect">
             <a:avLst/>
           </a:prstGeom>
           <a:solidFill>
-            <a:srgbClr val="CCCCCC"/>
+            <a:srgbClr val="1D3461"/>
           </a:solidFill>
           <a:ln>
             <a:noFill/>
@@ -4358,13 +4582,14 @@
         </p:nvSpPr>
         <p:spPr>
           <a:xfrm>
-            <a:off x="838504" y="5199888"/>
-            <a:ext cx="10515600" cy="1064666"/>
+            <a:off x="1021384" y="5779922"/>
+            <a:ext cx="10149840" cy="502920"/>
           </a:xfrm>
           <a:prstGeom prst="rect">
             <a:avLst/>
           </a:prstGeom>
           <a:noFill/>
+          <a:effectLst/>
         </p:spPr>
         <p:txBody>
           <a:bodyPr wrap="square">
@@ -4372,40 +4597,33 @@
           </a:bodyPr>
           <a:lstStyle/>
           <a:p>
-            <a:pPr>
-              <a:spcBef>
-                <a:spcPts val="600"/>
-              </a:spcBef>
-              <a:spcAft>
-                <a:spcPts val="200"/>
-              </a:spcAft>
-            </a:pPr>
-            <a:r>
-              <a:rPr sz="1600" b="0" i="0">
-                <a:solidFill>
-                  <a:srgbClr val="0066CD"/>
-                </a:solidFill>
-                <a:latin typeface="Meiryo UI"/>
-              </a:rPr>
-              <a:t>● </a:t>
-            </a:r>
-            <a:r>
-              <a:rPr sz="1600" b="0" i="0">
-                <a:solidFill>
-                  <a:srgbClr val="1A1A1A"/>
+            <a:pPr algn="ctr"/>
+            <a:r>
+              <a:rPr sz="1400" b="0" i="0">
+                <a:solidFill>
+                  <a:srgbClr val="FFFFFF"/>
                 </a:solidFill>
                 <a:latin typeface="Meiryo UI"/>
               </a:rPr>
               <a:t>3仮説の帰着点：</a:t>
             </a:r>
             <a:r>
-              <a:rPr sz="1600" b="1" i="0">
-                <a:solidFill>
-                  <a:srgbClr val="1A1A1A"/>
+              <a:rPr sz="1400" b="1" i="0">
+                <a:solidFill>
+                  <a:srgbClr val="FFFFFF"/>
                 </a:solidFill>
                 <a:latin typeface="Meiryo UI"/>
               </a:rPr>
               <a:t>「営業の型が可視化されていないこと」</a:t>
+            </a:r>
+            <a:r>
+              <a:rPr sz="1400" b="0" i="0">
+                <a:solidFill>
+                  <a:srgbClr val="FFFFFF"/>
+                </a:solidFill>
+                <a:latin typeface="Meiryo UI"/>
+              </a:rPr>
+              <a:t>。戦略はあるが実行を支える基盤がない</a:t>
             </a:r>
           </a:p>
         </p:txBody>
@@ -4798,7 +5016,7 @@
         <p:spPr>
           <a:xfrm>
             <a:off x="6089954" y="1280160"/>
-            <a:ext cx="12700" cy="2492197"/>
+            <a:ext cx="12700" cy="4408322"/>
           </a:xfrm>
           <a:prstGeom prst="rect">
             <a:avLst/>
@@ -4842,7 +5060,7 @@
         <p:spPr>
           <a:xfrm>
             <a:off x="838504" y="1627632"/>
-            <a:ext cx="5097780" cy="2144725"/>
+            <a:ext cx="5097780" cy="4060850"/>
           </a:xfrm>
           <a:prstGeom prst="rect">
             <a:avLst/>
@@ -5117,7 +5335,7 @@
         <p:spPr>
           <a:xfrm>
             <a:off x="6256324" y="1627632"/>
-            <a:ext cx="5097780" cy="2144725"/>
+            <a:ext cx="5097780" cy="4060850"/>
           </a:xfrm>
           <a:prstGeom prst="rect">
             <a:avLst/>
@@ -5391,14 +5609,14 @@
         </p:nvSpPr>
         <p:spPr>
           <a:xfrm>
-            <a:off x="838504" y="3823157"/>
-            <a:ext cx="10515600" cy="12700"/>
+            <a:off x="838504" y="5779922"/>
+            <a:ext cx="10515600" cy="502920"/>
           </a:xfrm>
           <a:prstGeom prst="rect">
             <a:avLst/>
           </a:prstGeom>
           <a:solidFill>
-            <a:srgbClr val="CCCCCC"/>
+            <a:srgbClr val="1D3461"/>
           </a:solidFill>
           <a:ln>
             <a:noFill/>
@@ -5435,13 +5653,14 @@
         </p:nvSpPr>
         <p:spPr>
           <a:xfrm>
-            <a:off x="838504" y="3924757"/>
-            <a:ext cx="10515600" cy="2339797"/>
+            <a:off x="1021384" y="5779922"/>
+            <a:ext cx="10149840" cy="502920"/>
           </a:xfrm>
           <a:prstGeom prst="rect">
             <a:avLst/>
           </a:prstGeom>
           <a:noFill/>
+          <a:effectLst/>
         </p:spPr>
         <p:txBody>
           <a:bodyPr wrap="square">
@@ -5449,36 +5668,20 @@
           </a:bodyPr>
           <a:lstStyle/>
           <a:p>
-            <a:pPr>
-              <a:spcBef>
-                <a:spcPts val="600"/>
-              </a:spcBef>
-              <a:spcAft>
-                <a:spcPts val="200"/>
-              </a:spcAft>
-            </a:pPr>
-            <a:r>
-              <a:rPr sz="1600" b="0" i="0">
-                <a:solidFill>
-                  <a:srgbClr val="0066CD"/>
-                </a:solidFill>
-                <a:latin typeface="Meiryo UI"/>
-              </a:rPr>
-              <a:t>● </a:t>
-            </a:r>
-            <a:r>
-              <a:rPr sz="1600" b="1" i="0">
-                <a:solidFill>
-                  <a:srgbClr val="1A1A1A"/>
+            <a:pPr algn="ctr"/>
+            <a:r>
+              <a:rPr sz="1400" b="1" i="0">
+                <a:solidFill>
+                  <a:srgbClr val="FFFFFF"/>
                 </a:solidFill>
                 <a:latin typeface="Meiryo UI"/>
               </a:rPr>
               <a:t>第一歩：</a:t>
             </a:r>
             <a:r>
-              <a:rPr sz="1600" b="0" i="0">
-                <a:solidFill>
-                  <a:srgbClr val="1A1A1A"/>
+              <a:rPr sz="1400" b="0" i="0">
+                <a:solidFill>
+                  <a:srgbClr val="FFFFFF"/>
                 </a:solidFill>
                 <a:latin typeface="Meiryo UI"/>
               </a:rPr>

--- a/slides_p10_p12.pptx
+++ b/slides_p10_p12.pptx
@@ -3241,653 +3241,325 @@
                 </a:solidFill>
                 <a:latin typeface="Meiryo UI"/>
               </a:rPr>
-              <a:t>貴社の成長戦略は「No.1 Backoffice AI Company」の実現。「SaaS価値向上」「AIプロダクト」「M&amp;A」を3本柱とし、FY28で売上高900億円を目指す。</a:t>
-            </a:r>
-          </a:p>
-        </p:txBody>
-      </p:sp>
-      <p:sp>
-        <p:nvSpPr>
-          <p:cNvPr id="6" name="Rectangle 5"/>
-          <p:cNvSpPr/>
+              <a:t>貴社の成長戦略は「No.1 Backoffice AI Company」の実現。「SaaS価値向上」「AIプロダクト」「M&amp;A」を3本柱とし、FY28で売上高900億円（現503億の約1.8倍）を目指す。</a:t>
+            </a:r>
+          </a:p>
+        </p:txBody>
+      </p:sp>
+      <p:graphicFrame>
+        <p:nvGraphicFramePr>
+          <p:cNvPr id="6" name="Table 5"/>
+          <p:cNvGraphicFramePr>
+            <a:graphicFrameLocks noGrp="1"/>
+          </p:cNvGraphicFramePr>
           <p:nvPr/>
-        </p:nvSpPr>
-        <p:spPr>
-          <a:xfrm>
-            <a:off x="838504" y="1280160"/>
-            <a:ext cx="3352800" cy="4408322"/>
-          </a:xfrm>
-          <a:prstGeom prst="rect">
-            <a:avLst/>
-          </a:prstGeom>
-          <a:solidFill>
-            <a:srgbClr val="F5F5F5"/>
-          </a:solidFill>
-          <a:ln>
-            <a:noFill/>
-          </a:ln>
-          <a:effectLst/>
-        </p:spPr>
-        <p:style>
-          <a:lnRef idx="1">
-            <a:schemeClr val="accent1"/>
-          </a:lnRef>
-          <a:fillRef idx="3">
-            <a:schemeClr val="accent1"/>
-          </a:fillRef>
-          <a:effectRef idx="2">
-            <a:schemeClr val="accent1"/>
-          </a:effectRef>
-          <a:fontRef idx="minor">
-            <a:schemeClr val="lt1"/>
-          </a:fontRef>
-        </p:style>
-        <p:txBody>
-          <a:bodyPr rtlCol="0" anchor="ctr"/>
-          <a:lstStyle/>
-          <a:p>
-            <a:pPr algn="ctr"/>
-          </a:p>
-        </p:txBody>
-      </p:sp>
+        </p:nvGraphicFramePr>
+        <p:xfrm>
+          <a:off x="838504" y="1280160"/>
+          <a:ext cx="10515600" cy="3657600"/>
+        </p:xfrm>
+        <a:graphic>
+          <a:graphicData uri="http://schemas.openxmlformats.org/drawingml/2006/table">
+            <a:tbl>
+              <a:tblPr firstRow="1" bandRow="1">
+                <a:tableStyleId>{5C22544A-7EE6-4342-B048-85BDC9FD1C3A}</a:tableStyleId>
+              </a:tblPr>
+              <a:tblGrid>
+                <a:gridCol w="3505200"/>
+                <a:gridCol w="3505200"/>
+                <a:gridCol w="3505200"/>
+              </a:tblGrid>
+              <a:tr h="365760">
+                <a:tc>
+                  <a:txBody>
+                    <a:bodyPr wrap="square"/>
+                    <a:lstStyle/>
+                    <a:p>
+                      <a:pPr algn="ctr"/>
+                      <a:r>
+                        <a:rPr sz="1400" b="1" i="0">
+                          <a:solidFill>
+                            <a:srgbClr val="FFFFFF"/>
+                          </a:solidFill>
+                          <a:latin typeface="Meiryo UI"/>
+                        </a:rPr>
+                        <a:t>成長戦略</a:t>
+                      </a:r>
+                    </a:p>
+                  </a:txBody>
+                  <a:tcPr>
+                    <a:solidFill>
+                      <a:srgbClr val="1D3461"/>
+                    </a:solidFill>
+                  </a:tcPr>
+                </a:tc>
+                <a:tc>
+                  <a:txBody>
+                    <a:bodyPr wrap="square"/>
+                    <a:lstStyle/>
+                    <a:p>
+                      <a:pPr algn="ctr"/>
+                      <a:r>
+                        <a:rPr sz="1400" b="1" i="0">
+                          <a:solidFill>
+                            <a:srgbClr val="FFFFFF"/>
+                          </a:solidFill>
+                          <a:latin typeface="Meiryo UI"/>
+                        </a:rPr>
+                        <a:t>具体内容</a:t>
+                      </a:r>
+                    </a:p>
+                  </a:txBody>
+                  <a:tcPr>
+                    <a:solidFill>
+                      <a:srgbClr val="1D3461"/>
+                    </a:solidFill>
+                  </a:tcPr>
+                </a:tc>
+                <a:tc>
+                  <a:txBody>
+                    <a:bodyPr wrap="square"/>
+                    <a:lstStyle/>
+                    <a:p>
+                      <a:pPr algn="ctr"/>
+                      <a:r>
+                        <a:rPr sz="1400" b="1" i="0">
+                          <a:solidFill>
+                            <a:srgbClr val="FFFFFF"/>
+                          </a:solidFill>
+                          <a:latin typeface="Meiryo UI"/>
+                        </a:rPr>
+                        <a:t>目指す姿</a:t>
+                      </a:r>
+                    </a:p>
+                  </a:txBody>
+                  <a:tcPr>
+                    <a:solidFill>
+                      <a:srgbClr val="1D3461"/>
+                    </a:solidFill>
+                  </a:tcPr>
+                </a:tc>
+              </a:tr>
+              <a:tr h="1097280">
+                <a:tc>
+                  <a:txBody>
+                    <a:bodyPr wrap="square"/>
+                    <a:lstStyle/>
+                    <a:p>
+                      <a:pPr algn="l"/>
+                      <a:r>
+                        <a:rPr sz="1400" b="0" i="0">
+                          <a:solidFill>
+                            <a:srgbClr val="1A1A1A"/>
+                          </a:solidFill>
+                          <a:latin typeface="Meiryo UI"/>
+                        </a:rPr>
+                        <a:t>バックオフィスSaaSの価値向上</a:t>
+                      </a:r>
+                    </a:p>
+                  </a:txBody>
+                  <a:tcPr>
+                    <a:solidFill>
+                      <a:srgbClr val="F5F7FA"/>
+                    </a:solidFill>
+                  </a:tcPr>
+                </a:tc>
+                <a:tc>
+                  <a:txBody>
+                    <a:bodyPr wrap="square"/>
+                    <a:lstStyle/>
+                    <a:p>
+                      <a:pPr algn="l"/>
+                      <a:r>
+                        <a:rPr sz="1400" b="0" i="0">
+                          <a:solidFill>
+                            <a:srgbClr val="1A1A1A"/>
+                          </a:solidFill>
+                          <a:latin typeface="Meiryo UI"/>
+                        </a:rPr>
+                        <a:t>60超のプロダクトで会計・人事・法務を網羅。顧客基盤の拡大とARPA向上を推進。豊富なサービスラインナップと業務ロジックを強みに</a:t>
+                      </a:r>
+                    </a:p>
+                  </a:txBody>
+                  <a:tcPr>
+                    <a:solidFill>
+                      <a:srgbClr val="F5F7FA"/>
+                    </a:solidFill>
+                  </a:tcPr>
+                </a:tc>
+                <a:tc>
+                  <a:txBody>
+                    <a:bodyPr wrap="square"/>
+                    <a:lstStyle/>
+                    <a:p>
+                      <a:pPr algn="l"/>
+                      <a:r>
+                        <a:rPr sz="1400" b="0" i="0">
+                          <a:solidFill>
+                            <a:srgbClr val="1A1A1A"/>
+                          </a:solidFill>
+                          <a:latin typeface="Meiryo UI"/>
+                        </a:rPr>
+                        <a:t>顧客基盤の拡大とARPAの向上</a:t>
+                      </a:r>
+                    </a:p>
+                  </a:txBody>
+                  <a:tcPr>
+                    <a:solidFill>
+                      <a:srgbClr val="F5F7FA"/>
+                    </a:solidFill>
+                  </a:tcPr>
+                </a:tc>
+              </a:tr>
+              <a:tr h="1097280">
+                <a:tc>
+                  <a:txBody>
+                    <a:bodyPr wrap="square"/>
+                    <a:lstStyle/>
+                    <a:p>
+                      <a:pPr algn="l"/>
+                      <a:r>
+                        <a:rPr sz="1400" b="0" i="0">
+                          <a:solidFill>
+                            <a:srgbClr val="1A1A1A"/>
+                          </a:solidFill>
+                          <a:latin typeface="Meiryo UI"/>
+                        </a:rPr>
+                        <a:t>AIプロダクトの開発・提供</a:t>
+                      </a:r>
+                    </a:p>
+                  </a:txBody>
+                  <a:tcPr>
+                    <a:solidFill>
+                      <a:srgbClr val="FFFFFF"/>
+                    </a:solidFill>
+                  </a:tcPr>
+                </a:tc>
+                <a:tc>
+                  <a:txBody>
+                    <a:bodyPr wrap="square"/>
+                    <a:lstStyle/>
+                    <a:p>
+                      <a:pPr algn="l"/>
+                      <a:r>
+                        <a:rPr sz="1400" b="0" i="0">
+                          <a:solidFill>
+                            <a:srgbClr val="1A1A1A"/>
+                          </a:solidFill>
+                          <a:latin typeface="Meiryo UI"/>
+                        </a:rPr>
+                        <a:t>AIエージェント／AIネイティブプロダクト／AI×BPOサービスの展開。業務ロジックを活用し自律的に処理。デジタルツール市場からデジタルワーカー市場へ</a:t>
+                      </a:r>
+                    </a:p>
+                  </a:txBody>
+                  <a:tcPr>
+                    <a:solidFill>
+                      <a:srgbClr val="FFFFFF"/>
+                    </a:solidFill>
+                  </a:tcPr>
+                </a:tc>
+                <a:tc>
+                  <a:txBody>
+                    <a:bodyPr wrap="square"/>
+                    <a:lstStyle/>
+                    <a:p>
+                      <a:pPr algn="l"/>
+                      <a:r>
+                        <a:rPr sz="1400" b="0" i="0">
+                          <a:solidFill>
+                            <a:srgbClr val="1A1A1A"/>
+                          </a:solidFill>
+                          <a:latin typeface="Meiryo UI"/>
+                        </a:rPr>
+                        <a:t>デジタルワーカー市場（14.1兆円）へのTAM拡大</a:t>
+                      </a:r>
+                    </a:p>
+                  </a:txBody>
+                  <a:tcPr>
+                    <a:solidFill>
+                      <a:srgbClr val="FFFFFF"/>
+                    </a:solidFill>
+                  </a:tcPr>
+                </a:tc>
+              </a:tr>
+              <a:tr h="1097280">
+                <a:tc>
+                  <a:txBody>
+                    <a:bodyPr wrap="square"/>
+                    <a:lstStyle/>
+                    <a:p>
+                      <a:pPr algn="l"/>
+                      <a:r>
+                        <a:rPr sz="1400" b="0" i="0">
+                          <a:solidFill>
+                            <a:srgbClr val="1A1A1A"/>
+                          </a:solidFill>
+                          <a:latin typeface="Meiryo UI"/>
+                        </a:rPr>
+                        <a:t>M&amp;A戦略の遂行</a:t>
+                      </a:r>
+                    </a:p>
+                  </a:txBody>
+                  <a:tcPr>
+                    <a:solidFill>
+                      <a:srgbClr val="F5F7FA"/>
+                    </a:solidFill>
+                  </a:tcPr>
+                </a:tc>
+                <a:tc>
+                  <a:txBody>
+                    <a:bodyPr wrap="square"/>
+                    <a:lstStyle/>
+                    <a:p>
+                      <a:pPr algn="l"/>
+                      <a:r>
+                        <a:rPr sz="1400" b="0" i="0">
+                          <a:solidFill>
+                            <a:srgbClr val="1A1A1A"/>
+                          </a:solidFill>
+                          <a:latin typeface="Meiryo UI"/>
+                        </a:rPr>
+                        <a:t>経営管理領域を全方位でカバーするためサービスの幅を拡大。アウトルックコンサルティング社等のグループジョイン。SaaS×Fintechの融合</a:t>
+                      </a:r>
+                    </a:p>
+                  </a:txBody>
+                  <a:tcPr>
+                    <a:solidFill>
+                      <a:srgbClr val="F5F7FA"/>
+                    </a:solidFill>
+                  </a:tcPr>
+                </a:tc>
+                <a:tc>
+                  <a:txBody>
+                    <a:bodyPr wrap="square"/>
+                    <a:lstStyle/>
+                    <a:p>
+                      <a:pPr algn="l"/>
+                      <a:r>
+                        <a:rPr sz="1400" b="0" i="0">
+                          <a:solidFill>
+                            <a:srgbClr val="1A1A1A"/>
+                          </a:solidFill>
+                          <a:latin typeface="Meiryo UI"/>
+                        </a:rPr>
+                        <a:t>サービス拡充による顧客基盤拡大</a:t>
+                      </a:r>
+                    </a:p>
+                  </a:txBody>
+                  <a:tcPr>
+                    <a:solidFill>
+                      <a:srgbClr val="F5F7FA"/>
+                    </a:solidFill>
+                  </a:tcPr>
+                </a:tc>
+              </a:tr>
+            </a:tbl>
+          </a:graphicData>
+        </a:graphic>
+      </p:graphicFrame>
       <p:sp>
         <p:nvSpPr>
           <p:cNvPr id="7" name="Rectangle 6"/>
-          <p:cNvSpPr/>
-          <p:nvPr/>
-        </p:nvSpPr>
-        <p:spPr>
-          <a:xfrm>
-            <a:off x="838504" y="1280160"/>
-            <a:ext cx="3352800" cy="101600"/>
-          </a:xfrm>
-          <a:prstGeom prst="rect">
-            <a:avLst/>
-          </a:prstGeom>
-          <a:solidFill>
-            <a:srgbClr val="0066CD"/>
-          </a:solidFill>
-          <a:ln>
-            <a:noFill/>
-          </a:ln>
-          <a:effectLst/>
-        </p:spPr>
-        <p:style>
-          <a:lnRef idx="1">
-            <a:schemeClr val="accent1"/>
-          </a:lnRef>
-          <a:fillRef idx="3">
-            <a:schemeClr val="accent1"/>
-          </a:fillRef>
-          <a:effectRef idx="2">
-            <a:schemeClr val="accent1"/>
-          </a:effectRef>
-          <a:fontRef idx="minor">
-            <a:schemeClr val="lt1"/>
-          </a:fontRef>
-        </p:style>
-        <p:txBody>
-          <a:bodyPr rtlCol="0" anchor="ctr"/>
-          <a:lstStyle/>
-          <a:p>
-            <a:pPr algn="ctr"/>
-          </a:p>
-        </p:txBody>
-      </p:sp>
-      <p:sp>
-        <p:nvSpPr>
-          <p:cNvPr id="8" name="Oval 7"/>
-          <p:cNvSpPr/>
-          <p:nvPr/>
-        </p:nvSpPr>
-        <p:spPr>
-          <a:xfrm>
-            <a:off x="2286304" y="1518920"/>
-            <a:ext cx="457200" cy="457200"/>
-          </a:xfrm>
-          <a:prstGeom prst="ellipse">
-            <a:avLst/>
-          </a:prstGeom>
-          <a:solidFill>
-            <a:srgbClr val="0066CD"/>
-          </a:solidFill>
-          <a:ln>
-            <a:noFill/>
-          </a:ln>
-          <a:effectLst/>
-        </p:spPr>
-        <p:style>
-          <a:lnRef idx="1">
-            <a:schemeClr val="accent1"/>
-          </a:lnRef>
-          <a:fillRef idx="3">
-            <a:schemeClr val="accent1"/>
-          </a:fillRef>
-          <a:effectRef idx="2">
-            <a:schemeClr val="accent1"/>
-          </a:effectRef>
-          <a:fontRef idx="minor">
-            <a:schemeClr val="lt1"/>
-          </a:fontRef>
-        </p:style>
-        <p:txBody>
-          <a:bodyPr rtlCol="0" anchor="ctr" wrap="none"/>
-          <a:lstStyle/>
-          <a:p>
-            <a:pPr algn="ctr"/>
-            <a:r>
-              <a:rPr sz="1000" b="1" i="0">
-                <a:solidFill>
-                  <a:srgbClr val="FFFFFF"/>
-                </a:solidFill>
-                <a:latin typeface="Meiryo UI"/>
-              </a:rPr>
-              <a:t>SaaS</a:t>
-            </a:r>
-          </a:p>
-        </p:txBody>
-      </p:sp>
-      <p:sp>
-        <p:nvSpPr>
-          <p:cNvPr id="9" name="TextBox 8"/>
-          <p:cNvSpPr txBox="1"/>
-          <p:nvPr/>
-        </p:nvSpPr>
-        <p:spPr>
-          <a:xfrm>
-            <a:off x="948232" y="2067560"/>
-            <a:ext cx="3133344" cy="457200"/>
-          </a:xfrm>
-          <a:prstGeom prst="rect">
-            <a:avLst/>
-          </a:prstGeom>
-          <a:noFill/>
-          <a:effectLst/>
-        </p:spPr>
-        <p:txBody>
-          <a:bodyPr wrap="square">
-            <a:spAutoFit/>
-          </a:bodyPr>
-          <a:lstStyle/>
-          <a:p>
-            <a:pPr algn="ctr"/>
-            <a:r>
-              <a:rPr sz="1400" b="1" i="0">
-                <a:solidFill>
-                  <a:srgbClr val="1A1A1A"/>
-                </a:solidFill>
-                <a:latin typeface="Meiryo UI"/>
-              </a:rPr>
-              <a:t>バックオフィスSaaSの価値向上</a:t>
-            </a:r>
-          </a:p>
-        </p:txBody>
-      </p:sp>
-      <p:sp>
-        <p:nvSpPr>
-          <p:cNvPr id="10" name="TextBox 9"/>
-          <p:cNvSpPr txBox="1"/>
-          <p:nvPr/>
-        </p:nvSpPr>
-        <p:spPr>
-          <a:xfrm>
-            <a:off x="948232" y="2524760"/>
-            <a:ext cx="3133344" cy="3163722"/>
-          </a:xfrm>
-          <a:prstGeom prst="rect">
-            <a:avLst/>
-          </a:prstGeom>
-          <a:noFill/>
-          <a:effectLst/>
-        </p:spPr>
-        <p:txBody>
-          <a:bodyPr wrap="square">
-            <a:spAutoFit/>
-          </a:bodyPr>
-          <a:lstStyle/>
-          <a:p>
-            <a:pPr algn="ctr"/>
-            <a:r>
-              <a:rPr sz="1200" b="0" i="0">
-                <a:solidFill>
-                  <a:srgbClr val="888888"/>
-                </a:solidFill>
-                <a:latin typeface="Meiryo UI"/>
-              </a:rPr>
-              <a:t>60超のプロダクトで会計・人事・法務を網羅。顧客基盤の拡大とARPA向上</a:t>
-            </a:r>
-          </a:p>
-        </p:txBody>
-      </p:sp>
-      <p:sp>
-        <p:nvSpPr>
-          <p:cNvPr id="11" name="Rectangle 10"/>
-          <p:cNvSpPr/>
-          <p:nvPr/>
-        </p:nvSpPr>
-        <p:spPr>
-          <a:xfrm>
-            <a:off x="4419904" y="1280160"/>
-            <a:ext cx="3352800" cy="4408322"/>
-          </a:xfrm>
-          <a:prstGeom prst="rect">
-            <a:avLst/>
-          </a:prstGeom>
-          <a:solidFill>
-            <a:srgbClr val="F5F5F5"/>
-          </a:solidFill>
-          <a:ln>
-            <a:noFill/>
-          </a:ln>
-          <a:effectLst/>
-        </p:spPr>
-        <p:style>
-          <a:lnRef idx="1">
-            <a:schemeClr val="accent1"/>
-          </a:lnRef>
-          <a:fillRef idx="3">
-            <a:schemeClr val="accent1"/>
-          </a:fillRef>
-          <a:effectRef idx="2">
-            <a:schemeClr val="accent1"/>
-          </a:effectRef>
-          <a:fontRef idx="minor">
-            <a:schemeClr val="lt1"/>
-          </a:fontRef>
-        </p:style>
-        <p:txBody>
-          <a:bodyPr rtlCol="0" anchor="ctr"/>
-          <a:lstStyle/>
-          <a:p>
-            <a:pPr algn="ctr"/>
-          </a:p>
-        </p:txBody>
-      </p:sp>
-      <p:sp>
-        <p:nvSpPr>
-          <p:cNvPr id="12" name="Rectangle 11"/>
-          <p:cNvSpPr/>
-          <p:nvPr/>
-        </p:nvSpPr>
-        <p:spPr>
-          <a:xfrm>
-            <a:off x="4419904" y="1280160"/>
-            <a:ext cx="3352800" cy="101600"/>
-          </a:xfrm>
-          <a:prstGeom prst="rect">
-            <a:avLst/>
-          </a:prstGeom>
-          <a:solidFill>
-            <a:srgbClr val="E07F30"/>
-          </a:solidFill>
-          <a:ln>
-            <a:noFill/>
-          </a:ln>
-          <a:effectLst/>
-        </p:spPr>
-        <p:style>
-          <a:lnRef idx="1">
-            <a:schemeClr val="accent1"/>
-          </a:lnRef>
-          <a:fillRef idx="3">
-            <a:schemeClr val="accent1"/>
-          </a:fillRef>
-          <a:effectRef idx="2">
-            <a:schemeClr val="accent1"/>
-          </a:effectRef>
-          <a:fontRef idx="minor">
-            <a:schemeClr val="lt1"/>
-          </a:fontRef>
-        </p:style>
-        <p:txBody>
-          <a:bodyPr rtlCol="0" anchor="ctr"/>
-          <a:lstStyle/>
-          <a:p>
-            <a:pPr algn="ctr"/>
-          </a:p>
-        </p:txBody>
-      </p:sp>
-      <p:sp>
-        <p:nvSpPr>
-          <p:cNvPr id="13" name="Oval 12"/>
-          <p:cNvSpPr/>
-          <p:nvPr/>
-        </p:nvSpPr>
-        <p:spPr>
-          <a:xfrm>
-            <a:off x="5867704" y="1518920"/>
-            <a:ext cx="457200" cy="457200"/>
-          </a:xfrm>
-          <a:prstGeom prst="ellipse">
-            <a:avLst/>
-          </a:prstGeom>
-          <a:solidFill>
-            <a:srgbClr val="E07F30"/>
-          </a:solidFill>
-          <a:ln>
-            <a:noFill/>
-          </a:ln>
-          <a:effectLst/>
-        </p:spPr>
-        <p:style>
-          <a:lnRef idx="1">
-            <a:schemeClr val="accent1"/>
-          </a:lnRef>
-          <a:fillRef idx="3">
-            <a:schemeClr val="accent1"/>
-          </a:fillRef>
-          <a:effectRef idx="2">
-            <a:schemeClr val="accent1"/>
-          </a:effectRef>
-          <a:fontRef idx="minor">
-            <a:schemeClr val="lt1"/>
-          </a:fontRef>
-        </p:style>
-        <p:txBody>
-          <a:bodyPr rtlCol="0" anchor="ctr" wrap="none"/>
-          <a:lstStyle/>
-          <a:p>
-            <a:pPr algn="ctr"/>
-            <a:r>
-              <a:rPr sz="1000" b="1" i="0">
-                <a:solidFill>
-                  <a:srgbClr val="FFFFFF"/>
-                </a:solidFill>
-                <a:latin typeface="Meiryo UI"/>
-              </a:rPr>
-              <a:t>AI</a:t>
-            </a:r>
-          </a:p>
-        </p:txBody>
-      </p:sp>
-      <p:sp>
-        <p:nvSpPr>
-          <p:cNvPr id="14" name="TextBox 13"/>
-          <p:cNvSpPr txBox="1"/>
-          <p:nvPr/>
-        </p:nvSpPr>
-        <p:spPr>
-          <a:xfrm>
-            <a:off x="4529632" y="2067560"/>
-            <a:ext cx="3133344" cy="457200"/>
-          </a:xfrm>
-          <a:prstGeom prst="rect">
-            <a:avLst/>
-          </a:prstGeom>
-          <a:noFill/>
-          <a:effectLst/>
-        </p:spPr>
-        <p:txBody>
-          <a:bodyPr wrap="square">
-            <a:spAutoFit/>
-          </a:bodyPr>
-          <a:lstStyle/>
-          <a:p>
-            <a:pPr algn="ctr"/>
-            <a:r>
-              <a:rPr sz="1400" b="1" i="0">
-                <a:solidFill>
-                  <a:srgbClr val="1A1A1A"/>
-                </a:solidFill>
-                <a:latin typeface="Meiryo UI"/>
-              </a:rPr>
-              <a:t>AIプロダクトの開発・提供</a:t>
-            </a:r>
-          </a:p>
-        </p:txBody>
-      </p:sp>
-      <p:sp>
-        <p:nvSpPr>
-          <p:cNvPr id="15" name="TextBox 14"/>
-          <p:cNvSpPr txBox="1"/>
-          <p:nvPr/>
-        </p:nvSpPr>
-        <p:spPr>
-          <a:xfrm>
-            <a:off x="4529632" y="2524760"/>
-            <a:ext cx="3133344" cy="3163722"/>
-          </a:xfrm>
-          <a:prstGeom prst="rect">
-            <a:avLst/>
-          </a:prstGeom>
-          <a:noFill/>
-          <a:effectLst/>
-        </p:spPr>
-        <p:txBody>
-          <a:bodyPr wrap="square">
-            <a:spAutoFit/>
-          </a:bodyPr>
-          <a:lstStyle/>
-          <a:p>
-            <a:pPr algn="ctr"/>
-            <a:r>
-              <a:rPr sz="1200" b="0" i="0">
-                <a:solidFill>
-                  <a:srgbClr val="888888"/>
-                </a:solidFill>
-                <a:latin typeface="Meiryo UI"/>
-              </a:rPr>
-              <a:t>AIエージェント・AIネイティブプロダクト・AI×BPOで業務を自律処理</a:t>
-            </a:r>
-          </a:p>
-        </p:txBody>
-      </p:sp>
-      <p:sp>
-        <p:nvSpPr>
-          <p:cNvPr id="16" name="Rectangle 15"/>
-          <p:cNvSpPr/>
-          <p:nvPr/>
-        </p:nvSpPr>
-        <p:spPr>
-          <a:xfrm>
-            <a:off x="8001304" y="1280160"/>
-            <a:ext cx="3352800" cy="4408322"/>
-          </a:xfrm>
-          <a:prstGeom prst="rect">
-            <a:avLst/>
-          </a:prstGeom>
-          <a:solidFill>
-            <a:srgbClr val="F5F5F5"/>
-          </a:solidFill>
-          <a:ln>
-            <a:noFill/>
-          </a:ln>
-          <a:effectLst/>
-        </p:spPr>
-        <p:style>
-          <a:lnRef idx="1">
-            <a:schemeClr val="accent1"/>
-          </a:lnRef>
-          <a:fillRef idx="3">
-            <a:schemeClr val="accent1"/>
-          </a:fillRef>
-          <a:effectRef idx="2">
-            <a:schemeClr val="accent1"/>
-          </a:effectRef>
-          <a:fontRef idx="minor">
-            <a:schemeClr val="lt1"/>
-          </a:fontRef>
-        </p:style>
-        <p:txBody>
-          <a:bodyPr rtlCol="0" anchor="ctr"/>
-          <a:lstStyle/>
-          <a:p>
-            <a:pPr algn="ctr"/>
-          </a:p>
-        </p:txBody>
-      </p:sp>
-      <p:sp>
-        <p:nvSpPr>
-          <p:cNvPr id="17" name="Rectangle 16"/>
-          <p:cNvSpPr/>
-          <p:nvPr/>
-        </p:nvSpPr>
-        <p:spPr>
-          <a:xfrm>
-            <a:off x="8001304" y="1280160"/>
-            <a:ext cx="3352800" cy="101600"/>
-          </a:xfrm>
-          <a:prstGeom prst="rect">
-            <a:avLst/>
-          </a:prstGeom>
-          <a:solidFill>
-            <a:srgbClr val="7B61C5"/>
-          </a:solidFill>
-          <a:ln>
-            <a:noFill/>
-          </a:ln>
-          <a:effectLst/>
-        </p:spPr>
-        <p:style>
-          <a:lnRef idx="1">
-            <a:schemeClr val="accent1"/>
-          </a:lnRef>
-          <a:fillRef idx="3">
-            <a:schemeClr val="accent1"/>
-          </a:fillRef>
-          <a:effectRef idx="2">
-            <a:schemeClr val="accent1"/>
-          </a:effectRef>
-          <a:fontRef idx="minor">
-            <a:schemeClr val="lt1"/>
-          </a:fontRef>
-        </p:style>
-        <p:txBody>
-          <a:bodyPr rtlCol="0" anchor="ctr"/>
-          <a:lstStyle/>
-          <a:p>
-            <a:pPr algn="ctr"/>
-          </a:p>
-        </p:txBody>
-      </p:sp>
-      <p:sp>
-        <p:nvSpPr>
-          <p:cNvPr id="18" name="Oval 17"/>
-          <p:cNvSpPr/>
-          <p:nvPr/>
-        </p:nvSpPr>
-        <p:spPr>
-          <a:xfrm>
-            <a:off x="9449104" y="1518920"/>
-            <a:ext cx="457200" cy="457200"/>
-          </a:xfrm>
-          <a:prstGeom prst="ellipse">
-            <a:avLst/>
-          </a:prstGeom>
-          <a:solidFill>
-            <a:srgbClr val="7B61C5"/>
-          </a:solidFill>
-          <a:ln>
-            <a:noFill/>
-          </a:ln>
-          <a:effectLst/>
-        </p:spPr>
-        <p:style>
-          <a:lnRef idx="1">
-            <a:schemeClr val="accent1"/>
-          </a:lnRef>
-          <a:fillRef idx="3">
-            <a:schemeClr val="accent1"/>
-          </a:fillRef>
-          <a:effectRef idx="2">
-            <a:schemeClr val="accent1"/>
-          </a:effectRef>
-          <a:fontRef idx="minor">
-            <a:schemeClr val="lt1"/>
-          </a:fontRef>
-        </p:style>
-        <p:txBody>
-          <a:bodyPr rtlCol="0" anchor="ctr" wrap="none"/>
-          <a:lstStyle/>
-          <a:p>
-            <a:pPr algn="ctr"/>
-            <a:r>
-              <a:rPr sz="1000" b="1" i="0">
-                <a:solidFill>
-                  <a:srgbClr val="FFFFFF"/>
-                </a:solidFill>
-                <a:latin typeface="Meiryo UI"/>
-              </a:rPr>
-              <a:t>M&amp;A</a:t>
-            </a:r>
-          </a:p>
-        </p:txBody>
-      </p:sp>
-      <p:sp>
-        <p:nvSpPr>
-          <p:cNvPr id="19" name="TextBox 18"/>
-          <p:cNvSpPr txBox="1"/>
-          <p:nvPr/>
-        </p:nvSpPr>
-        <p:spPr>
-          <a:xfrm>
-            <a:off x="8111032" y="2067560"/>
-            <a:ext cx="3133344" cy="457200"/>
-          </a:xfrm>
-          <a:prstGeom prst="rect">
-            <a:avLst/>
-          </a:prstGeom>
-          <a:noFill/>
-          <a:effectLst/>
-        </p:spPr>
-        <p:txBody>
-          <a:bodyPr wrap="square">
-            <a:spAutoFit/>
-          </a:bodyPr>
-          <a:lstStyle/>
-          <a:p>
-            <a:pPr algn="ctr"/>
-            <a:r>
-              <a:rPr sz="1400" b="1" i="0">
-                <a:solidFill>
-                  <a:srgbClr val="1A1A1A"/>
-                </a:solidFill>
-                <a:latin typeface="Meiryo UI"/>
-              </a:rPr>
-              <a:t>M&amp;A戦略の遂行</a:t>
-            </a:r>
-          </a:p>
-        </p:txBody>
-      </p:sp>
-      <p:sp>
-        <p:nvSpPr>
-          <p:cNvPr id="20" name="TextBox 19"/>
-          <p:cNvSpPr txBox="1"/>
-          <p:nvPr/>
-        </p:nvSpPr>
-        <p:spPr>
-          <a:xfrm>
-            <a:off x="8111032" y="2524760"/>
-            <a:ext cx="3133344" cy="3163722"/>
-          </a:xfrm>
-          <a:prstGeom prst="rect">
-            <a:avLst/>
-          </a:prstGeom>
-          <a:noFill/>
-          <a:effectLst/>
-        </p:spPr>
-        <p:txBody>
-          <a:bodyPr wrap="square">
-            <a:spAutoFit/>
-          </a:bodyPr>
-          <a:lstStyle/>
-          <a:p>
-            <a:pPr algn="ctr"/>
-            <a:r>
-              <a:rPr sz="1200" b="0" i="0">
-                <a:solidFill>
-                  <a:srgbClr val="888888"/>
-                </a:solidFill>
-                <a:latin typeface="Meiryo UI"/>
-              </a:rPr>
-              <a:t>サービスラインナップ拡充。経営管理領域を全方位でカバーする体制を構築</a:t>
-            </a:r>
-          </a:p>
-        </p:txBody>
-      </p:sp>
-      <p:sp>
-        <p:nvSpPr>
-          <p:cNvPr id="21" name="Rectangle 20"/>
           <p:cNvSpPr/>
           <p:nvPr/>
         </p:nvSpPr>
@@ -3931,7 +3603,7 @@
       </p:sp>
       <p:sp>
         <p:nvSpPr>
-          <p:cNvPr id="22" name="TextBox 21"/>
+          <p:cNvPr id="8" name="TextBox 7"/>
           <p:cNvSpPr txBox="1"/>
           <p:nvPr/>
         </p:nvSpPr>
@@ -3960,7 +3632,7 @@
                 </a:solidFill>
                 <a:latin typeface="Meiryo UI"/>
               </a:rPr>
-              <a:t>TAMの5倍拡大：</a:t>
+              <a:t>FY28 中長期財務ターゲット：</a:t>
             </a:r>
             <a:r>
               <a:rPr sz="1400" b="0" i="0">
@@ -3969,14 +3641,14 @@
                 </a:solidFill>
                 <a:latin typeface="Meiryo UI"/>
               </a:rPr>
-              <a:t> デジタルツール市場（2.8兆円）→ デジタルワーカー市場（14.1兆円）へ　｜　FY28目標：売上900億円以上 / EBITDA270億円以上 / 事業CF180億円以上</a:t>
+              <a:t> 売上高900億円以上 / EBITDA270億円以上 / 事業CF180億円以上　｜　TAMの5倍拡大：デジタルツール市場（2.8兆円）→ デジタルワーカー市場（14.1兆円）</a:t>
             </a:r>
           </a:p>
         </p:txBody>
       </p:sp>
       <p:pic>
         <p:nvPicPr>
-          <p:cNvPr id="23" name="Picture 22" descr="logo.png"/>
+          <p:cNvPr id="9" name="Picture 8" descr="logo.png"/>
           <p:cNvPicPr>
             <a:picLocks noChangeAspect="1"/>
           </p:cNvPicPr>
@@ -4000,7 +3672,7 @@
       </p:pic>
       <p:sp>
         <p:nvSpPr>
-          <p:cNvPr id="24" name="Rectangle 23"/>
+          <p:cNvPr id="10" name="Rectangle 9"/>
           <p:cNvSpPr/>
           <p:nvPr/>
         </p:nvSpPr>
@@ -4044,7 +3716,7 @@
       </p:sp>
       <p:sp>
         <p:nvSpPr>
-          <p:cNvPr id="25" name="TextBox 24"/>
+          <p:cNvPr id="11" name="TextBox 10"/>
           <p:cNvSpPr txBox="1"/>
           <p:nvPr/>
         </p:nvSpPr>
@@ -4078,7 +3750,7 @@
       </p:sp>
       <p:sp>
         <p:nvSpPr>
-          <p:cNvPr id="26" name="TextBox 25"/>
+          <p:cNvPr id="12" name="TextBox 11"/>
           <p:cNvSpPr txBox="1"/>
           <p:nvPr/>
         </p:nvSpPr>
@@ -4280,7 +3952,7 @@
                 </a:solidFill>
                 <a:latin typeface="Meiryo UI"/>
               </a:rPr>
-              <a:t>お電話でお伺いした内容を整理し、貴社固有の課題仮説を立てさせていただきました。合っている・合っていないも含めて率直にお聞かせいただければと思います。</a:t>
+              <a:t>お電話でお伺いした事実から、貴社固有の課題仮説を整理しました。合っている・合っていないも含めて率直にお聞かせいただければと思います。</a:t>
             </a:r>
           </a:p>
         </p:txBody>
@@ -4304,8 +3976,9 @@
                 <a:tableStyleId>{5C22544A-7EE6-4342-B048-85BDC9FD1C3A}</a:tableStyleId>
               </a:tblPr>
               <a:tblGrid>
-                <a:gridCol w="5257800"/>
-                <a:gridCol w="5257800"/>
+                <a:gridCol w="3505200"/>
+                <a:gridCol w="3505200"/>
+                <a:gridCol w="3505200"/>
               </a:tblGrid>
               <a:tr h="365760">
                 <a:tc>
@@ -4344,7 +4017,30 @@
                           </a:solidFill>
                           <a:latin typeface="Meiryo UI"/>
                         </a:rPr>
-                        <a:t>課題の核心（Insight）</a:t>
+                        <a:t>課題仮説</a:t>
+                      </a:r>
+                    </a:p>
+                  </a:txBody>
+                  <a:tcPr>
+                    <a:solidFill>
+                      <a:srgbClr val="1D3461"/>
+                    </a:solidFill>
+                  </a:tcPr>
+                </a:tc>
+                <a:tc>
+                  <a:txBody>
+                    <a:bodyPr wrap="square"/>
+                    <a:lstStyle/>
+                    <a:p>
+                      <a:pPr algn="ctr"/>
+                      <a:r>
+                        <a:rPr sz="1400" b="1" i="0">
+                          <a:solidFill>
+                            <a:srgbClr val="FFFFFF"/>
+                          </a:solidFill>
+                          <a:latin typeface="Meiryo UI"/>
+                        </a:rPr>
+                        <a:t>なぜ起きているか（マネフォ固有の構造要因）</a:t>
                       </a:r>
                     </a:p>
                   </a:txBody>
@@ -4369,7 +4065,7 @@
                           </a:solidFill>
                           <a:latin typeface="Meiryo UI"/>
                         </a:rPr>
-                        <a:t>受注率に個人間バラつき</a:t>
+                        <a:t>受注率に個人間バラつき。機能売りになりがち。提案の仮説もばらつく</a:t>
                       </a:r>
                     </a:p>
                   </a:txBody>
@@ -4392,7 +4088,7 @@
                           </a:solidFill>
                           <a:latin typeface="Meiryo UI"/>
                         </a:rPr>
-                        <a:t>提案の型がない。</a:t>
+                        <a:t>「課題パターン×プロダクト組み合わせ」の型がない。</a:t>
                       </a:r>
                       <a:r>
                         <a:rPr sz="1400" b="0" i="0">
@@ -4401,7 +4097,30 @@
                           </a:solidFill>
                           <a:latin typeface="Meiryo UI"/>
                         </a:rPr>
-                        <a:t> 60超プロダクトの最適組み合わせは個人知識依存。型なし＝商品知識の差＝受注率の差</a:t>
+                        <a:t> 60超プロダクトの最適組み合わせは個人の商品知識依存。型なし＝商品知識の差＝受注率の差</a:t>
+                      </a:r>
+                    </a:p>
+                  </a:txBody>
+                  <a:tcPr>
+                    <a:solidFill>
+                      <a:srgbClr val="F5F7FA"/>
+                    </a:solidFill>
+                  </a:tcPr>
+                </a:tc>
+                <a:tc>
+                  <a:txBody>
+                    <a:bodyPr wrap="square"/>
+                    <a:lstStyle/>
+                    <a:p>
+                      <a:pPr algn="l"/>
+                      <a:r>
+                        <a:rPr sz="1400" b="0" i="0">
+                          <a:solidFill>
+                            <a:srgbClr val="1A1A1A"/>
+                          </a:solidFill>
+                          <a:latin typeface="Meiryo UI"/>
+                        </a:rPr>
+                        <a:t>会計は業種×規模×フェーズで業務フローが根本的に異なり汎用スクリプトでは対応不可。競合との機能比較→価格勝負に陥り提案の質でしか差がつかない</a:t>
                       </a:r>
                     </a:p>
                   </a:txBody>
@@ -4426,7 +4145,7 @@
                           </a:solidFill>
                           <a:latin typeface="Meiryo UI"/>
                         </a:rPr>
-                        <a:t>中途がワークしない（1人あたり売上低下）</a:t>
+                        <a:t>中途採用を増やしているがワークしない。1人あたり売上が低下</a:t>
                       </a:r>
                     </a:p>
                   </a:txBody>
@@ -4458,7 +4177,30 @@
                           </a:solidFill>
                           <a:latin typeface="Meiryo UI"/>
                         </a:rPr>
-                        <a:t> 会計×60超×SaaS/Fintech/AI三層構造は他SaaSと別次元</a:t>
+                        <a:t> 採用時の評価と実配属後のパフォーマンスにギャップが生じやすい</a:t>
+                      </a:r>
+                    </a:p>
+                  </a:txBody>
+                  <a:tcPr>
+                    <a:solidFill>
+                      <a:srgbClr val="FFFFFF"/>
+                    </a:solidFill>
+                  </a:tcPr>
+                </a:tc>
+                <a:tc>
+                  <a:txBody>
+                    <a:bodyPr wrap="square"/>
+                    <a:lstStyle/>
+                    <a:p>
+                      <a:pPr algn="l"/>
+                      <a:r>
+                        <a:rPr sz="1400" b="0" i="0">
+                          <a:solidFill>
+                            <a:srgbClr val="1A1A1A"/>
+                          </a:solidFill>
+                          <a:latin typeface="Meiryo UI"/>
+                        </a:rPr>
+                        <a:t>「会計×60超プロダクト×SaaS/Fintech/AI三層構造」は他SaaSと比較にならない複雑さ。前職スキルがそのまま通用せず得意な1-2商品に偏る</a:t>
                       </a:r>
                     </a:p>
                   </a:txBody>
@@ -4483,7 +4225,7 @@
                           </a:solidFill>
                           <a:latin typeface="Meiryo UI"/>
                         </a:rPr>
-                        <a:t>Salesforceあり・Excel併用</a:t>
+                        <a:t>Salesforce利用中・集計はExcel併用。「戦略と実行の断絶」セミナーに参加</a:t>
                       </a:r>
                     </a:p>
                   </a:txBody>
@@ -4506,7 +4248,7 @@
                           </a:solidFill>
                           <a:latin typeface="Meiryo UI"/>
                         </a:rPr>
-                        <a:t>介入ポイントが見えない。</a:t>
+                        <a:t>受注率低下の原因をデータで特定できず介入ポイントが見えない。</a:t>
                       </a:r>
                       <a:r>
                         <a:rPr sz="1400" b="0" i="0">
@@ -4515,7 +4257,30 @@
                           </a:solidFill>
                           <a:latin typeface="Meiryo UI"/>
                         </a:rPr>
-                        <a:t> フェーズ別受注率・担当者別分析不可。戦略はあるが実行を支える基盤がない</a:t>
+                        <a:t> 戦略は描けているが実行を支える基盤がない</a:t>
+                      </a:r>
+                    </a:p>
+                  </a:txBody>
+                  <a:tcPr>
+                    <a:solidFill>
+                      <a:srgbClr val="F5F7FA"/>
+                    </a:solidFill>
+                  </a:tcPr>
+                </a:tc>
+                <a:tc>
+                  <a:txBody>
+                    <a:bodyPr wrap="square"/>
+                    <a:lstStyle/>
+                    <a:p>
+                      <a:pPr algn="l"/>
+                      <a:r>
+                        <a:rPr sz="1400" b="0" i="0">
+                          <a:solidFill>
+                            <a:srgbClr val="1A1A1A"/>
+                          </a:solidFill>
+                          <a:latin typeface="Meiryo UI"/>
+                        </a:rPr>
+                        <a:t>フェーズ別受注率・リードソース別担当者別の分析が不可。Excel集計＝ドリルダウンできない＝PDCAが回せない</a:t>
                       </a:r>
                     </a:p>
                   </a:txBody>
@@ -4623,7 +4388,7 @@
                 </a:solidFill>
                 <a:latin typeface="Meiryo UI"/>
               </a:rPr>
-              <a:t>。戦略はあるが実行を支える基盤がない</a:t>
+              <a:t>。採用数に比例して売上が伸びる組織構造が実現できていない</a:t>
             </a:r>
           </a:p>
         </p:txBody>
@@ -4968,7 +4733,7 @@
                 </a:solidFill>
                 <a:latin typeface="Meiryo UI"/>
               </a:rPr>
-              <a:t>ASIS：3つの仮説障壁</a:t>
+              <a:t>ASIS：戦略推進にあたっての仮説障壁</a:t>
             </a:r>
           </a:p>
         </p:txBody>
@@ -5002,7 +4767,7 @@
                 </a:solidFill>
                 <a:latin typeface="Meiryo UI"/>
               </a:rPr>
-              <a:t>TOBE：3つの解決施策</a:t>
+              <a:t>TOBE：解決策・ご提案骨子</a:t>
             </a:r>
           </a:p>
         </p:txBody>
@@ -5125,7 +4890,7 @@
                 </a:solidFill>
                 <a:latin typeface="Meiryo UI"/>
               </a:rPr>
-              <a:t>提案の型なし→個人の商品知識に依存</a:t>
+              <a:t>「課題パターン×組み合わせ提案」の型がなく個人の商品知識に依存</a:t>
             </a:r>
           </a:p>
           <a:p>
@@ -5153,7 +4918,35 @@
                 </a:solidFill>
                 <a:latin typeface="Meiryo UI"/>
               </a:rPr>
-              <a:t>ヒアリング浅→機能売りに逃げる構造</a:t>
+              <a:t>ヒアリングが浅いまま提案に入り、機能売りに逃げる構造</a:t>
+            </a:r>
+          </a:p>
+          <a:p>
+            <a:pPr>
+              <a:spcBef>
+                <a:spcPts val="300"/>
+              </a:spcBef>
+              <a:spcAft>
+                <a:spcPts val="100"/>
+              </a:spcAft>
+            </a:pPr>
+            <a:r>
+              <a:rPr sz="1400" b="0" i="0">
+                <a:solidFill>
+                  <a:srgbClr val="888888"/>
+                </a:solidFill>
+                <a:latin typeface="Meiryo UI"/>
+              </a:rPr>
+              <a:t>      – </a:t>
+            </a:r>
+            <a:r>
+              <a:rPr sz="1400" b="0" i="0">
+                <a:solidFill>
+                  <a:srgbClr val="1A1A1A"/>
+                </a:solidFill>
+                <a:latin typeface="Meiryo UI"/>
+              </a:rPr>
+              <a:t>競合との機能比較→価格勝負に陥るケースが増加</a:t>
             </a:r>
           </a:p>
           <a:p>
@@ -5209,7 +5002,7 @@
                 </a:solidFill>
                 <a:latin typeface="Meiryo UI"/>
               </a:rPr>
-              <a:t>採用市場変化＋マネフォ固有の複雑さ</a:t>
+              <a:t>採用市場の構造変化×マネフォ固有の複雑さが重なる</a:t>
             </a:r>
           </a:p>
           <a:p>
@@ -5237,7 +5030,35 @@
                 </a:solidFill>
                 <a:latin typeface="Meiryo UI"/>
               </a:rPr>
-              <a:t>前職スキルが通用せず1-2商品に偏る</a:t>
+              <a:t>前職スキルが通用せず、得意な1-2商品に偏る</a:t>
+            </a:r>
+          </a:p>
+          <a:p>
+            <a:pPr>
+              <a:spcBef>
+                <a:spcPts val="300"/>
+              </a:spcBef>
+              <a:spcAft>
+                <a:spcPts val="100"/>
+              </a:spcAft>
+            </a:pPr>
+            <a:r>
+              <a:rPr sz="1400" b="0" i="0">
+                <a:solidFill>
+                  <a:srgbClr val="888888"/>
+                </a:solidFill>
+                <a:latin typeface="Meiryo UI"/>
+              </a:rPr>
+              <a:t>      – </a:t>
+            </a:r>
+            <a:r>
+              <a:rPr sz="1400" b="0" i="0">
+                <a:solidFill>
+                  <a:srgbClr val="1A1A1A"/>
+                </a:solidFill>
+                <a:latin typeface="Meiryo UI"/>
+              </a:rPr>
+              <a:t>採用数が増えても1人あたり売上が低下</a:t>
             </a:r>
           </a:p>
           <a:p>
@@ -5293,7 +5114,7 @@
                 </a:solidFill>
                 <a:latin typeface="Meiryo UI"/>
               </a:rPr>
-              <a:t>フェーズ別受注率が可視化されていない</a:t>
+              <a:t>どのフェーズで受注率が落ちているか可視化できていない</a:t>
             </a:r>
           </a:p>
           <a:p>
@@ -5321,7 +5142,35 @@
                 </a:solidFill>
                 <a:latin typeface="Meiryo UI"/>
               </a:rPr>
-              <a:t>Excel併用→PDCAが回せない</a:t>
+              <a:t>Excel集計＝ドリルダウン不可＝PDCAの回転が遅い</a:t>
+            </a:r>
+          </a:p>
+          <a:p>
+            <a:pPr>
+              <a:spcBef>
+                <a:spcPts val="300"/>
+              </a:spcBef>
+              <a:spcAft>
+                <a:spcPts val="100"/>
+              </a:spcAft>
+            </a:pPr>
+            <a:r>
+              <a:rPr sz="1400" b="0" i="0">
+                <a:solidFill>
+                  <a:srgbClr val="888888"/>
+                </a:solidFill>
+                <a:latin typeface="Meiryo UI"/>
+              </a:rPr>
+              <a:t>      – </a:t>
+            </a:r>
+            <a:r>
+              <a:rPr sz="1400" b="0" i="0">
+                <a:solidFill>
+                  <a:srgbClr val="1A1A1A"/>
+                </a:solidFill>
+                <a:latin typeface="Meiryo UI"/>
+              </a:rPr>
+              <a:t>営業企画として打ち手の判断材料がない</a:t>
             </a:r>
           </a:p>
         </p:txBody>
@@ -5400,7 +5249,7 @@
                 </a:solidFill>
                 <a:latin typeface="Meiryo UI"/>
               </a:rPr>
-              <a:t>カスタマーパスで「意思決定プロセス」に沿った提案型を実装</a:t>
+              <a:t>カスタマーパス設計：意思決定プロセスに沿ったヒアリングの型を実装</a:t>
             </a:r>
           </a:p>
           <a:p>
@@ -5428,7 +5277,35 @@
                 </a:solidFill>
                 <a:latin typeface="Meiryo UI"/>
               </a:rPr>
-              <a:t>中途でも型に沿えば最適提案が可能</a:t>
+              <a:t>ニーズマップ：課題パターン×プロダクト組み合わせを体系化</a:t>
+            </a:r>
+          </a:p>
+          <a:p>
+            <a:pPr>
+              <a:spcBef>
+                <a:spcPts val="300"/>
+              </a:spcBef>
+              <a:spcAft>
+                <a:spcPts val="100"/>
+              </a:spcAft>
+            </a:pPr>
+            <a:r>
+              <a:rPr sz="1400" b="0" i="0">
+                <a:solidFill>
+                  <a:srgbClr val="888888"/>
+                </a:solidFill>
+                <a:latin typeface="Meiryo UI"/>
+              </a:rPr>
+              <a:t>      – </a:t>
+            </a:r>
+            <a:r>
+              <a:rPr sz="1400" b="0" i="0">
+                <a:solidFill>
+                  <a:srgbClr val="1A1A1A"/>
+                </a:solidFill>
+                <a:latin typeface="Meiryo UI"/>
+              </a:rPr>
+              <a:t>中途でも型に沿えば最適提案が可能に</a:t>
             </a:r>
           </a:p>
           <a:p>
@@ -5512,7 +5389,35 @@
                 </a:solidFill>
                 <a:latin typeface="Meiryo UI"/>
               </a:rPr>
-              <a:t>Excel撤廃→営業企画がデータで介入判断</a:t>
+              <a:t>リードソース×担当者別のドリルダウン分析</a:t>
+            </a:r>
+          </a:p>
+          <a:p>
+            <a:pPr>
+              <a:spcBef>
+                <a:spcPts val="300"/>
+              </a:spcBef>
+              <a:spcAft>
+                <a:spcPts val="100"/>
+              </a:spcAft>
+            </a:pPr>
+            <a:r>
+              <a:rPr sz="1400" b="0" i="0">
+                <a:solidFill>
+                  <a:srgbClr val="888888"/>
+                </a:solidFill>
+                <a:latin typeface="Meiryo UI"/>
+              </a:rPr>
+              <a:t>      – </a:t>
+            </a:r>
+            <a:r>
+              <a:rPr sz="1400" b="0" i="0">
+                <a:solidFill>
+                  <a:srgbClr val="1A1A1A"/>
+                </a:solidFill>
+                <a:latin typeface="Meiryo UI"/>
+              </a:rPr>
+              <a:t>Excel撤廃→営業企画がデータで即時介入</a:t>
             </a:r>
           </a:p>
           <a:p>
@@ -5541,6 +5446,34 @@
                 <a:latin typeface="Meiryo UI"/>
               </a:rPr>
               <a:t>Buddy伴走：戦略と実行の断絶を埋める</a:t>
+            </a:r>
+          </a:p>
+          <a:p>
+            <a:pPr>
+              <a:spcBef>
+                <a:spcPts val="300"/>
+              </a:spcBef>
+              <a:spcAft>
+                <a:spcPts val="100"/>
+              </a:spcAft>
+            </a:pPr>
+            <a:r>
+              <a:rPr sz="1400" b="0" i="0">
+                <a:solidFill>
+                  <a:srgbClr val="888888"/>
+                </a:solidFill>
+                <a:latin typeface="Meiryo UI"/>
+              </a:rPr>
+              <a:t>      – </a:t>
+            </a:r>
+            <a:r>
+              <a:rPr sz="1400" b="0" i="0">
+                <a:solidFill>
+                  <a:srgbClr val="1A1A1A"/>
+                </a:solidFill>
+                <a:latin typeface="Meiryo UI"/>
+              </a:rPr>
+              <a:t>朝会夕会の運用設計×専任Buddy伴走で行動変容を支援</a:t>
             </a:r>
           </a:p>
           <a:p>
@@ -5685,7 +5618,7 @@
                 </a:solidFill>
                 <a:latin typeface="Meiryo UI"/>
               </a:rPr>
-              <a:t> 営業の型の可視化（カスタマーパス作成）＋ データ基盤で介入ポイントを可視化</a:t>
+              <a:t> 営業の型の可視化（カスタマーパス＋ニーズマップ作成）＋ データ基盤で介入ポイントを可視化</a:t>
             </a:r>
           </a:p>
         </p:txBody>

--- a/slides_p10_p12.pptx
+++ b/slides_p10_p12.pptx
@@ -3246,6 +3246,1045 @@
           </a:p>
         </p:txBody>
       </p:sp>
+      <p:sp>
+        <p:nvSpPr>
+          <p:cNvPr id="6" name="Rectangle 5"/>
+          <p:cNvSpPr/>
+          <p:nvPr/>
+        </p:nvSpPr>
+        <p:spPr>
+          <a:xfrm>
+            <a:off x="838504" y="1280160"/>
+            <a:ext cx="3352800" cy="4408322"/>
+          </a:xfrm>
+          <a:prstGeom prst="rect">
+            <a:avLst/>
+          </a:prstGeom>
+          <a:solidFill>
+            <a:srgbClr val="F5F5F5"/>
+          </a:solidFill>
+          <a:ln>
+            <a:noFill/>
+          </a:ln>
+          <a:effectLst/>
+        </p:spPr>
+        <p:style>
+          <a:lnRef idx="1">
+            <a:schemeClr val="accent1"/>
+          </a:lnRef>
+          <a:fillRef idx="3">
+            <a:schemeClr val="accent1"/>
+          </a:fillRef>
+          <a:effectRef idx="2">
+            <a:schemeClr val="accent1"/>
+          </a:effectRef>
+          <a:fontRef idx="minor">
+            <a:schemeClr val="lt1"/>
+          </a:fontRef>
+        </p:style>
+        <p:txBody>
+          <a:bodyPr rtlCol="0" anchor="ctr"/>
+          <a:lstStyle/>
+          <a:p>
+            <a:pPr algn="ctr"/>
+          </a:p>
+        </p:txBody>
+      </p:sp>
+      <p:sp>
+        <p:nvSpPr>
+          <p:cNvPr id="7" name="Rectangle 6"/>
+          <p:cNvSpPr/>
+          <p:nvPr/>
+        </p:nvSpPr>
+        <p:spPr>
+          <a:xfrm>
+            <a:off x="838504" y="1280160"/>
+            <a:ext cx="3352800" cy="101600"/>
+          </a:xfrm>
+          <a:prstGeom prst="rect">
+            <a:avLst/>
+          </a:prstGeom>
+          <a:solidFill>
+            <a:srgbClr val="1D3461"/>
+          </a:solidFill>
+          <a:ln>
+            <a:noFill/>
+          </a:ln>
+          <a:effectLst/>
+        </p:spPr>
+        <p:style>
+          <a:lnRef idx="1">
+            <a:schemeClr val="accent1"/>
+          </a:lnRef>
+          <a:fillRef idx="3">
+            <a:schemeClr val="accent1"/>
+          </a:fillRef>
+          <a:effectRef idx="2">
+            <a:schemeClr val="accent1"/>
+          </a:effectRef>
+          <a:fontRef idx="minor">
+            <a:schemeClr val="lt1"/>
+          </a:fontRef>
+        </p:style>
+        <p:txBody>
+          <a:bodyPr rtlCol="0" anchor="ctr"/>
+          <a:lstStyle/>
+          <a:p>
+            <a:pPr algn="ctr"/>
+          </a:p>
+        </p:txBody>
+      </p:sp>
+      <p:sp>
+        <p:nvSpPr>
+          <p:cNvPr id="8" name="Oval 7"/>
+          <p:cNvSpPr/>
+          <p:nvPr/>
+        </p:nvSpPr>
+        <p:spPr>
+          <a:xfrm>
+            <a:off x="2286304" y="1518920"/>
+            <a:ext cx="457200" cy="457200"/>
+          </a:xfrm>
+          <a:prstGeom prst="ellipse">
+            <a:avLst/>
+          </a:prstGeom>
+          <a:solidFill>
+            <a:srgbClr val="1D3461"/>
+          </a:solidFill>
+          <a:ln>
+            <a:noFill/>
+          </a:ln>
+          <a:effectLst/>
+        </p:spPr>
+        <p:style>
+          <a:lnRef idx="1">
+            <a:schemeClr val="accent1"/>
+          </a:lnRef>
+          <a:fillRef idx="3">
+            <a:schemeClr val="accent1"/>
+          </a:fillRef>
+          <a:effectRef idx="2">
+            <a:schemeClr val="accent1"/>
+          </a:effectRef>
+          <a:fontRef idx="minor">
+            <a:schemeClr val="lt1"/>
+          </a:fontRef>
+        </p:style>
+        <p:txBody>
+          <a:bodyPr rtlCol="0" anchor="ctr" wrap="none"/>
+          <a:lstStyle/>
+          <a:p>
+            <a:pPr algn="ctr"/>
+            <a:r>
+              <a:rPr sz="1000" b="1" i="0">
+                <a:solidFill>
+                  <a:srgbClr val="FFFFFF"/>
+                </a:solidFill>
+                <a:latin typeface="Meiryo UI"/>
+              </a:rPr>
+              <a:t>SaaS</a:t>
+            </a:r>
+          </a:p>
+        </p:txBody>
+      </p:sp>
+      <p:sp>
+        <p:nvSpPr>
+          <p:cNvPr id="9" name="TextBox 8"/>
+          <p:cNvSpPr txBox="1"/>
+          <p:nvPr/>
+        </p:nvSpPr>
+        <p:spPr>
+          <a:xfrm>
+            <a:off x="948232" y="2067560"/>
+            <a:ext cx="3133344" cy="457200"/>
+          </a:xfrm>
+          <a:prstGeom prst="rect">
+            <a:avLst/>
+          </a:prstGeom>
+          <a:noFill/>
+          <a:effectLst/>
+        </p:spPr>
+        <p:txBody>
+          <a:bodyPr wrap="square">
+            <a:spAutoFit/>
+          </a:bodyPr>
+          <a:lstStyle/>
+          <a:p>
+            <a:pPr algn="ctr"/>
+            <a:r>
+              <a:rPr sz="1400" b="1" i="0">
+                <a:solidFill>
+                  <a:srgbClr val="1A1A1A"/>
+                </a:solidFill>
+                <a:latin typeface="Meiryo UI"/>
+              </a:rPr>
+              <a:t>バックオフィスSaaSの価値向上</a:t>
+            </a:r>
+          </a:p>
+        </p:txBody>
+      </p:sp>
+      <p:sp>
+        <p:nvSpPr>
+          <p:cNvPr id="10" name="TextBox 9"/>
+          <p:cNvSpPr txBox="1"/>
+          <p:nvPr/>
+        </p:nvSpPr>
+        <p:spPr>
+          <a:xfrm>
+            <a:off x="948232" y="2524760"/>
+            <a:ext cx="3133344" cy="3163722"/>
+          </a:xfrm>
+          <a:prstGeom prst="rect">
+            <a:avLst/>
+          </a:prstGeom>
+          <a:noFill/>
+          <a:effectLst/>
+        </p:spPr>
+        <p:txBody>
+          <a:bodyPr wrap="square">
+            <a:spAutoFit/>
+          </a:bodyPr>
+          <a:lstStyle/>
+          <a:p>
+            <a:pPr algn="ctr"/>
+            <a:r>
+              <a:rPr sz="1400" b="0" i="0">
+                <a:solidFill>
+                  <a:srgbClr val="888888"/>
+                </a:solidFill>
+                <a:latin typeface="Meiryo UI"/>
+              </a:rPr>
+              <a:t>60超のプロダクトで会計・人事・法務を網羅。顧客基盤の拡大とARPA向上を推進。豊富な業務ロジックを強みに顧客基盤を拡大</a:t>
+            </a:r>
+          </a:p>
+        </p:txBody>
+      </p:sp>
+      <p:sp>
+        <p:nvSpPr>
+          <p:cNvPr id="11" name="Rectangle 10"/>
+          <p:cNvSpPr/>
+          <p:nvPr/>
+        </p:nvSpPr>
+        <p:spPr>
+          <a:xfrm>
+            <a:off x="4419904" y="1280160"/>
+            <a:ext cx="3352800" cy="4408322"/>
+          </a:xfrm>
+          <a:prstGeom prst="rect">
+            <a:avLst/>
+          </a:prstGeom>
+          <a:solidFill>
+            <a:srgbClr val="F5F5F5"/>
+          </a:solidFill>
+          <a:ln>
+            <a:noFill/>
+          </a:ln>
+          <a:effectLst/>
+        </p:spPr>
+        <p:style>
+          <a:lnRef idx="1">
+            <a:schemeClr val="accent1"/>
+          </a:lnRef>
+          <a:fillRef idx="3">
+            <a:schemeClr val="accent1"/>
+          </a:fillRef>
+          <a:effectRef idx="2">
+            <a:schemeClr val="accent1"/>
+          </a:effectRef>
+          <a:fontRef idx="minor">
+            <a:schemeClr val="lt1"/>
+          </a:fontRef>
+        </p:style>
+        <p:txBody>
+          <a:bodyPr rtlCol="0" anchor="ctr"/>
+          <a:lstStyle/>
+          <a:p>
+            <a:pPr algn="ctr"/>
+          </a:p>
+        </p:txBody>
+      </p:sp>
+      <p:sp>
+        <p:nvSpPr>
+          <p:cNvPr id="12" name="Rectangle 11"/>
+          <p:cNvSpPr/>
+          <p:nvPr/>
+        </p:nvSpPr>
+        <p:spPr>
+          <a:xfrm>
+            <a:off x="4419904" y="1280160"/>
+            <a:ext cx="3352800" cy="101600"/>
+          </a:xfrm>
+          <a:prstGeom prst="rect">
+            <a:avLst/>
+          </a:prstGeom>
+          <a:solidFill>
+            <a:srgbClr val="1B4FA8"/>
+          </a:solidFill>
+          <a:ln>
+            <a:noFill/>
+          </a:ln>
+          <a:effectLst/>
+        </p:spPr>
+        <p:style>
+          <a:lnRef idx="1">
+            <a:schemeClr val="accent1"/>
+          </a:lnRef>
+          <a:fillRef idx="3">
+            <a:schemeClr val="accent1"/>
+          </a:fillRef>
+          <a:effectRef idx="2">
+            <a:schemeClr val="accent1"/>
+          </a:effectRef>
+          <a:fontRef idx="minor">
+            <a:schemeClr val="lt1"/>
+          </a:fontRef>
+        </p:style>
+        <p:txBody>
+          <a:bodyPr rtlCol="0" anchor="ctr"/>
+          <a:lstStyle/>
+          <a:p>
+            <a:pPr algn="ctr"/>
+          </a:p>
+        </p:txBody>
+      </p:sp>
+      <p:sp>
+        <p:nvSpPr>
+          <p:cNvPr id="13" name="Oval 12"/>
+          <p:cNvSpPr/>
+          <p:nvPr/>
+        </p:nvSpPr>
+        <p:spPr>
+          <a:xfrm>
+            <a:off x="5867704" y="1518920"/>
+            <a:ext cx="457200" cy="457200"/>
+          </a:xfrm>
+          <a:prstGeom prst="ellipse">
+            <a:avLst/>
+          </a:prstGeom>
+          <a:solidFill>
+            <a:srgbClr val="1B4FA8"/>
+          </a:solidFill>
+          <a:ln>
+            <a:noFill/>
+          </a:ln>
+          <a:effectLst/>
+        </p:spPr>
+        <p:style>
+          <a:lnRef idx="1">
+            <a:schemeClr val="accent1"/>
+          </a:lnRef>
+          <a:fillRef idx="3">
+            <a:schemeClr val="accent1"/>
+          </a:fillRef>
+          <a:effectRef idx="2">
+            <a:schemeClr val="accent1"/>
+          </a:effectRef>
+          <a:fontRef idx="minor">
+            <a:schemeClr val="lt1"/>
+          </a:fontRef>
+        </p:style>
+        <p:txBody>
+          <a:bodyPr rtlCol="0" anchor="ctr" wrap="none"/>
+          <a:lstStyle/>
+          <a:p>
+            <a:pPr algn="ctr"/>
+            <a:r>
+              <a:rPr sz="1000" b="1" i="0">
+                <a:solidFill>
+                  <a:srgbClr val="FFFFFF"/>
+                </a:solidFill>
+                <a:latin typeface="Meiryo UI"/>
+              </a:rPr>
+              <a:t>AI</a:t>
+            </a:r>
+          </a:p>
+        </p:txBody>
+      </p:sp>
+      <p:sp>
+        <p:nvSpPr>
+          <p:cNvPr id="14" name="TextBox 13"/>
+          <p:cNvSpPr txBox="1"/>
+          <p:nvPr/>
+        </p:nvSpPr>
+        <p:spPr>
+          <a:xfrm>
+            <a:off x="4529632" y="2067560"/>
+            <a:ext cx="3133344" cy="457200"/>
+          </a:xfrm>
+          <a:prstGeom prst="rect">
+            <a:avLst/>
+          </a:prstGeom>
+          <a:noFill/>
+          <a:effectLst/>
+        </p:spPr>
+        <p:txBody>
+          <a:bodyPr wrap="square">
+            <a:spAutoFit/>
+          </a:bodyPr>
+          <a:lstStyle/>
+          <a:p>
+            <a:pPr algn="ctr"/>
+            <a:r>
+              <a:rPr sz="1400" b="1" i="0">
+                <a:solidFill>
+                  <a:srgbClr val="1A1A1A"/>
+                </a:solidFill>
+                <a:latin typeface="Meiryo UI"/>
+              </a:rPr>
+              <a:t>AIプロダクトの開発・提供</a:t>
+            </a:r>
+          </a:p>
+        </p:txBody>
+      </p:sp>
+      <p:sp>
+        <p:nvSpPr>
+          <p:cNvPr id="15" name="TextBox 14"/>
+          <p:cNvSpPr txBox="1"/>
+          <p:nvPr/>
+        </p:nvSpPr>
+        <p:spPr>
+          <a:xfrm>
+            <a:off x="4529632" y="2524760"/>
+            <a:ext cx="3133344" cy="3163722"/>
+          </a:xfrm>
+          <a:prstGeom prst="rect">
+            <a:avLst/>
+          </a:prstGeom>
+          <a:noFill/>
+          <a:effectLst/>
+        </p:spPr>
+        <p:txBody>
+          <a:bodyPr wrap="square">
+            <a:spAutoFit/>
+          </a:bodyPr>
+          <a:lstStyle/>
+          <a:p>
+            <a:pPr algn="ctr"/>
+            <a:r>
+              <a:rPr sz="1400" b="0" i="0">
+                <a:solidFill>
+                  <a:srgbClr val="888888"/>
+                </a:solidFill>
+                <a:latin typeface="Meiryo UI"/>
+              </a:rPr>
+              <a:t>AIエージェント／AIネイティブプロダクト／AI×BPOサービスを展開。業務ロジックを活用し自律処理。デジタルツール→デジタルワーカー市場へTAM5倍拡大</a:t>
+            </a:r>
+          </a:p>
+        </p:txBody>
+      </p:sp>
+      <p:sp>
+        <p:nvSpPr>
+          <p:cNvPr id="16" name="Rectangle 15"/>
+          <p:cNvSpPr/>
+          <p:nvPr/>
+        </p:nvSpPr>
+        <p:spPr>
+          <a:xfrm>
+            <a:off x="8001304" y="1280160"/>
+            <a:ext cx="3352800" cy="4408322"/>
+          </a:xfrm>
+          <a:prstGeom prst="rect">
+            <a:avLst/>
+          </a:prstGeom>
+          <a:solidFill>
+            <a:srgbClr val="F5F5F5"/>
+          </a:solidFill>
+          <a:ln>
+            <a:noFill/>
+          </a:ln>
+          <a:effectLst/>
+        </p:spPr>
+        <p:style>
+          <a:lnRef idx="1">
+            <a:schemeClr val="accent1"/>
+          </a:lnRef>
+          <a:fillRef idx="3">
+            <a:schemeClr val="accent1"/>
+          </a:fillRef>
+          <a:effectRef idx="2">
+            <a:schemeClr val="accent1"/>
+          </a:effectRef>
+          <a:fontRef idx="minor">
+            <a:schemeClr val="lt1"/>
+          </a:fontRef>
+        </p:style>
+        <p:txBody>
+          <a:bodyPr rtlCol="0" anchor="ctr"/>
+          <a:lstStyle/>
+          <a:p>
+            <a:pPr algn="ctr"/>
+          </a:p>
+        </p:txBody>
+      </p:sp>
+      <p:sp>
+        <p:nvSpPr>
+          <p:cNvPr id="17" name="Rectangle 16"/>
+          <p:cNvSpPr/>
+          <p:nvPr/>
+        </p:nvSpPr>
+        <p:spPr>
+          <a:xfrm>
+            <a:off x="8001304" y="1280160"/>
+            <a:ext cx="3352800" cy="101600"/>
+          </a:xfrm>
+          <a:prstGeom prst="rect">
+            <a:avLst/>
+          </a:prstGeom>
+          <a:solidFill>
+            <a:srgbClr val="0066CD"/>
+          </a:solidFill>
+          <a:ln>
+            <a:noFill/>
+          </a:ln>
+          <a:effectLst/>
+        </p:spPr>
+        <p:style>
+          <a:lnRef idx="1">
+            <a:schemeClr val="accent1"/>
+          </a:lnRef>
+          <a:fillRef idx="3">
+            <a:schemeClr val="accent1"/>
+          </a:fillRef>
+          <a:effectRef idx="2">
+            <a:schemeClr val="accent1"/>
+          </a:effectRef>
+          <a:fontRef idx="minor">
+            <a:schemeClr val="lt1"/>
+          </a:fontRef>
+        </p:style>
+        <p:txBody>
+          <a:bodyPr rtlCol="0" anchor="ctr"/>
+          <a:lstStyle/>
+          <a:p>
+            <a:pPr algn="ctr"/>
+          </a:p>
+        </p:txBody>
+      </p:sp>
+      <p:sp>
+        <p:nvSpPr>
+          <p:cNvPr id="18" name="Oval 17"/>
+          <p:cNvSpPr/>
+          <p:nvPr/>
+        </p:nvSpPr>
+        <p:spPr>
+          <a:xfrm>
+            <a:off x="9449104" y="1518920"/>
+            <a:ext cx="457200" cy="457200"/>
+          </a:xfrm>
+          <a:prstGeom prst="ellipse">
+            <a:avLst/>
+          </a:prstGeom>
+          <a:solidFill>
+            <a:srgbClr val="0066CD"/>
+          </a:solidFill>
+          <a:ln>
+            <a:noFill/>
+          </a:ln>
+          <a:effectLst/>
+        </p:spPr>
+        <p:style>
+          <a:lnRef idx="1">
+            <a:schemeClr val="accent1"/>
+          </a:lnRef>
+          <a:fillRef idx="3">
+            <a:schemeClr val="accent1"/>
+          </a:fillRef>
+          <a:effectRef idx="2">
+            <a:schemeClr val="accent1"/>
+          </a:effectRef>
+          <a:fontRef idx="minor">
+            <a:schemeClr val="lt1"/>
+          </a:fontRef>
+        </p:style>
+        <p:txBody>
+          <a:bodyPr rtlCol="0" anchor="ctr" wrap="none"/>
+          <a:lstStyle/>
+          <a:p>
+            <a:pPr algn="ctr"/>
+            <a:r>
+              <a:rPr sz="1000" b="1" i="0">
+                <a:solidFill>
+                  <a:srgbClr val="FFFFFF"/>
+                </a:solidFill>
+                <a:latin typeface="Meiryo UI"/>
+              </a:rPr>
+              <a:t>M&amp;A</a:t>
+            </a:r>
+          </a:p>
+        </p:txBody>
+      </p:sp>
+      <p:sp>
+        <p:nvSpPr>
+          <p:cNvPr id="19" name="TextBox 18"/>
+          <p:cNvSpPr txBox="1"/>
+          <p:nvPr/>
+        </p:nvSpPr>
+        <p:spPr>
+          <a:xfrm>
+            <a:off x="8111032" y="2067560"/>
+            <a:ext cx="3133344" cy="457200"/>
+          </a:xfrm>
+          <a:prstGeom prst="rect">
+            <a:avLst/>
+          </a:prstGeom>
+          <a:noFill/>
+          <a:effectLst/>
+        </p:spPr>
+        <p:txBody>
+          <a:bodyPr wrap="square">
+            <a:spAutoFit/>
+          </a:bodyPr>
+          <a:lstStyle/>
+          <a:p>
+            <a:pPr algn="ctr"/>
+            <a:r>
+              <a:rPr sz="1400" b="1" i="0">
+                <a:solidFill>
+                  <a:srgbClr val="1A1A1A"/>
+                </a:solidFill>
+                <a:latin typeface="Meiryo UI"/>
+              </a:rPr>
+              <a:t>M&amp;A戦略の遂行</a:t>
+            </a:r>
+          </a:p>
+        </p:txBody>
+      </p:sp>
+      <p:sp>
+        <p:nvSpPr>
+          <p:cNvPr id="20" name="TextBox 19"/>
+          <p:cNvSpPr txBox="1"/>
+          <p:nvPr/>
+        </p:nvSpPr>
+        <p:spPr>
+          <a:xfrm>
+            <a:off x="8111032" y="2524760"/>
+            <a:ext cx="3133344" cy="3163722"/>
+          </a:xfrm>
+          <a:prstGeom prst="rect">
+            <a:avLst/>
+          </a:prstGeom>
+          <a:noFill/>
+          <a:effectLst/>
+        </p:spPr>
+        <p:txBody>
+          <a:bodyPr wrap="square">
+            <a:spAutoFit/>
+          </a:bodyPr>
+          <a:lstStyle/>
+          <a:p>
+            <a:pPr algn="ctr"/>
+            <a:r>
+              <a:rPr sz="1400" b="0" i="0">
+                <a:solidFill>
+                  <a:srgbClr val="888888"/>
+                </a:solidFill>
+                <a:latin typeface="Meiryo UI"/>
+              </a:rPr>
+              <a:t>経営管理領域を全方位でカバーするためサービスを拡大。アウトルックコンサルティング社等グループジョイン。SaaS×Fintechの融合で顧客基盤を拡充</a:t>
+            </a:r>
+          </a:p>
+        </p:txBody>
+      </p:sp>
+      <p:sp>
+        <p:nvSpPr>
+          <p:cNvPr id="21" name="Rectangle 20"/>
+          <p:cNvSpPr/>
+          <p:nvPr/>
+        </p:nvSpPr>
+        <p:spPr>
+          <a:xfrm>
+            <a:off x="838504" y="5779922"/>
+            <a:ext cx="10515600" cy="502920"/>
+          </a:xfrm>
+          <a:prstGeom prst="rect">
+            <a:avLst/>
+          </a:prstGeom>
+          <a:solidFill>
+            <a:srgbClr val="1D3461"/>
+          </a:solidFill>
+          <a:ln>
+            <a:noFill/>
+          </a:ln>
+          <a:effectLst/>
+        </p:spPr>
+        <p:style>
+          <a:lnRef idx="1">
+            <a:schemeClr val="accent1"/>
+          </a:lnRef>
+          <a:fillRef idx="3">
+            <a:schemeClr val="accent1"/>
+          </a:fillRef>
+          <a:effectRef idx="2">
+            <a:schemeClr val="accent1"/>
+          </a:effectRef>
+          <a:fontRef idx="minor">
+            <a:schemeClr val="lt1"/>
+          </a:fontRef>
+        </p:style>
+        <p:txBody>
+          <a:bodyPr rtlCol="0" anchor="ctr"/>
+          <a:lstStyle/>
+          <a:p>
+            <a:pPr algn="ctr"/>
+          </a:p>
+        </p:txBody>
+      </p:sp>
+      <p:sp>
+        <p:nvSpPr>
+          <p:cNvPr id="22" name="TextBox 21"/>
+          <p:cNvSpPr txBox="1"/>
+          <p:nvPr/>
+        </p:nvSpPr>
+        <p:spPr>
+          <a:xfrm>
+            <a:off x="1021384" y="5779922"/>
+            <a:ext cx="10149840" cy="502920"/>
+          </a:xfrm>
+          <a:prstGeom prst="rect">
+            <a:avLst/>
+          </a:prstGeom>
+          <a:noFill/>
+          <a:effectLst/>
+        </p:spPr>
+        <p:txBody>
+          <a:bodyPr wrap="square">
+            <a:spAutoFit/>
+          </a:bodyPr>
+          <a:lstStyle/>
+          <a:p>
+            <a:pPr algn="ctr"/>
+            <a:r>
+              <a:rPr sz="1400" b="1" i="0">
+                <a:solidFill>
+                  <a:srgbClr val="FFFFFF"/>
+                </a:solidFill>
+                <a:latin typeface="Meiryo UI"/>
+              </a:rPr>
+              <a:t>FY28 中長期財務ターゲット：</a:t>
+            </a:r>
+            <a:r>
+              <a:rPr sz="1400" b="0" i="0">
+                <a:solidFill>
+                  <a:srgbClr val="FFFFFF"/>
+                </a:solidFill>
+                <a:latin typeface="Meiryo UI"/>
+              </a:rPr>
+              <a:t> 売上高900億円以上 / EBITDA270億円以上 / 事業CF180億円以上　｜　TAMの5倍拡大：デジタルツール市場（2.8兆円）→ デジタルワーカー市場（14.1兆円）</a:t>
+            </a:r>
+          </a:p>
+        </p:txBody>
+      </p:sp>
+      <p:pic>
+        <p:nvPicPr>
+          <p:cNvPr id="23" name="Picture 22" descr="logo.png"/>
+          <p:cNvPicPr>
+            <a:picLocks noChangeAspect="1"/>
+          </p:cNvPicPr>
+          <p:nvPr/>
+        </p:nvPicPr>
+        <p:blipFill>
+          <a:blip r:embed="rId2"/>
+          <a:stretch>
+            <a:fillRect/>
+          </a:stretch>
+        </p:blipFill>
+        <p:spPr>
+          <a:xfrm>
+            <a:off x="9338767" y="83210"/>
+            <a:ext cx="2016252" cy="627129"/>
+          </a:xfrm>
+          <a:prstGeom prst="rect">
+            <a:avLst/>
+          </a:prstGeom>
+        </p:spPr>
+      </p:pic>
+      <p:sp>
+        <p:nvSpPr>
+          <p:cNvPr id="24" name="Rectangle 23"/>
+          <p:cNvSpPr/>
+          <p:nvPr/>
+        </p:nvSpPr>
+        <p:spPr>
+          <a:xfrm>
+            <a:off x="838504" y="6355994"/>
+            <a:ext cx="10515600" cy="19050"/>
+          </a:xfrm>
+          <a:prstGeom prst="rect">
+            <a:avLst/>
+          </a:prstGeom>
+          <a:solidFill>
+            <a:srgbClr val="1A1A1A"/>
+          </a:solidFill>
+          <a:ln>
+            <a:noFill/>
+          </a:ln>
+          <a:effectLst/>
+        </p:spPr>
+        <p:style>
+          <a:lnRef idx="1">
+            <a:schemeClr val="accent1"/>
+          </a:lnRef>
+          <a:fillRef idx="3">
+            <a:schemeClr val="accent1"/>
+          </a:fillRef>
+          <a:effectRef idx="2">
+            <a:schemeClr val="accent1"/>
+          </a:effectRef>
+          <a:fontRef idx="minor">
+            <a:schemeClr val="lt1"/>
+          </a:fontRef>
+        </p:style>
+        <p:txBody>
+          <a:bodyPr rtlCol="0" anchor="ctr"/>
+          <a:lstStyle/>
+          <a:p>
+            <a:pPr algn="ctr"/>
+          </a:p>
+        </p:txBody>
+      </p:sp>
+      <p:sp>
+        <p:nvSpPr>
+          <p:cNvPr id="25" name="TextBox 24"/>
+          <p:cNvSpPr txBox="1"/>
+          <p:nvPr/>
+        </p:nvSpPr>
+        <p:spPr>
+          <a:xfrm>
+            <a:off x="838504" y="6400800"/>
+            <a:ext cx="6400800" cy="228600"/>
+          </a:xfrm>
+          <a:prstGeom prst="rect">
+            <a:avLst/>
+          </a:prstGeom>
+          <a:noFill/>
+        </p:spPr>
+        <p:txBody>
+          <a:bodyPr wrap="none">
+            <a:spAutoFit/>
+          </a:bodyPr>
+          <a:lstStyle/>
+          <a:p>
+            <a:r>
+              <a:rPr sz="900" b="0" i="0">
+                <a:solidFill>
+                  <a:srgbClr val="888888"/>
+                </a:solidFill>
+                <a:latin typeface="Meiryo UI"/>
+              </a:rPr>
+              <a:t>Confidential All Rights Reserved SALESCORE Co., Ltd.</a:t>
+            </a:r>
+          </a:p>
+        </p:txBody>
+      </p:sp>
+      <p:sp>
+        <p:nvSpPr>
+          <p:cNvPr id="26" name="TextBox 25"/>
+          <p:cNvSpPr txBox="1"/>
+          <p:nvPr/>
+        </p:nvSpPr>
+        <p:spPr>
+          <a:xfrm>
+            <a:off x="10515600" y="6400800"/>
+            <a:ext cx="1371600" cy="228600"/>
+          </a:xfrm>
+          <a:prstGeom prst="rect">
+            <a:avLst/>
+          </a:prstGeom>
+          <a:noFill/>
+        </p:spPr>
+        <p:txBody>
+          <a:bodyPr wrap="none">
+            <a:spAutoFit/>
+          </a:bodyPr>
+          <a:lstStyle/>
+          <a:p>
+            <a:pPr algn="r"/>
+            <a:r>
+              <a:rPr sz="1200" b="0" i="0">
+                <a:solidFill>
+                  <a:srgbClr val="888888"/>
+                </a:solidFill>
+                <a:latin typeface="Meiryo UI"/>
+              </a:rPr>
+              <a:t>1</a:t>
+            </a:r>
+          </a:p>
+        </p:txBody>
+      </p:sp>
+    </p:spTree>
+  </p:cSld>
+  <p:clrMapOvr>
+    <a:masterClrMapping/>
+  </p:clrMapOvr>
+</p:sld>
+</file>
+
+<file path=ppt/slides/slide2.xml><?xml version="1.0" encoding="utf-8"?>
+<p:sld xmlns:a="http://schemas.openxmlformats.org/drawingml/2006/main" xmlns:p="http://schemas.openxmlformats.org/presentationml/2006/main" xmlns:r="http://schemas.openxmlformats.org/officeDocument/2006/relationships">
+  <p:cSld>
+    <p:spTree>
+      <p:nvGrpSpPr>
+        <p:cNvPr id="1" name=""/>
+        <p:cNvGrpSpPr/>
+        <p:nvPr/>
+      </p:nvGrpSpPr>
+      <p:grpSpPr/>
+      <p:sp>
+        <p:nvSpPr>
+          <p:cNvPr id="2" name="Rectangle 1"/>
+          <p:cNvSpPr/>
+          <p:nvPr/>
+        </p:nvSpPr>
+        <p:spPr>
+          <a:xfrm>
+            <a:off x="0" y="0"/>
+            <a:ext cx="12188952" cy="6858000"/>
+          </a:xfrm>
+          <a:prstGeom prst="rect">
+            <a:avLst/>
+          </a:prstGeom>
+          <a:solidFill>
+            <a:srgbClr val="FFFFFF"/>
+          </a:solidFill>
+          <a:ln>
+            <a:noFill/>
+          </a:ln>
+          <a:effectLst/>
+        </p:spPr>
+        <p:style>
+          <a:lnRef idx="1">
+            <a:schemeClr val="accent1"/>
+          </a:lnRef>
+          <a:fillRef idx="3">
+            <a:schemeClr val="accent1"/>
+          </a:fillRef>
+          <a:effectRef idx="2">
+            <a:schemeClr val="accent1"/>
+          </a:effectRef>
+          <a:fontRef idx="minor">
+            <a:schemeClr val="lt1"/>
+          </a:fontRef>
+        </p:style>
+        <p:txBody>
+          <a:bodyPr rtlCol="0" anchor="ctr"/>
+          <a:lstStyle/>
+          <a:p>
+            <a:pPr algn="ctr"/>
+          </a:p>
+        </p:txBody>
+      </p:sp>
+      <p:sp>
+        <p:nvSpPr>
+          <p:cNvPr id="3" name="TextBox 2"/>
+          <p:cNvSpPr txBox="1"/>
+          <p:nvPr/>
+        </p:nvSpPr>
+        <p:spPr>
+          <a:xfrm>
+            <a:off x="828446" y="252374"/>
+            <a:ext cx="8686800" cy="288036"/>
+          </a:xfrm>
+          <a:prstGeom prst="rect">
+            <a:avLst/>
+          </a:prstGeom>
+          <a:noFill/>
+        </p:spPr>
+        <p:txBody>
+          <a:bodyPr wrap="none">
+            <a:spAutoFit/>
+          </a:bodyPr>
+          <a:lstStyle/>
+          <a:p>
+            <a:r>
+              <a:rPr sz="2100" b="1" i="0">
+                <a:solidFill>
+                  <a:srgbClr val="1A1A1A"/>
+                </a:solidFill>
+                <a:latin typeface="Meiryo UI"/>
+              </a:rPr>
+              <a:t>事前にお伺いした内容からの課題仮説</a:t>
+            </a:r>
+          </a:p>
+        </p:txBody>
+      </p:sp>
+      <p:sp>
+        <p:nvSpPr>
+          <p:cNvPr id="4" name="Rectangle 3"/>
+          <p:cNvSpPr/>
+          <p:nvPr/>
+        </p:nvSpPr>
+        <p:spPr>
+          <a:xfrm>
+            <a:off x="838504" y="630021"/>
+            <a:ext cx="10515600" cy="19050"/>
+          </a:xfrm>
+          <a:prstGeom prst="rect">
+            <a:avLst/>
+          </a:prstGeom>
+          <a:solidFill>
+            <a:srgbClr val="1A1A1A"/>
+          </a:solidFill>
+          <a:ln>
+            <a:noFill/>
+          </a:ln>
+          <a:effectLst/>
+        </p:spPr>
+        <p:style>
+          <a:lnRef idx="1">
+            <a:schemeClr val="accent1"/>
+          </a:lnRef>
+          <a:fillRef idx="3">
+            <a:schemeClr val="accent1"/>
+          </a:fillRef>
+          <a:effectRef idx="2">
+            <a:schemeClr val="accent1"/>
+          </a:effectRef>
+          <a:fontRef idx="minor">
+            <a:schemeClr val="lt1"/>
+          </a:fontRef>
+        </p:style>
+        <p:txBody>
+          <a:bodyPr rtlCol="0" anchor="ctr"/>
+          <a:lstStyle/>
+          <a:p>
+            <a:pPr algn="ctr"/>
+          </a:p>
+        </p:txBody>
+      </p:sp>
+      <p:sp>
+        <p:nvSpPr>
+          <p:cNvPr id="5" name="TextBox 4"/>
+          <p:cNvSpPr txBox="1"/>
+          <p:nvPr/>
+        </p:nvSpPr>
+        <p:spPr>
+          <a:xfrm>
+            <a:off x="838504" y="640080"/>
+            <a:ext cx="10515600" cy="629107"/>
+          </a:xfrm>
+          <a:prstGeom prst="rect">
+            <a:avLst/>
+          </a:prstGeom>
+          <a:noFill/>
+        </p:spPr>
+        <p:txBody>
+          <a:bodyPr wrap="square">
+            <a:spAutoFit/>
+          </a:bodyPr>
+          <a:lstStyle/>
+          <a:p>
+            <a:r>
+              <a:rPr sz="1800" b="0" i="0">
+                <a:solidFill>
+                  <a:srgbClr val="1A1A1A"/>
+                </a:solidFill>
+                <a:latin typeface="Meiryo UI"/>
+              </a:rPr>
+              <a:t>お電話でお伺いした事実から、貴社固有の課題仮説を整理しました。合っている・合っていないも含めて率直にお聞かせいただければと思います。</a:t>
+            </a:r>
+          </a:p>
+        </p:txBody>
+      </p:sp>
       <p:graphicFrame>
         <p:nvGraphicFramePr>
           <p:cNvPr id="6" name="Table 5"/>
@@ -3265,720 +4304,8 @@
                 <a:tableStyleId>{5C22544A-7EE6-4342-B048-85BDC9FD1C3A}</a:tableStyleId>
               </a:tblPr>
               <a:tblGrid>
-                <a:gridCol w="3505200"/>
-                <a:gridCol w="3505200"/>
-                <a:gridCol w="3505200"/>
-              </a:tblGrid>
-              <a:tr h="365760">
-                <a:tc>
-                  <a:txBody>
-                    <a:bodyPr wrap="square"/>
-                    <a:lstStyle/>
-                    <a:p>
-                      <a:pPr algn="ctr"/>
-                      <a:r>
-                        <a:rPr sz="1400" b="1" i="0">
-                          <a:solidFill>
-                            <a:srgbClr val="FFFFFF"/>
-                          </a:solidFill>
-                          <a:latin typeface="Meiryo UI"/>
-                        </a:rPr>
-                        <a:t>成長戦略</a:t>
-                      </a:r>
-                    </a:p>
-                  </a:txBody>
-                  <a:tcPr>
-                    <a:solidFill>
-                      <a:srgbClr val="1D3461"/>
-                    </a:solidFill>
-                  </a:tcPr>
-                </a:tc>
-                <a:tc>
-                  <a:txBody>
-                    <a:bodyPr wrap="square"/>
-                    <a:lstStyle/>
-                    <a:p>
-                      <a:pPr algn="ctr"/>
-                      <a:r>
-                        <a:rPr sz="1400" b="1" i="0">
-                          <a:solidFill>
-                            <a:srgbClr val="FFFFFF"/>
-                          </a:solidFill>
-                          <a:latin typeface="Meiryo UI"/>
-                        </a:rPr>
-                        <a:t>具体内容</a:t>
-                      </a:r>
-                    </a:p>
-                  </a:txBody>
-                  <a:tcPr>
-                    <a:solidFill>
-                      <a:srgbClr val="1D3461"/>
-                    </a:solidFill>
-                  </a:tcPr>
-                </a:tc>
-                <a:tc>
-                  <a:txBody>
-                    <a:bodyPr wrap="square"/>
-                    <a:lstStyle/>
-                    <a:p>
-                      <a:pPr algn="ctr"/>
-                      <a:r>
-                        <a:rPr sz="1400" b="1" i="0">
-                          <a:solidFill>
-                            <a:srgbClr val="FFFFFF"/>
-                          </a:solidFill>
-                          <a:latin typeface="Meiryo UI"/>
-                        </a:rPr>
-                        <a:t>目指す姿</a:t>
-                      </a:r>
-                    </a:p>
-                  </a:txBody>
-                  <a:tcPr>
-                    <a:solidFill>
-                      <a:srgbClr val="1D3461"/>
-                    </a:solidFill>
-                  </a:tcPr>
-                </a:tc>
-              </a:tr>
-              <a:tr h="1097280">
-                <a:tc>
-                  <a:txBody>
-                    <a:bodyPr wrap="square"/>
-                    <a:lstStyle/>
-                    <a:p>
-                      <a:pPr algn="l"/>
-                      <a:r>
-                        <a:rPr sz="1400" b="0" i="0">
-                          <a:solidFill>
-                            <a:srgbClr val="1A1A1A"/>
-                          </a:solidFill>
-                          <a:latin typeface="Meiryo UI"/>
-                        </a:rPr>
-                        <a:t>バックオフィスSaaSの価値向上</a:t>
-                      </a:r>
-                    </a:p>
-                  </a:txBody>
-                  <a:tcPr>
-                    <a:solidFill>
-                      <a:srgbClr val="F5F7FA"/>
-                    </a:solidFill>
-                  </a:tcPr>
-                </a:tc>
-                <a:tc>
-                  <a:txBody>
-                    <a:bodyPr wrap="square"/>
-                    <a:lstStyle/>
-                    <a:p>
-                      <a:pPr algn="l"/>
-                      <a:r>
-                        <a:rPr sz="1400" b="0" i="0">
-                          <a:solidFill>
-                            <a:srgbClr val="1A1A1A"/>
-                          </a:solidFill>
-                          <a:latin typeface="Meiryo UI"/>
-                        </a:rPr>
-                        <a:t>60超のプロダクトで会計・人事・法務を網羅。顧客基盤の拡大とARPA向上を推進。豊富なサービスラインナップと業務ロジックを強みに</a:t>
-                      </a:r>
-                    </a:p>
-                  </a:txBody>
-                  <a:tcPr>
-                    <a:solidFill>
-                      <a:srgbClr val="F5F7FA"/>
-                    </a:solidFill>
-                  </a:tcPr>
-                </a:tc>
-                <a:tc>
-                  <a:txBody>
-                    <a:bodyPr wrap="square"/>
-                    <a:lstStyle/>
-                    <a:p>
-                      <a:pPr algn="l"/>
-                      <a:r>
-                        <a:rPr sz="1400" b="0" i="0">
-                          <a:solidFill>
-                            <a:srgbClr val="1A1A1A"/>
-                          </a:solidFill>
-                          <a:latin typeface="Meiryo UI"/>
-                        </a:rPr>
-                        <a:t>顧客基盤の拡大とARPAの向上</a:t>
-                      </a:r>
-                    </a:p>
-                  </a:txBody>
-                  <a:tcPr>
-                    <a:solidFill>
-                      <a:srgbClr val="F5F7FA"/>
-                    </a:solidFill>
-                  </a:tcPr>
-                </a:tc>
-              </a:tr>
-              <a:tr h="1097280">
-                <a:tc>
-                  <a:txBody>
-                    <a:bodyPr wrap="square"/>
-                    <a:lstStyle/>
-                    <a:p>
-                      <a:pPr algn="l"/>
-                      <a:r>
-                        <a:rPr sz="1400" b="0" i="0">
-                          <a:solidFill>
-                            <a:srgbClr val="1A1A1A"/>
-                          </a:solidFill>
-                          <a:latin typeface="Meiryo UI"/>
-                        </a:rPr>
-                        <a:t>AIプロダクトの開発・提供</a:t>
-                      </a:r>
-                    </a:p>
-                  </a:txBody>
-                  <a:tcPr>
-                    <a:solidFill>
-                      <a:srgbClr val="FFFFFF"/>
-                    </a:solidFill>
-                  </a:tcPr>
-                </a:tc>
-                <a:tc>
-                  <a:txBody>
-                    <a:bodyPr wrap="square"/>
-                    <a:lstStyle/>
-                    <a:p>
-                      <a:pPr algn="l"/>
-                      <a:r>
-                        <a:rPr sz="1400" b="0" i="0">
-                          <a:solidFill>
-                            <a:srgbClr val="1A1A1A"/>
-                          </a:solidFill>
-                          <a:latin typeface="Meiryo UI"/>
-                        </a:rPr>
-                        <a:t>AIエージェント／AIネイティブプロダクト／AI×BPOサービスの展開。業務ロジックを活用し自律的に処理。デジタルツール市場からデジタルワーカー市場へ</a:t>
-                      </a:r>
-                    </a:p>
-                  </a:txBody>
-                  <a:tcPr>
-                    <a:solidFill>
-                      <a:srgbClr val="FFFFFF"/>
-                    </a:solidFill>
-                  </a:tcPr>
-                </a:tc>
-                <a:tc>
-                  <a:txBody>
-                    <a:bodyPr wrap="square"/>
-                    <a:lstStyle/>
-                    <a:p>
-                      <a:pPr algn="l"/>
-                      <a:r>
-                        <a:rPr sz="1400" b="0" i="0">
-                          <a:solidFill>
-                            <a:srgbClr val="1A1A1A"/>
-                          </a:solidFill>
-                          <a:latin typeface="Meiryo UI"/>
-                        </a:rPr>
-                        <a:t>デジタルワーカー市場（14.1兆円）へのTAM拡大</a:t>
-                      </a:r>
-                    </a:p>
-                  </a:txBody>
-                  <a:tcPr>
-                    <a:solidFill>
-                      <a:srgbClr val="FFFFFF"/>
-                    </a:solidFill>
-                  </a:tcPr>
-                </a:tc>
-              </a:tr>
-              <a:tr h="1097280">
-                <a:tc>
-                  <a:txBody>
-                    <a:bodyPr wrap="square"/>
-                    <a:lstStyle/>
-                    <a:p>
-                      <a:pPr algn="l"/>
-                      <a:r>
-                        <a:rPr sz="1400" b="0" i="0">
-                          <a:solidFill>
-                            <a:srgbClr val="1A1A1A"/>
-                          </a:solidFill>
-                          <a:latin typeface="Meiryo UI"/>
-                        </a:rPr>
-                        <a:t>M&amp;A戦略の遂行</a:t>
-                      </a:r>
-                    </a:p>
-                  </a:txBody>
-                  <a:tcPr>
-                    <a:solidFill>
-                      <a:srgbClr val="F5F7FA"/>
-                    </a:solidFill>
-                  </a:tcPr>
-                </a:tc>
-                <a:tc>
-                  <a:txBody>
-                    <a:bodyPr wrap="square"/>
-                    <a:lstStyle/>
-                    <a:p>
-                      <a:pPr algn="l"/>
-                      <a:r>
-                        <a:rPr sz="1400" b="0" i="0">
-                          <a:solidFill>
-                            <a:srgbClr val="1A1A1A"/>
-                          </a:solidFill>
-                          <a:latin typeface="Meiryo UI"/>
-                        </a:rPr>
-                        <a:t>経営管理領域を全方位でカバーするためサービスの幅を拡大。アウトルックコンサルティング社等のグループジョイン。SaaS×Fintechの融合</a:t>
-                      </a:r>
-                    </a:p>
-                  </a:txBody>
-                  <a:tcPr>
-                    <a:solidFill>
-                      <a:srgbClr val="F5F7FA"/>
-                    </a:solidFill>
-                  </a:tcPr>
-                </a:tc>
-                <a:tc>
-                  <a:txBody>
-                    <a:bodyPr wrap="square"/>
-                    <a:lstStyle/>
-                    <a:p>
-                      <a:pPr algn="l"/>
-                      <a:r>
-                        <a:rPr sz="1400" b="0" i="0">
-                          <a:solidFill>
-                            <a:srgbClr val="1A1A1A"/>
-                          </a:solidFill>
-                          <a:latin typeface="Meiryo UI"/>
-                        </a:rPr>
-                        <a:t>サービス拡充による顧客基盤拡大</a:t>
-                      </a:r>
-                    </a:p>
-                  </a:txBody>
-                  <a:tcPr>
-                    <a:solidFill>
-                      <a:srgbClr val="F5F7FA"/>
-                    </a:solidFill>
-                  </a:tcPr>
-                </a:tc>
-              </a:tr>
-            </a:tbl>
-          </a:graphicData>
-        </a:graphic>
-      </p:graphicFrame>
-      <p:sp>
-        <p:nvSpPr>
-          <p:cNvPr id="7" name="Rectangle 6"/>
-          <p:cNvSpPr/>
-          <p:nvPr/>
-        </p:nvSpPr>
-        <p:spPr>
-          <a:xfrm>
-            <a:off x="838504" y="5779922"/>
-            <a:ext cx="10515600" cy="502920"/>
-          </a:xfrm>
-          <a:prstGeom prst="rect">
-            <a:avLst/>
-          </a:prstGeom>
-          <a:solidFill>
-            <a:srgbClr val="1D3461"/>
-          </a:solidFill>
-          <a:ln>
-            <a:noFill/>
-          </a:ln>
-          <a:effectLst/>
-        </p:spPr>
-        <p:style>
-          <a:lnRef idx="1">
-            <a:schemeClr val="accent1"/>
-          </a:lnRef>
-          <a:fillRef idx="3">
-            <a:schemeClr val="accent1"/>
-          </a:fillRef>
-          <a:effectRef idx="2">
-            <a:schemeClr val="accent1"/>
-          </a:effectRef>
-          <a:fontRef idx="minor">
-            <a:schemeClr val="lt1"/>
-          </a:fontRef>
-        </p:style>
-        <p:txBody>
-          <a:bodyPr rtlCol="0" anchor="ctr"/>
-          <a:lstStyle/>
-          <a:p>
-            <a:pPr algn="ctr"/>
-          </a:p>
-        </p:txBody>
-      </p:sp>
-      <p:sp>
-        <p:nvSpPr>
-          <p:cNvPr id="8" name="TextBox 7"/>
-          <p:cNvSpPr txBox="1"/>
-          <p:nvPr/>
-        </p:nvSpPr>
-        <p:spPr>
-          <a:xfrm>
-            <a:off x="1021384" y="5779922"/>
-            <a:ext cx="10149840" cy="502920"/>
-          </a:xfrm>
-          <a:prstGeom prst="rect">
-            <a:avLst/>
-          </a:prstGeom>
-          <a:noFill/>
-          <a:effectLst/>
-        </p:spPr>
-        <p:txBody>
-          <a:bodyPr wrap="square">
-            <a:spAutoFit/>
-          </a:bodyPr>
-          <a:lstStyle/>
-          <a:p>
-            <a:pPr algn="ctr"/>
-            <a:r>
-              <a:rPr sz="1400" b="1" i="0">
-                <a:solidFill>
-                  <a:srgbClr val="FFFFFF"/>
-                </a:solidFill>
-                <a:latin typeface="Meiryo UI"/>
-              </a:rPr>
-              <a:t>FY28 中長期財務ターゲット：</a:t>
-            </a:r>
-            <a:r>
-              <a:rPr sz="1400" b="0" i="0">
-                <a:solidFill>
-                  <a:srgbClr val="FFFFFF"/>
-                </a:solidFill>
-                <a:latin typeface="Meiryo UI"/>
-              </a:rPr>
-              <a:t> 売上高900億円以上 / EBITDA270億円以上 / 事業CF180億円以上　｜　TAMの5倍拡大：デジタルツール市場（2.8兆円）→ デジタルワーカー市場（14.1兆円）</a:t>
-            </a:r>
-          </a:p>
-        </p:txBody>
-      </p:sp>
-      <p:pic>
-        <p:nvPicPr>
-          <p:cNvPr id="9" name="Picture 8" descr="logo.png"/>
-          <p:cNvPicPr>
-            <a:picLocks noChangeAspect="1"/>
-          </p:cNvPicPr>
-          <p:nvPr/>
-        </p:nvPicPr>
-        <p:blipFill>
-          <a:blip r:embed="rId2"/>
-          <a:stretch>
-            <a:fillRect/>
-          </a:stretch>
-        </p:blipFill>
-        <p:spPr>
-          <a:xfrm>
-            <a:off x="9338767" y="83210"/>
-            <a:ext cx="2016252" cy="627129"/>
-          </a:xfrm>
-          <a:prstGeom prst="rect">
-            <a:avLst/>
-          </a:prstGeom>
-        </p:spPr>
-      </p:pic>
-      <p:sp>
-        <p:nvSpPr>
-          <p:cNvPr id="10" name="Rectangle 9"/>
-          <p:cNvSpPr/>
-          <p:nvPr/>
-        </p:nvSpPr>
-        <p:spPr>
-          <a:xfrm>
-            <a:off x="838504" y="6355994"/>
-            <a:ext cx="10515600" cy="19050"/>
-          </a:xfrm>
-          <a:prstGeom prst="rect">
-            <a:avLst/>
-          </a:prstGeom>
-          <a:solidFill>
-            <a:srgbClr val="1A1A1A"/>
-          </a:solidFill>
-          <a:ln>
-            <a:noFill/>
-          </a:ln>
-          <a:effectLst/>
-        </p:spPr>
-        <p:style>
-          <a:lnRef idx="1">
-            <a:schemeClr val="accent1"/>
-          </a:lnRef>
-          <a:fillRef idx="3">
-            <a:schemeClr val="accent1"/>
-          </a:fillRef>
-          <a:effectRef idx="2">
-            <a:schemeClr val="accent1"/>
-          </a:effectRef>
-          <a:fontRef idx="minor">
-            <a:schemeClr val="lt1"/>
-          </a:fontRef>
-        </p:style>
-        <p:txBody>
-          <a:bodyPr rtlCol="0" anchor="ctr"/>
-          <a:lstStyle/>
-          <a:p>
-            <a:pPr algn="ctr"/>
-          </a:p>
-        </p:txBody>
-      </p:sp>
-      <p:sp>
-        <p:nvSpPr>
-          <p:cNvPr id="11" name="TextBox 10"/>
-          <p:cNvSpPr txBox="1"/>
-          <p:nvPr/>
-        </p:nvSpPr>
-        <p:spPr>
-          <a:xfrm>
-            <a:off x="838504" y="6400800"/>
-            <a:ext cx="6400800" cy="228600"/>
-          </a:xfrm>
-          <a:prstGeom prst="rect">
-            <a:avLst/>
-          </a:prstGeom>
-          <a:noFill/>
-        </p:spPr>
-        <p:txBody>
-          <a:bodyPr wrap="none">
-            <a:spAutoFit/>
-          </a:bodyPr>
-          <a:lstStyle/>
-          <a:p>
-            <a:r>
-              <a:rPr sz="900" b="0" i="0">
-                <a:solidFill>
-                  <a:srgbClr val="888888"/>
-                </a:solidFill>
-                <a:latin typeface="Meiryo UI"/>
-              </a:rPr>
-              <a:t>Confidential All Rights Reserved SALESCORE Co., Ltd.</a:t>
-            </a:r>
-          </a:p>
-        </p:txBody>
-      </p:sp>
-      <p:sp>
-        <p:nvSpPr>
-          <p:cNvPr id="12" name="TextBox 11"/>
-          <p:cNvSpPr txBox="1"/>
-          <p:nvPr/>
-        </p:nvSpPr>
-        <p:spPr>
-          <a:xfrm>
-            <a:off x="10515600" y="6400800"/>
-            <a:ext cx="1371600" cy="228600"/>
-          </a:xfrm>
-          <a:prstGeom prst="rect">
-            <a:avLst/>
-          </a:prstGeom>
-          <a:noFill/>
-        </p:spPr>
-        <p:txBody>
-          <a:bodyPr wrap="none">
-            <a:spAutoFit/>
-          </a:bodyPr>
-          <a:lstStyle/>
-          <a:p>
-            <a:pPr algn="r"/>
-            <a:r>
-              <a:rPr sz="1200" b="0" i="0">
-                <a:solidFill>
-                  <a:srgbClr val="888888"/>
-                </a:solidFill>
-                <a:latin typeface="Meiryo UI"/>
-              </a:rPr>
-              <a:t>1</a:t>
-            </a:r>
-          </a:p>
-        </p:txBody>
-      </p:sp>
-    </p:spTree>
-  </p:cSld>
-  <p:clrMapOvr>
-    <a:masterClrMapping/>
-  </p:clrMapOvr>
-</p:sld>
-</file>
-
-<file path=ppt/slides/slide2.xml><?xml version="1.0" encoding="utf-8"?>
-<p:sld xmlns:a="http://schemas.openxmlformats.org/drawingml/2006/main" xmlns:p="http://schemas.openxmlformats.org/presentationml/2006/main" xmlns:r="http://schemas.openxmlformats.org/officeDocument/2006/relationships">
-  <p:cSld>
-    <p:spTree>
-      <p:nvGrpSpPr>
-        <p:cNvPr id="1" name=""/>
-        <p:cNvGrpSpPr/>
-        <p:nvPr/>
-      </p:nvGrpSpPr>
-      <p:grpSpPr/>
-      <p:sp>
-        <p:nvSpPr>
-          <p:cNvPr id="2" name="Rectangle 1"/>
-          <p:cNvSpPr/>
-          <p:nvPr/>
-        </p:nvSpPr>
-        <p:spPr>
-          <a:xfrm>
-            <a:off x="0" y="0"/>
-            <a:ext cx="12188952" cy="6858000"/>
-          </a:xfrm>
-          <a:prstGeom prst="rect">
-            <a:avLst/>
-          </a:prstGeom>
-          <a:solidFill>
-            <a:srgbClr val="FFFFFF"/>
-          </a:solidFill>
-          <a:ln>
-            <a:noFill/>
-          </a:ln>
-          <a:effectLst/>
-        </p:spPr>
-        <p:style>
-          <a:lnRef idx="1">
-            <a:schemeClr val="accent1"/>
-          </a:lnRef>
-          <a:fillRef idx="3">
-            <a:schemeClr val="accent1"/>
-          </a:fillRef>
-          <a:effectRef idx="2">
-            <a:schemeClr val="accent1"/>
-          </a:effectRef>
-          <a:fontRef idx="minor">
-            <a:schemeClr val="lt1"/>
-          </a:fontRef>
-        </p:style>
-        <p:txBody>
-          <a:bodyPr rtlCol="0" anchor="ctr"/>
-          <a:lstStyle/>
-          <a:p>
-            <a:pPr algn="ctr"/>
-          </a:p>
-        </p:txBody>
-      </p:sp>
-      <p:sp>
-        <p:nvSpPr>
-          <p:cNvPr id="3" name="TextBox 2"/>
-          <p:cNvSpPr txBox="1"/>
-          <p:nvPr/>
-        </p:nvSpPr>
-        <p:spPr>
-          <a:xfrm>
-            <a:off x="828446" y="252374"/>
-            <a:ext cx="8686800" cy="288036"/>
-          </a:xfrm>
-          <a:prstGeom prst="rect">
-            <a:avLst/>
-          </a:prstGeom>
-          <a:noFill/>
-        </p:spPr>
-        <p:txBody>
-          <a:bodyPr wrap="none">
-            <a:spAutoFit/>
-          </a:bodyPr>
-          <a:lstStyle/>
-          <a:p>
-            <a:r>
-              <a:rPr sz="2100" b="1" i="0">
-                <a:solidFill>
-                  <a:srgbClr val="1A1A1A"/>
-                </a:solidFill>
-                <a:latin typeface="Meiryo UI"/>
-              </a:rPr>
-              <a:t>事前にお伺いした内容からの課題仮説</a:t>
-            </a:r>
-          </a:p>
-        </p:txBody>
-      </p:sp>
-      <p:sp>
-        <p:nvSpPr>
-          <p:cNvPr id="4" name="Rectangle 3"/>
-          <p:cNvSpPr/>
-          <p:nvPr/>
-        </p:nvSpPr>
-        <p:spPr>
-          <a:xfrm>
-            <a:off x="838504" y="630021"/>
-            <a:ext cx="10515600" cy="19050"/>
-          </a:xfrm>
-          <a:prstGeom prst="rect">
-            <a:avLst/>
-          </a:prstGeom>
-          <a:solidFill>
-            <a:srgbClr val="1A1A1A"/>
-          </a:solidFill>
-          <a:ln>
-            <a:noFill/>
-          </a:ln>
-          <a:effectLst/>
-        </p:spPr>
-        <p:style>
-          <a:lnRef idx="1">
-            <a:schemeClr val="accent1"/>
-          </a:lnRef>
-          <a:fillRef idx="3">
-            <a:schemeClr val="accent1"/>
-          </a:fillRef>
-          <a:effectRef idx="2">
-            <a:schemeClr val="accent1"/>
-          </a:effectRef>
-          <a:fontRef idx="minor">
-            <a:schemeClr val="lt1"/>
-          </a:fontRef>
-        </p:style>
-        <p:txBody>
-          <a:bodyPr rtlCol="0" anchor="ctr"/>
-          <a:lstStyle/>
-          <a:p>
-            <a:pPr algn="ctr"/>
-          </a:p>
-        </p:txBody>
-      </p:sp>
-      <p:sp>
-        <p:nvSpPr>
-          <p:cNvPr id="5" name="TextBox 4"/>
-          <p:cNvSpPr txBox="1"/>
-          <p:nvPr/>
-        </p:nvSpPr>
-        <p:spPr>
-          <a:xfrm>
-            <a:off x="838504" y="640080"/>
-            <a:ext cx="10515600" cy="629107"/>
-          </a:xfrm>
-          <a:prstGeom prst="rect">
-            <a:avLst/>
-          </a:prstGeom>
-          <a:noFill/>
-        </p:spPr>
-        <p:txBody>
-          <a:bodyPr wrap="square">
-            <a:spAutoFit/>
-          </a:bodyPr>
-          <a:lstStyle/>
-          <a:p>
-            <a:r>
-              <a:rPr sz="1800" b="0" i="0">
-                <a:solidFill>
-                  <a:srgbClr val="1A1A1A"/>
-                </a:solidFill>
-                <a:latin typeface="Meiryo UI"/>
-              </a:rPr>
-              <a:t>お電話でお伺いした事実から、貴社固有の課題仮説を整理しました。合っている・合っていないも含めて率直にお聞かせいただければと思います。</a:t>
-            </a:r>
-          </a:p>
-        </p:txBody>
-      </p:sp>
-      <p:graphicFrame>
-        <p:nvGraphicFramePr>
-          <p:cNvPr id="6" name="Table 5"/>
-          <p:cNvGraphicFramePr>
-            <a:graphicFrameLocks noGrp="1"/>
-          </p:cNvGraphicFramePr>
-          <p:nvPr/>
-        </p:nvGraphicFramePr>
-        <p:xfrm>
-          <a:off x="838504" y="1280160"/>
-          <a:ext cx="10515600" cy="3657600"/>
-        </p:xfrm>
-        <a:graphic>
-          <a:graphicData uri="http://schemas.openxmlformats.org/drawingml/2006/table">
-            <a:tbl>
-              <a:tblPr firstRow="1" bandRow="1">
-                <a:tableStyleId>{5C22544A-7EE6-4342-B048-85BDC9FD1C3A}</a:tableStyleId>
-              </a:tblPr>
-              <a:tblGrid>
-                <a:gridCol w="3505200"/>
-                <a:gridCol w="3505200"/>
-                <a:gridCol w="3505200"/>
+                <a:gridCol w="5257800"/>
+                <a:gridCol w="5257800"/>
               </a:tblGrid>
               <a:tr h="365760">
                 <a:tc>
@@ -4017,30 +4344,7 @@
                           </a:solidFill>
                           <a:latin typeface="Meiryo UI"/>
                         </a:rPr>
-                        <a:t>課題仮説</a:t>
-                      </a:r>
-                    </a:p>
-                  </a:txBody>
-                  <a:tcPr>
-                    <a:solidFill>
-                      <a:srgbClr val="1D3461"/>
-                    </a:solidFill>
-                  </a:tcPr>
-                </a:tc>
-                <a:tc>
-                  <a:txBody>
-                    <a:bodyPr wrap="square"/>
-                    <a:lstStyle/>
-                    <a:p>
-                      <a:pPr algn="ctr"/>
-                      <a:r>
-                        <a:rPr sz="1400" b="1" i="0">
-                          <a:solidFill>
-                            <a:srgbClr val="FFFFFF"/>
-                          </a:solidFill>
-                          <a:latin typeface="Meiryo UI"/>
-                        </a:rPr>
-                        <a:t>なぜ起きているか（マネフォ固有の構造要因）</a:t>
+                        <a:t>課題の核心（Insight）</a:t>
                       </a:r>
                     </a:p>
                   </a:txBody>
@@ -4065,7 +4369,7 @@
                           </a:solidFill>
                           <a:latin typeface="Meiryo UI"/>
                         </a:rPr>
-                        <a:t>受注率に個人間バラつき。機能売りになりがち。提案の仮説もばらつく</a:t>
+                        <a:t>受注率に個人間バラつき。機能売りになりがち。提案の仮説もばらつく（決裁者同一で検討商材が多い）</a:t>
                       </a:r>
                     </a:p>
                   </a:txBody>
@@ -4097,30 +4401,7 @@
                           </a:solidFill>
                           <a:latin typeface="Meiryo UI"/>
                         </a:rPr>
-                        <a:t> 60超プロダクトの最適組み合わせは個人の商品知識依存。型なし＝商品知識の差＝受注率の差</a:t>
-                      </a:r>
-                    </a:p>
-                  </a:txBody>
-                  <a:tcPr>
-                    <a:solidFill>
-                      <a:srgbClr val="F5F7FA"/>
-                    </a:solidFill>
-                  </a:tcPr>
-                </a:tc>
-                <a:tc>
-                  <a:txBody>
-                    <a:bodyPr wrap="square"/>
-                    <a:lstStyle/>
-                    <a:p>
-                      <a:pPr algn="l"/>
-                      <a:r>
-                        <a:rPr sz="1400" b="0" i="0">
-                          <a:solidFill>
-                            <a:srgbClr val="1A1A1A"/>
-                          </a:solidFill>
-                          <a:latin typeface="Meiryo UI"/>
-                        </a:rPr>
-                        <a:t>会計は業種×規模×フェーズで業務フローが根本的に異なり汎用スクリプトでは対応不可。競合との機能比較→価格勝負に陥り提案の質でしか差がつかない</a:t>
+                        <a:t> 60超プロダクトの最適組み合わせは個人の商品知識依存。型なし＝商品知識の差＝受注率の差。競合との機能比較に陥ると価格勝負になり提案の質でしか差がつかない</a:t>
                       </a:r>
                     </a:p>
                   </a:txBody>
@@ -4145,7 +4426,7 @@
                           </a:solidFill>
                           <a:latin typeface="Meiryo UI"/>
                         </a:rPr>
-                        <a:t>中途採用を増やしているがワークしない。1人あたり売上が低下</a:t>
+                        <a:t>中途採用を増やしているがワークしない。1人あたり売上が低下している</a:t>
                       </a:r>
                     </a:p>
                   </a:txBody>
@@ -4177,30 +4458,7 @@
                           </a:solidFill>
                           <a:latin typeface="Meiryo UI"/>
                         </a:rPr>
-                        <a:t> 採用時の評価と実配属後のパフォーマンスにギャップが生じやすい</a:t>
-                      </a:r>
-                    </a:p>
-                  </a:txBody>
-                  <a:tcPr>
-                    <a:solidFill>
-                      <a:srgbClr val="FFFFFF"/>
-                    </a:solidFill>
-                  </a:tcPr>
-                </a:tc>
-                <a:tc>
-                  <a:txBody>
-                    <a:bodyPr wrap="square"/>
-                    <a:lstStyle/>
-                    <a:p>
-                      <a:pPr algn="l"/>
-                      <a:r>
-                        <a:rPr sz="1400" b="0" i="0">
-                          <a:solidFill>
-                            <a:srgbClr val="1A1A1A"/>
-                          </a:solidFill>
-                          <a:latin typeface="Meiryo UI"/>
-                        </a:rPr>
-                        <a:t>「会計×60超プロダクト×SaaS/Fintech/AI三層構造」は他SaaSと比較にならない複雑さ。前職スキルがそのまま通用せず得意な1-2商品に偏る</a:t>
+                        <a:t>「会計×60超プロダクト×SaaS/Fintech/AI三層構造」は他SaaSと比較にならない複雑さ。前職スキルがそのまま通用せず、得意な1-2商品に偏る</a:t>
                       </a:r>
                     </a:p>
                   </a:txBody>
@@ -4257,30 +4515,7 @@
                           </a:solidFill>
                           <a:latin typeface="Meiryo UI"/>
                         </a:rPr>
-                        <a:t> 戦略は描けているが実行を支える基盤がない</a:t>
-                      </a:r>
-                    </a:p>
-                  </a:txBody>
-                  <a:tcPr>
-                    <a:solidFill>
-                      <a:srgbClr val="F5F7FA"/>
-                    </a:solidFill>
-                  </a:tcPr>
-                </a:tc>
-                <a:tc>
-                  <a:txBody>
-                    <a:bodyPr wrap="square"/>
-                    <a:lstStyle/>
-                    <a:p>
-                      <a:pPr algn="l"/>
-                      <a:r>
-                        <a:rPr sz="1400" b="0" i="0">
-                          <a:solidFill>
-                            <a:srgbClr val="1A1A1A"/>
-                          </a:solidFill>
-                          <a:latin typeface="Meiryo UI"/>
-                        </a:rPr>
-                        <a:t>フェーズ別受注率・リードソース別担当者別の分析が不可。Excel集計＝ドリルダウンできない＝PDCAが回せない</a:t>
+                        <a:t> フェーズ別受注率・リードソース別担当者別の分析が不可。戦略は描けているが実行を支える基盤がない</a:t>
                       </a:r>
                     </a:p>
                   </a:txBody>

--- a/slides_p10_p12.pptx
+++ b/slides_p10_p12.pptx
@@ -4295,7 +4295,7 @@
         </p:nvGraphicFramePr>
         <p:xfrm>
           <a:off x="838504" y="1280160"/>
-          <a:ext cx="10515600" cy="3657600"/>
+          <a:ext cx="10515600" cy="3859680"/>
         </p:xfrm>
         <a:graphic>
           <a:graphicData uri="http://schemas.openxmlformats.org/drawingml/2006/table">
@@ -4304,8 +4304,9 @@
                 <a:tableStyleId>{5C22544A-7EE6-4342-B048-85BDC9FD1C3A}</a:tableStyleId>
               </a:tblPr>
               <a:tblGrid>
-                <a:gridCol w="5257800"/>
-                <a:gridCol w="5257800"/>
+                <a:gridCol w="3154680"/>
+                <a:gridCol w="3995928"/>
+                <a:gridCol w="3364992"/>
               </a:tblGrid>
               <a:tr h="365760">
                 <a:tc>
@@ -4321,7 +4322,7 @@
                           </a:solidFill>
                           <a:latin typeface="Meiryo UI"/>
                         </a:rPr>
-                        <a:t>事象（Fact）</a:t>
+                        <a:t>FACT</a:t>
                       </a:r>
                     </a:p>
                   </a:txBody>
@@ -4344,7 +4345,30 @@
                           </a:solidFill>
                           <a:latin typeface="Meiryo UI"/>
                         </a:rPr>
-                        <a:t>課題の核心（Insight）</a:t>
+                        <a:t>WHY</a:t>
+                      </a:r>
+                    </a:p>
+                  </a:txBody>
+                  <a:tcPr>
+                    <a:solidFill>
+                      <a:srgbClr val="1B4FA8"/>
+                    </a:solidFill>
+                  </a:tcPr>
+                </a:tc>
+                <a:tc>
+                  <a:txBody>
+                    <a:bodyPr wrap="square"/>
+                    <a:lstStyle/>
+                    <a:p>
+                      <a:pPr algn="ctr"/>
+                      <a:r>
+                        <a:rPr sz="1400" b="1" i="0">
+                          <a:solidFill>
+                            <a:srgbClr val="FFFFFF"/>
+                          </a:solidFill>
+                          <a:latin typeface="Meiryo UI"/>
+                        </a:rPr>
+                        <a:t>INSIGHT</a:t>
                       </a:r>
                     </a:p>
                   </a:txBody>
@@ -4355,7 +4379,7 @@
                   </a:tcPr>
                 </a:tc>
               </a:tr>
-              <a:tr h="1097280">
+              <a:tr h="1164640">
                 <a:tc>
                   <a:txBody>
                     <a:bodyPr wrap="square"/>
@@ -4369,7 +4393,30 @@
                           </a:solidFill>
                           <a:latin typeface="Meiryo UI"/>
                         </a:rPr>
-                        <a:t>受注率に個人間バラつき。機能売りになりがち。提案の仮説もばらつく（決裁者同一で検討商材が多い）</a:t>
+                        <a:t>受注率に個人間ばらつき。機能売りになりがち。決裁者同一で検討商材が多く提案の仮説もばらつく</a:t>
+                      </a:r>
+                    </a:p>
+                  </a:txBody>
+                  <a:tcPr>
+                    <a:solidFill>
+                      <a:srgbClr val="F5F7FA"/>
+                    </a:solidFill>
+                  </a:tcPr>
+                </a:tc>
+                <a:tc>
+                  <a:txBody>
+                    <a:bodyPr wrap="square"/>
+                    <a:lstStyle/>
+                    <a:p>
+                      <a:pPr algn="l"/>
+                      <a:r>
+                        <a:rPr sz="1400" b="0" i="0">
+                          <a:solidFill>
+                            <a:srgbClr val="1A1A1A"/>
+                          </a:solidFill>
+                          <a:latin typeface="Meiryo UI"/>
+                        </a:rPr>
+                        <a:t>60超プロダクトの最適組み合わせが個人の商品知識に依存。「課題パターン×プロダクト組み合わせ」の型が組織に存在しない</a:t>
                       </a:r>
                     </a:p>
                   </a:txBody>
@@ -4392,8 +4439,15 @@
                           </a:solidFill>
                           <a:latin typeface="Meiryo UI"/>
                         </a:rPr>
-                        <a:t>「課題パターン×プロダクト組み合わせ」の型がない。</a:t>
+                        <a:t>提案の型がない</a:t>
                       </a:r>
+                    </a:p>
+                    <a:p>
+                      <a:pPr>
+                        <a:spcBef>
+                          <a:spcPts val="400"/>
+                        </a:spcBef>
+                      </a:pPr>
                       <a:r>
                         <a:rPr sz="1400" b="0" i="0">
                           <a:solidFill>
@@ -4401,7 +4455,7 @@
                           </a:solidFill>
                           <a:latin typeface="Meiryo UI"/>
                         </a:rPr>
-                        <a:t> 60超プロダクトの最適組み合わせは個人の商品知識依存。型なし＝商品知識の差＝受注率の差。競合との機能比較に陥ると価格勝負になり提案の質でしか差がつかない</a:t>
+                        <a:t>型なし＝商品知識の差＝受注率の差。競合との機能比較に陥ると価格勝負になる</a:t>
                       </a:r>
                     </a:p>
                   </a:txBody>
@@ -4412,7 +4466,7 @@
                   </a:tcPr>
                 </a:tc>
               </a:tr>
-              <a:tr h="1097280">
+              <a:tr h="1164640">
                 <a:tc>
                   <a:txBody>
                     <a:bodyPr wrap="square"/>
@@ -4426,7 +4480,30 @@
                           </a:solidFill>
                           <a:latin typeface="Meiryo UI"/>
                         </a:rPr>
-                        <a:t>中途採用を増やしているがワークしない。1人あたり売上が低下している</a:t>
+                        <a:t>中途採用を増やしているが1人あたり売上が低下している</a:t>
+                      </a:r>
+                    </a:p>
+                  </a:txBody>
+                  <a:tcPr>
+                    <a:solidFill>
+                      <a:srgbClr val="FFFFFF"/>
+                    </a:solidFill>
+                  </a:tcPr>
+                </a:tc>
+                <a:tc>
+                  <a:txBody>
+                    <a:bodyPr wrap="square"/>
+                    <a:lstStyle/>
+                    <a:p>
+                      <a:pPr algn="l"/>
+                      <a:r>
+                        <a:rPr sz="1400" b="0" i="0">
+                          <a:solidFill>
+                            <a:srgbClr val="1A1A1A"/>
+                          </a:solidFill>
+                          <a:latin typeface="Meiryo UI"/>
+                        </a:rPr>
+                        <a:t>会計×60超プロダクト×SaaS/Fintech/AI三層構造は他SaaSと比較にならない複雑さ。前職スキルがそのまま通用せず得意な1〜2商品に偏る</a:t>
                       </a:r>
                     </a:p>
                   </a:txBody>
@@ -4449,8 +4526,15 @@
                           </a:solidFill>
                           <a:latin typeface="Meiryo UI"/>
                         </a:rPr>
-                        <a:t>マネフォ固有の複雑さが前職スキルを無効化。</a:t>
+                        <a:t>前職スキルが通用しない複雑さ</a:t>
                       </a:r>
+                    </a:p>
+                    <a:p>
+                      <a:pPr>
+                        <a:spcBef>
+                          <a:spcPts val="400"/>
+                        </a:spcBef>
+                      </a:pPr>
                       <a:r>
                         <a:rPr sz="1400" b="0" i="0">
                           <a:solidFill>
@@ -4458,7 +4542,7 @@
                           </a:solidFill>
                           <a:latin typeface="Meiryo UI"/>
                         </a:rPr>
-                        <a:t>「会計×60超プロダクト×SaaS/Fintech/AI三層構造」は他SaaSと比較にならない複雑さ。前職スキルがそのまま通用せず、得意な1-2商品に偏る</a:t>
+                        <a:t>採用数に比例して売上が伸びない構造的問題</a:t>
                       </a:r>
                     </a:p>
                   </a:txBody>
@@ -4469,7 +4553,7 @@
                   </a:tcPr>
                 </a:tc>
               </a:tr>
-              <a:tr h="1097280">
+              <a:tr h="1164640">
                 <a:tc>
                   <a:txBody>
                     <a:bodyPr wrap="square"/>
@@ -4500,14 +4584,44 @@
                     <a:p>
                       <a:pPr algn="l"/>
                       <a:r>
+                        <a:rPr sz="1400" b="0" i="0">
+                          <a:solidFill>
+                            <a:srgbClr val="1A1A1A"/>
+                          </a:solidFill>
+                          <a:latin typeface="Meiryo UI"/>
+                        </a:rPr>
+                        <a:t>フェーズ別受注率・リードソース別・担当者別の分析が不可。戦略は描けているが実行を支える可視化基盤がない</a:t>
+                      </a:r>
+                    </a:p>
+                  </a:txBody>
+                  <a:tcPr>
+                    <a:solidFill>
+                      <a:srgbClr val="F5F7FA"/>
+                    </a:solidFill>
+                  </a:tcPr>
+                </a:tc>
+                <a:tc>
+                  <a:txBody>
+                    <a:bodyPr wrap="square"/>
+                    <a:lstStyle/>
+                    <a:p>
+                      <a:pPr algn="l"/>
+                      <a:r>
                         <a:rPr sz="1400" b="1" i="0">
                           <a:solidFill>
                             <a:srgbClr val="1A1A1A"/>
                           </a:solidFill>
                           <a:latin typeface="Meiryo UI"/>
                         </a:rPr>
-                        <a:t>受注率低下の原因をデータで特定できず介入ポイントが見えない。</a:t>
+                        <a:t>介入ポイントが見えない</a:t>
                       </a:r>
+                    </a:p>
+                    <a:p>
+                      <a:pPr>
+                        <a:spcBef>
+                          <a:spcPts val="400"/>
+                        </a:spcBef>
+                      </a:pPr>
                       <a:r>
                         <a:rPr sz="1400" b="0" i="0">
                           <a:solidFill>
@@ -4515,7 +4629,7 @@
                           </a:solidFill>
                           <a:latin typeface="Meiryo UI"/>
                         </a:rPr>
-                        <a:t> フェーズ別受注率・リードソース別担当者別の分析が不可。戦略は描けているが実行を支える基盤がない</a:t>
+                        <a:t>受注率低下の原因をデータで特定できず、どこに手を打つべきか判断できない</a:t>
                       </a:r>
                     </a:p>
                   </a:txBody>
@@ -4532,14 +4646,254 @@
       </p:graphicFrame>
       <p:sp>
         <p:nvSpPr>
-          <p:cNvPr id="7" name="Rectangle 6"/>
+          <p:cNvPr id="7" name="TextBox 6"/>
+          <p:cNvSpPr txBox="1"/>
+          <p:nvPr/>
+        </p:nvSpPr>
+        <p:spPr>
+          <a:xfrm>
+            <a:off x="3828592" y="1645920"/>
+            <a:ext cx="329184" cy="1164640"/>
+          </a:xfrm>
+          <a:prstGeom prst="rect">
+            <a:avLst/>
+          </a:prstGeom>
+          <a:noFill/>
+          <a:effectLst/>
+        </p:spPr>
+        <p:txBody>
+          <a:bodyPr wrap="none">
+            <a:spAutoFit/>
+          </a:bodyPr>
+          <a:lstStyle/>
+          <a:p>
+            <a:pPr algn="ctr">
+              <a:spcBef>
+                <a:spcPts val="3209"/>
+              </a:spcBef>
+            </a:pPr>
+            <a:r>
+              <a:rPr sz="1600" b="1" i="0">
+                <a:solidFill>
+                  <a:srgbClr val="0066CD"/>
+                </a:solidFill>
+                <a:latin typeface="Meiryo UI"/>
+              </a:rPr>
+              <a:t>→</a:t>
+            </a:r>
+          </a:p>
+        </p:txBody>
+      </p:sp>
+      <p:sp>
+        <p:nvSpPr>
+          <p:cNvPr id="8" name="TextBox 7"/>
+          <p:cNvSpPr txBox="1"/>
+          <p:nvPr/>
+        </p:nvSpPr>
+        <p:spPr>
+          <a:xfrm>
+            <a:off x="7824520" y="1645920"/>
+            <a:ext cx="329184" cy="1164640"/>
+          </a:xfrm>
+          <a:prstGeom prst="rect">
+            <a:avLst/>
+          </a:prstGeom>
+          <a:noFill/>
+          <a:effectLst/>
+        </p:spPr>
+        <p:txBody>
+          <a:bodyPr wrap="none">
+            <a:spAutoFit/>
+          </a:bodyPr>
+          <a:lstStyle/>
+          <a:p>
+            <a:pPr algn="ctr">
+              <a:spcBef>
+                <a:spcPts val="3209"/>
+              </a:spcBef>
+            </a:pPr>
+            <a:r>
+              <a:rPr sz="1600" b="1" i="0">
+                <a:solidFill>
+                  <a:srgbClr val="0066CD"/>
+                </a:solidFill>
+                <a:latin typeface="Meiryo UI"/>
+              </a:rPr>
+              <a:t>→</a:t>
+            </a:r>
+          </a:p>
+        </p:txBody>
+      </p:sp>
+      <p:sp>
+        <p:nvSpPr>
+          <p:cNvPr id="9" name="TextBox 8"/>
+          <p:cNvSpPr txBox="1"/>
+          <p:nvPr/>
+        </p:nvSpPr>
+        <p:spPr>
+          <a:xfrm>
+            <a:off x="3828592" y="2810560"/>
+            <a:ext cx="329184" cy="1164640"/>
+          </a:xfrm>
+          <a:prstGeom prst="rect">
+            <a:avLst/>
+          </a:prstGeom>
+          <a:noFill/>
+          <a:effectLst/>
+        </p:spPr>
+        <p:txBody>
+          <a:bodyPr wrap="none">
+            <a:spAutoFit/>
+          </a:bodyPr>
+          <a:lstStyle/>
+          <a:p>
+            <a:pPr algn="ctr">
+              <a:spcBef>
+                <a:spcPts val="3209"/>
+              </a:spcBef>
+            </a:pPr>
+            <a:r>
+              <a:rPr sz="1600" b="1" i="0">
+                <a:solidFill>
+                  <a:srgbClr val="0066CD"/>
+                </a:solidFill>
+                <a:latin typeface="Meiryo UI"/>
+              </a:rPr>
+              <a:t>→</a:t>
+            </a:r>
+          </a:p>
+        </p:txBody>
+      </p:sp>
+      <p:sp>
+        <p:nvSpPr>
+          <p:cNvPr id="10" name="TextBox 9"/>
+          <p:cNvSpPr txBox="1"/>
+          <p:nvPr/>
+        </p:nvSpPr>
+        <p:spPr>
+          <a:xfrm>
+            <a:off x="7824520" y="2810560"/>
+            <a:ext cx="329184" cy="1164640"/>
+          </a:xfrm>
+          <a:prstGeom prst="rect">
+            <a:avLst/>
+          </a:prstGeom>
+          <a:noFill/>
+          <a:effectLst/>
+        </p:spPr>
+        <p:txBody>
+          <a:bodyPr wrap="none">
+            <a:spAutoFit/>
+          </a:bodyPr>
+          <a:lstStyle/>
+          <a:p>
+            <a:pPr algn="ctr">
+              <a:spcBef>
+                <a:spcPts val="3209"/>
+              </a:spcBef>
+            </a:pPr>
+            <a:r>
+              <a:rPr sz="1600" b="1" i="0">
+                <a:solidFill>
+                  <a:srgbClr val="0066CD"/>
+                </a:solidFill>
+                <a:latin typeface="Meiryo UI"/>
+              </a:rPr>
+              <a:t>→</a:t>
+            </a:r>
+          </a:p>
+        </p:txBody>
+      </p:sp>
+      <p:sp>
+        <p:nvSpPr>
+          <p:cNvPr id="11" name="TextBox 10"/>
+          <p:cNvSpPr txBox="1"/>
+          <p:nvPr/>
+        </p:nvSpPr>
+        <p:spPr>
+          <a:xfrm>
+            <a:off x="3828592" y="3975200"/>
+            <a:ext cx="329184" cy="1164640"/>
+          </a:xfrm>
+          <a:prstGeom prst="rect">
+            <a:avLst/>
+          </a:prstGeom>
+          <a:noFill/>
+          <a:effectLst/>
+        </p:spPr>
+        <p:txBody>
+          <a:bodyPr wrap="none">
+            <a:spAutoFit/>
+          </a:bodyPr>
+          <a:lstStyle/>
+          <a:p>
+            <a:pPr algn="ctr">
+              <a:spcBef>
+                <a:spcPts val="3209"/>
+              </a:spcBef>
+            </a:pPr>
+            <a:r>
+              <a:rPr sz="1600" b="1" i="0">
+                <a:solidFill>
+                  <a:srgbClr val="0066CD"/>
+                </a:solidFill>
+                <a:latin typeface="Meiryo UI"/>
+              </a:rPr>
+              <a:t>→</a:t>
+            </a:r>
+          </a:p>
+        </p:txBody>
+      </p:sp>
+      <p:sp>
+        <p:nvSpPr>
+          <p:cNvPr id="12" name="TextBox 11"/>
+          <p:cNvSpPr txBox="1"/>
+          <p:nvPr/>
+        </p:nvSpPr>
+        <p:spPr>
+          <a:xfrm>
+            <a:off x="7824520" y="3975200"/>
+            <a:ext cx="329184" cy="1164640"/>
+          </a:xfrm>
+          <a:prstGeom prst="rect">
+            <a:avLst/>
+          </a:prstGeom>
+          <a:noFill/>
+          <a:effectLst/>
+        </p:spPr>
+        <p:txBody>
+          <a:bodyPr wrap="none">
+            <a:spAutoFit/>
+          </a:bodyPr>
+          <a:lstStyle/>
+          <a:p>
+            <a:pPr algn="ctr">
+              <a:spcBef>
+                <a:spcPts val="3209"/>
+              </a:spcBef>
+            </a:pPr>
+            <a:r>
+              <a:rPr sz="1600" b="1" i="0">
+                <a:solidFill>
+                  <a:srgbClr val="0066CD"/>
+                </a:solidFill>
+                <a:latin typeface="Meiryo UI"/>
+              </a:rPr>
+              <a:t>→</a:t>
+            </a:r>
+          </a:p>
+        </p:txBody>
+      </p:sp>
+      <p:sp>
+        <p:nvSpPr>
+          <p:cNvPr id="13" name="Rectangle 12"/>
           <p:cNvSpPr/>
           <p:nvPr/>
         </p:nvSpPr>
         <p:spPr>
           <a:xfrm>
-            <a:off x="838504" y="5779922"/>
-            <a:ext cx="10515600" cy="502920"/>
+            <a:off x="838504" y="5231282"/>
+            <a:ext cx="3310128" cy="384048"/>
           </a:xfrm>
           <a:prstGeom prst="rect">
             <a:avLst/>
@@ -4576,14 +4930,14 @@
       </p:sp>
       <p:sp>
         <p:nvSpPr>
-          <p:cNvPr id="8" name="TextBox 7"/>
+          <p:cNvPr id="14" name="TextBox 13"/>
           <p:cNvSpPr txBox="1"/>
           <p:nvPr/>
         </p:nvSpPr>
         <p:spPr>
           <a:xfrm>
-            <a:off x="1021384" y="5779922"/>
-            <a:ext cx="10149840" cy="502920"/>
+            <a:off x="893368" y="5231282"/>
+            <a:ext cx="3200400" cy="384048"/>
           </a:xfrm>
           <a:prstGeom prst="rect">
             <a:avLst/>
@@ -4599,13 +4953,361 @@
           <a:p>
             <a:pPr algn="ctr"/>
             <a:r>
+              <a:rPr sz="1300" b="1" i="0">
+                <a:solidFill>
+                  <a:srgbClr val="FFFFFF"/>
+                </a:solidFill>
+                <a:latin typeface="Meiryo UI"/>
+              </a:rPr>
+              <a:t>提案の型がない</a:t>
+            </a:r>
+          </a:p>
+        </p:txBody>
+      </p:sp>
+      <p:sp>
+        <p:nvSpPr>
+          <p:cNvPr id="15" name="TextBox 14"/>
+          <p:cNvSpPr txBox="1"/>
+          <p:nvPr/>
+        </p:nvSpPr>
+        <p:spPr>
+          <a:xfrm>
+            <a:off x="4148632" y="5231282"/>
+            <a:ext cx="292608" cy="384048"/>
+          </a:xfrm>
+          <a:prstGeom prst="rect">
+            <a:avLst/>
+          </a:prstGeom>
+          <a:noFill/>
+          <a:effectLst/>
+        </p:spPr>
+        <p:txBody>
+          <a:bodyPr wrap="none">
+            <a:spAutoFit/>
+          </a:bodyPr>
+          <a:lstStyle/>
+          <a:p>
+            <a:pPr algn="ctr"/>
+            <a:r>
+              <a:rPr sz="1400" b="1" i="0">
+                <a:solidFill>
+                  <a:srgbClr val="0066CD"/>
+                </a:solidFill>
+                <a:latin typeface="Meiryo UI"/>
+              </a:rPr>
+              <a:t>→</a:t>
+            </a:r>
+          </a:p>
+        </p:txBody>
+      </p:sp>
+      <p:sp>
+        <p:nvSpPr>
+          <p:cNvPr id="16" name="Rectangle 15"/>
+          <p:cNvSpPr/>
+          <p:nvPr/>
+        </p:nvSpPr>
+        <p:spPr>
+          <a:xfrm>
+            <a:off x="4441240" y="5231282"/>
+            <a:ext cx="3310128" cy="384048"/>
+          </a:xfrm>
+          <a:prstGeom prst="rect">
+            <a:avLst/>
+          </a:prstGeom>
+          <a:solidFill>
+            <a:srgbClr val="1D3461"/>
+          </a:solidFill>
+          <a:ln>
+            <a:noFill/>
+          </a:ln>
+          <a:effectLst/>
+        </p:spPr>
+        <p:style>
+          <a:lnRef idx="1">
+            <a:schemeClr val="accent1"/>
+          </a:lnRef>
+          <a:fillRef idx="3">
+            <a:schemeClr val="accent1"/>
+          </a:fillRef>
+          <a:effectRef idx="2">
+            <a:schemeClr val="accent1"/>
+          </a:effectRef>
+          <a:fontRef idx="minor">
+            <a:schemeClr val="lt1"/>
+          </a:fontRef>
+        </p:style>
+        <p:txBody>
+          <a:bodyPr rtlCol="0" anchor="ctr"/>
+          <a:lstStyle/>
+          <a:p>
+            <a:pPr algn="ctr"/>
+          </a:p>
+        </p:txBody>
+      </p:sp>
+      <p:sp>
+        <p:nvSpPr>
+          <p:cNvPr id="17" name="TextBox 16"/>
+          <p:cNvSpPr txBox="1"/>
+          <p:nvPr/>
+        </p:nvSpPr>
+        <p:spPr>
+          <a:xfrm>
+            <a:off x="4496104" y="5231282"/>
+            <a:ext cx="3200400" cy="384048"/>
+          </a:xfrm>
+          <a:prstGeom prst="rect">
+            <a:avLst/>
+          </a:prstGeom>
+          <a:noFill/>
+          <a:effectLst/>
+        </p:spPr>
+        <p:txBody>
+          <a:bodyPr wrap="square">
+            <a:spAutoFit/>
+          </a:bodyPr>
+          <a:lstStyle/>
+          <a:p>
+            <a:pPr algn="ctr"/>
+            <a:r>
+              <a:rPr sz="1300" b="1" i="0">
+                <a:solidFill>
+                  <a:srgbClr val="FFFFFF"/>
+                </a:solidFill>
+                <a:latin typeface="Meiryo UI"/>
+              </a:rPr>
+              <a:t>前職スキルが通用しない</a:t>
+            </a:r>
+          </a:p>
+        </p:txBody>
+      </p:sp>
+      <p:sp>
+        <p:nvSpPr>
+          <p:cNvPr id="18" name="TextBox 17"/>
+          <p:cNvSpPr txBox="1"/>
+          <p:nvPr/>
+        </p:nvSpPr>
+        <p:spPr>
+          <a:xfrm>
+            <a:off x="7751368" y="5231282"/>
+            <a:ext cx="292608" cy="384048"/>
+          </a:xfrm>
+          <a:prstGeom prst="rect">
+            <a:avLst/>
+          </a:prstGeom>
+          <a:noFill/>
+          <a:effectLst/>
+        </p:spPr>
+        <p:txBody>
+          <a:bodyPr wrap="none">
+            <a:spAutoFit/>
+          </a:bodyPr>
+          <a:lstStyle/>
+          <a:p>
+            <a:pPr algn="ctr"/>
+            <a:r>
+              <a:rPr sz="1400" b="1" i="0">
+                <a:solidFill>
+                  <a:srgbClr val="0066CD"/>
+                </a:solidFill>
+                <a:latin typeface="Meiryo UI"/>
+              </a:rPr>
+              <a:t>→</a:t>
+            </a:r>
+          </a:p>
+        </p:txBody>
+      </p:sp>
+      <p:sp>
+        <p:nvSpPr>
+          <p:cNvPr id="19" name="Rectangle 18"/>
+          <p:cNvSpPr/>
+          <p:nvPr/>
+        </p:nvSpPr>
+        <p:spPr>
+          <a:xfrm>
+            <a:off x="8043976" y="5231282"/>
+            <a:ext cx="3310128" cy="384048"/>
+          </a:xfrm>
+          <a:prstGeom prst="rect">
+            <a:avLst/>
+          </a:prstGeom>
+          <a:solidFill>
+            <a:srgbClr val="1D3461"/>
+          </a:solidFill>
+          <a:ln>
+            <a:noFill/>
+          </a:ln>
+          <a:effectLst/>
+        </p:spPr>
+        <p:style>
+          <a:lnRef idx="1">
+            <a:schemeClr val="accent1"/>
+          </a:lnRef>
+          <a:fillRef idx="3">
+            <a:schemeClr val="accent1"/>
+          </a:fillRef>
+          <a:effectRef idx="2">
+            <a:schemeClr val="accent1"/>
+          </a:effectRef>
+          <a:fontRef idx="minor">
+            <a:schemeClr val="lt1"/>
+          </a:fontRef>
+        </p:style>
+        <p:txBody>
+          <a:bodyPr rtlCol="0" anchor="ctr"/>
+          <a:lstStyle/>
+          <a:p>
+            <a:pPr algn="ctr"/>
+          </a:p>
+        </p:txBody>
+      </p:sp>
+      <p:sp>
+        <p:nvSpPr>
+          <p:cNvPr id="20" name="TextBox 19"/>
+          <p:cNvSpPr txBox="1"/>
+          <p:nvPr/>
+        </p:nvSpPr>
+        <p:spPr>
+          <a:xfrm>
+            <a:off x="8098840" y="5231282"/>
+            <a:ext cx="3200400" cy="384048"/>
+          </a:xfrm>
+          <a:prstGeom prst="rect">
+            <a:avLst/>
+          </a:prstGeom>
+          <a:noFill/>
+          <a:effectLst/>
+        </p:spPr>
+        <p:txBody>
+          <a:bodyPr wrap="square">
+            <a:spAutoFit/>
+          </a:bodyPr>
+          <a:lstStyle/>
+          <a:p>
+            <a:pPr algn="ctr"/>
+            <a:r>
+              <a:rPr sz="1300" b="1" i="0">
+                <a:solidFill>
+                  <a:srgbClr val="FFFFFF"/>
+                </a:solidFill>
+                <a:latin typeface="Meiryo UI"/>
+              </a:rPr>
+              <a:t>介入ポイントが見えない</a:t>
+            </a:r>
+          </a:p>
+        </p:txBody>
+      </p:sp>
+      <p:sp>
+        <p:nvSpPr>
+          <p:cNvPr id="21" name="TextBox 20"/>
+          <p:cNvSpPr txBox="1"/>
+          <p:nvPr/>
+        </p:nvSpPr>
+        <p:spPr>
+          <a:xfrm>
+            <a:off x="5959144" y="5615330"/>
+            <a:ext cx="274320" cy="256032"/>
+          </a:xfrm>
+          <a:prstGeom prst="rect">
+            <a:avLst/>
+          </a:prstGeom>
+          <a:noFill/>
+          <a:effectLst/>
+        </p:spPr>
+        <p:txBody>
+          <a:bodyPr wrap="none">
+            <a:spAutoFit/>
+          </a:bodyPr>
+          <a:lstStyle/>
+          <a:p>
+            <a:pPr algn="ctr"/>
+            <a:r>
+              <a:rPr sz="1400" b="1" i="0">
+                <a:solidFill>
+                  <a:srgbClr val="0066CD"/>
+                </a:solidFill>
+                <a:latin typeface="Meiryo UI"/>
+              </a:rPr>
+              <a:t>↓</a:t>
+            </a:r>
+          </a:p>
+        </p:txBody>
+      </p:sp>
+      <p:sp>
+        <p:nvSpPr>
+          <p:cNvPr id="22" name="Rectangle 21"/>
+          <p:cNvSpPr/>
+          <p:nvPr/>
+        </p:nvSpPr>
+        <p:spPr>
+          <a:xfrm>
+            <a:off x="838504" y="5871362"/>
+            <a:ext cx="10515600" cy="411480"/>
+          </a:xfrm>
+          <a:prstGeom prst="rect">
+            <a:avLst/>
+          </a:prstGeom>
+          <a:solidFill>
+            <a:srgbClr val="1D3461"/>
+          </a:solidFill>
+          <a:ln>
+            <a:noFill/>
+          </a:ln>
+          <a:effectLst/>
+        </p:spPr>
+        <p:style>
+          <a:lnRef idx="1">
+            <a:schemeClr val="accent1"/>
+          </a:lnRef>
+          <a:fillRef idx="3">
+            <a:schemeClr val="accent1"/>
+          </a:fillRef>
+          <a:effectRef idx="2">
+            <a:schemeClr val="accent1"/>
+          </a:effectRef>
+          <a:fontRef idx="minor">
+            <a:schemeClr val="lt1"/>
+          </a:fontRef>
+        </p:style>
+        <p:txBody>
+          <a:bodyPr rtlCol="0" anchor="ctr"/>
+          <a:lstStyle/>
+          <a:p>
+            <a:pPr algn="ctr"/>
+          </a:p>
+        </p:txBody>
+      </p:sp>
+      <p:sp>
+        <p:nvSpPr>
+          <p:cNvPr id="23" name="TextBox 22"/>
+          <p:cNvSpPr txBox="1"/>
+          <p:nvPr/>
+        </p:nvSpPr>
+        <p:spPr>
+          <a:xfrm>
+            <a:off x="1021384" y="5871362"/>
+            <a:ext cx="10149840" cy="411480"/>
+          </a:xfrm>
+          <a:prstGeom prst="rect">
+            <a:avLst/>
+          </a:prstGeom>
+          <a:noFill/>
+          <a:effectLst/>
+        </p:spPr>
+        <p:txBody>
+          <a:bodyPr wrap="square">
+            <a:spAutoFit/>
+          </a:bodyPr>
+          <a:lstStyle/>
+          <a:p>
+            <a:pPr algn="ctr"/>
+            <a:r>
               <a:rPr sz="1400" b="0" i="0">
                 <a:solidFill>
                   <a:srgbClr val="FFFFFF"/>
                 </a:solidFill>
                 <a:latin typeface="Meiryo UI"/>
               </a:rPr>
-              <a:t>3仮説の帰着点：</a:t>
+              <a:t>帰着点：</a:t>
             </a:r>
             <a:r>
               <a:rPr sz="1400" b="1" i="0">
@@ -4623,14 +5325,14 @@
                 </a:solidFill>
                 <a:latin typeface="Meiryo UI"/>
               </a:rPr>
-              <a:t>。採用数に比例して売上が伸びる組織構造が実現できていない</a:t>
+              <a:t>　採用数に比例して売上が伸びる組織構造が実現できていない</a:t>
             </a:r>
           </a:p>
         </p:txBody>
       </p:sp>
       <p:pic>
         <p:nvPicPr>
-          <p:cNvPr id="9" name="Picture 8" descr="logo.png"/>
+          <p:cNvPr id="24" name="Picture 23" descr="logo.png"/>
           <p:cNvPicPr>
             <a:picLocks noChangeAspect="1"/>
           </p:cNvPicPr>
@@ -4654,7 +5356,7 @@
       </p:pic>
       <p:sp>
         <p:nvSpPr>
-          <p:cNvPr id="10" name="Rectangle 9"/>
+          <p:cNvPr id="25" name="Rectangle 24"/>
           <p:cNvSpPr/>
           <p:nvPr/>
         </p:nvSpPr>
@@ -4698,7 +5400,7 @@
       </p:sp>
       <p:sp>
         <p:nvSpPr>
-          <p:cNvPr id="11" name="TextBox 10"/>
+          <p:cNvPr id="26" name="TextBox 25"/>
           <p:cNvSpPr txBox="1"/>
           <p:nvPr/>
         </p:nvSpPr>
@@ -4732,7 +5434,7 @@
       </p:sp>
       <p:sp>
         <p:nvSpPr>
-          <p:cNvPr id="12" name="TextBox 11"/>
+          <p:cNvPr id="27" name="TextBox 26"/>
           <p:cNvSpPr txBox="1"/>
           <p:nvPr/>
         </p:nvSpPr>

--- a/slides_p10_p12.pptx
+++ b/slides_p10_p12.pptx
@@ -4393,7 +4393,7 @@
                           </a:solidFill>
                           <a:latin typeface="Meiryo UI"/>
                         </a:rPr>
-                        <a:t>受注率に個人間ばらつき。機能売りになりがち。決裁者同一で検討商材が多く提案の仮説もばらつく</a:t>
+                        <a:t>受注率に個人間ばらつきがある（電話ヒアリングで確認）</a:t>
                       </a:r>
                     </a:p>
                   </a:txBody>

--- a/slides_p10_p12.pptx
+++ b/slides_p10_p12.pptx
@@ -4295,7 +4295,7 @@
         </p:nvGraphicFramePr>
         <p:xfrm>
           <a:off x="838504" y="1280160"/>
-          <a:ext cx="10515600" cy="3859680"/>
+          <a:ext cx="10515600" cy="3657600"/>
         </p:xfrm>
         <a:graphic>
           <a:graphicData uri="http://schemas.openxmlformats.org/drawingml/2006/table">
@@ -4304,9 +4304,9 @@
                 <a:tableStyleId>{5C22544A-7EE6-4342-B048-85BDC9FD1C3A}</a:tableStyleId>
               </a:tblPr>
               <a:tblGrid>
-                <a:gridCol w="3154680"/>
-                <a:gridCol w="3995928"/>
-                <a:gridCol w="3364992"/>
+                <a:gridCol w="3505200"/>
+                <a:gridCol w="3505200"/>
+                <a:gridCol w="3505200"/>
               </a:tblGrid>
               <a:tr h="365760">
                 <a:tc>
@@ -4322,7 +4322,7 @@
                           </a:solidFill>
                           <a:latin typeface="Meiryo UI"/>
                         </a:rPr>
-                        <a:t>FACT</a:t>
+                        <a:t>お伺いした事実</a:t>
                       </a:r>
                     </a:p>
                   </a:txBody>
@@ -4345,13 +4345,13 @@
                           </a:solidFill>
                           <a:latin typeface="Meiryo UI"/>
                         </a:rPr>
-                        <a:t>WHY</a:t>
+                        <a:t>なぜ起きているか</a:t>
                       </a:r>
                     </a:p>
                   </a:txBody>
                   <a:tcPr>
                     <a:solidFill>
-                      <a:srgbClr val="1B4FA8"/>
+                      <a:srgbClr val="1D3461"/>
                     </a:solidFill>
                   </a:tcPr>
                 </a:tc>
@@ -4368,7 +4368,7 @@
                           </a:solidFill>
                           <a:latin typeface="Meiryo UI"/>
                         </a:rPr>
-                        <a:t>INSIGHT</a:t>
+                        <a:t>課題の核心</a:t>
                       </a:r>
                     </a:p>
                   </a:txBody>
@@ -4379,7 +4379,7 @@
                   </a:tcPr>
                 </a:tc>
               </a:tr>
-              <a:tr h="1164640">
+              <a:tr h="1097280">
                 <a:tc>
                   <a:txBody>
                     <a:bodyPr wrap="square"/>
@@ -4433,29 +4433,13 @@
                     <a:p>
                       <a:pPr algn="l"/>
                       <a:r>
-                        <a:rPr sz="1400" b="1" i="0">
-                          <a:solidFill>
-                            <a:srgbClr val="1A1A1A"/>
-                          </a:solidFill>
-                          <a:latin typeface="Meiryo UI"/>
-                        </a:rPr>
-                        <a:t>提案の型がない</a:t>
-                      </a:r>
-                    </a:p>
-                    <a:p>
-                      <a:pPr>
-                        <a:spcBef>
-                          <a:spcPts val="400"/>
-                        </a:spcBef>
-                      </a:pPr>
-                      <a:r>
                         <a:rPr sz="1400" b="0" i="0">
                           <a:solidFill>
                             <a:srgbClr val="1A1A1A"/>
                           </a:solidFill>
                           <a:latin typeface="Meiryo UI"/>
                         </a:rPr>
-                        <a:t>型なし＝商品知識の差＝受注率の差。競合との機能比較に陥ると価格勝負になる</a:t>
+                        <a:t>提案の型がない｜型なし＝商品知識の差＝受注率の差。競合との機能比較に陥ると価格勝負になる</a:t>
                       </a:r>
                     </a:p>
                   </a:txBody>
@@ -4466,7 +4450,7 @@
                   </a:tcPr>
                 </a:tc>
               </a:tr>
-              <a:tr h="1164640">
+              <a:tr h="1097280">
                 <a:tc>
                   <a:txBody>
                     <a:bodyPr wrap="square"/>
@@ -4520,29 +4504,13 @@
                     <a:p>
                       <a:pPr algn="l"/>
                       <a:r>
-                        <a:rPr sz="1400" b="1" i="0">
-                          <a:solidFill>
-                            <a:srgbClr val="1A1A1A"/>
-                          </a:solidFill>
-                          <a:latin typeface="Meiryo UI"/>
-                        </a:rPr>
-                        <a:t>前職スキルが通用しない複雑さ</a:t>
-                      </a:r>
-                    </a:p>
-                    <a:p>
-                      <a:pPr>
-                        <a:spcBef>
-                          <a:spcPts val="400"/>
-                        </a:spcBef>
-                      </a:pPr>
-                      <a:r>
                         <a:rPr sz="1400" b="0" i="0">
                           <a:solidFill>
                             <a:srgbClr val="1A1A1A"/>
                           </a:solidFill>
                           <a:latin typeface="Meiryo UI"/>
                         </a:rPr>
-                        <a:t>採用数に比例して売上が伸びない構造的問題</a:t>
+                        <a:t>前職スキルが通用しない複雑さ｜採用数に比例して売上が伸びない構造的問題</a:t>
                       </a:r>
                     </a:p>
                   </a:txBody>
@@ -4553,7 +4521,7 @@
                   </a:tcPr>
                 </a:tc>
               </a:tr>
-              <a:tr h="1164640">
+              <a:tr h="1097280">
                 <a:tc>
                   <a:txBody>
                     <a:bodyPr wrap="square"/>
@@ -4607,29 +4575,13 @@
                     <a:p>
                       <a:pPr algn="l"/>
                       <a:r>
-                        <a:rPr sz="1400" b="1" i="0">
-                          <a:solidFill>
-                            <a:srgbClr val="1A1A1A"/>
-                          </a:solidFill>
-                          <a:latin typeface="Meiryo UI"/>
-                        </a:rPr>
-                        <a:t>介入ポイントが見えない</a:t>
-                      </a:r>
-                    </a:p>
-                    <a:p>
-                      <a:pPr>
-                        <a:spcBef>
-                          <a:spcPts val="400"/>
-                        </a:spcBef>
-                      </a:pPr>
-                      <a:r>
                         <a:rPr sz="1400" b="0" i="0">
                           <a:solidFill>
                             <a:srgbClr val="1A1A1A"/>
                           </a:solidFill>
                           <a:latin typeface="Meiryo UI"/>
                         </a:rPr>
-                        <a:t>受注率低下の原因をデータで特定できず、どこに手を打つべきか判断できない</a:t>
+                        <a:t>介入ポイントが見えない｜受注率低下の原因をデータで特定できず、どこに手を打つべきか判断できない</a:t>
                       </a:r>
                     </a:p>
                   </a:txBody>
@@ -4646,247 +4598,7 @@
       </p:graphicFrame>
       <p:sp>
         <p:nvSpPr>
-          <p:cNvPr id="7" name="TextBox 6"/>
-          <p:cNvSpPr txBox="1"/>
-          <p:nvPr/>
-        </p:nvSpPr>
-        <p:spPr>
-          <a:xfrm>
-            <a:off x="3828592" y="1645920"/>
-            <a:ext cx="329184" cy="1164640"/>
-          </a:xfrm>
-          <a:prstGeom prst="rect">
-            <a:avLst/>
-          </a:prstGeom>
-          <a:noFill/>
-          <a:effectLst/>
-        </p:spPr>
-        <p:txBody>
-          <a:bodyPr wrap="none">
-            <a:spAutoFit/>
-          </a:bodyPr>
-          <a:lstStyle/>
-          <a:p>
-            <a:pPr algn="ctr">
-              <a:spcBef>
-                <a:spcPts val="3209"/>
-              </a:spcBef>
-            </a:pPr>
-            <a:r>
-              <a:rPr sz="1600" b="1" i="0">
-                <a:solidFill>
-                  <a:srgbClr val="0066CD"/>
-                </a:solidFill>
-                <a:latin typeface="Meiryo UI"/>
-              </a:rPr>
-              <a:t>→</a:t>
-            </a:r>
-          </a:p>
-        </p:txBody>
-      </p:sp>
-      <p:sp>
-        <p:nvSpPr>
-          <p:cNvPr id="8" name="TextBox 7"/>
-          <p:cNvSpPr txBox="1"/>
-          <p:nvPr/>
-        </p:nvSpPr>
-        <p:spPr>
-          <a:xfrm>
-            <a:off x="7824520" y="1645920"/>
-            <a:ext cx="329184" cy="1164640"/>
-          </a:xfrm>
-          <a:prstGeom prst="rect">
-            <a:avLst/>
-          </a:prstGeom>
-          <a:noFill/>
-          <a:effectLst/>
-        </p:spPr>
-        <p:txBody>
-          <a:bodyPr wrap="none">
-            <a:spAutoFit/>
-          </a:bodyPr>
-          <a:lstStyle/>
-          <a:p>
-            <a:pPr algn="ctr">
-              <a:spcBef>
-                <a:spcPts val="3209"/>
-              </a:spcBef>
-            </a:pPr>
-            <a:r>
-              <a:rPr sz="1600" b="1" i="0">
-                <a:solidFill>
-                  <a:srgbClr val="0066CD"/>
-                </a:solidFill>
-                <a:latin typeface="Meiryo UI"/>
-              </a:rPr>
-              <a:t>→</a:t>
-            </a:r>
-          </a:p>
-        </p:txBody>
-      </p:sp>
-      <p:sp>
-        <p:nvSpPr>
-          <p:cNvPr id="9" name="TextBox 8"/>
-          <p:cNvSpPr txBox="1"/>
-          <p:nvPr/>
-        </p:nvSpPr>
-        <p:spPr>
-          <a:xfrm>
-            <a:off x="3828592" y="2810560"/>
-            <a:ext cx="329184" cy="1164640"/>
-          </a:xfrm>
-          <a:prstGeom prst="rect">
-            <a:avLst/>
-          </a:prstGeom>
-          <a:noFill/>
-          <a:effectLst/>
-        </p:spPr>
-        <p:txBody>
-          <a:bodyPr wrap="none">
-            <a:spAutoFit/>
-          </a:bodyPr>
-          <a:lstStyle/>
-          <a:p>
-            <a:pPr algn="ctr">
-              <a:spcBef>
-                <a:spcPts val="3209"/>
-              </a:spcBef>
-            </a:pPr>
-            <a:r>
-              <a:rPr sz="1600" b="1" i="0">
-                <a:solidFill>
-                  <a:srgbClr val="0066CD"/>
-                </a:solidFill>
-                <a:latin typeface="Meiryo UI"/>
-              </a:rPr>
-              <a:t>→</a:t>
-            </a:r>
-          </a:p>
-        </p:txBody>
-      </p:sp>
-      <p:sp>
-        <p:nvSpPr>
-          <p:cNvPr id="10" name="TextBox 9"/>
-          <p:cNvSpPr txBox="1"/>
-          <p:nvPr/>
-        </p:nvSpPr>
-        <p:spPr>
-          <a:xfrm>
-            <a:off x="7824520" y="2810560"/>
-            <a:ext cx="329184" cy="1164640"/>
-          </a:xfrm>
-          <a:prstGeom prst="rect">
-            <a:avLst/>
-          </a:prstGeom>
-          <a:noFill/>
-          <a:effectLst/>
-        </p:spPr>
-        <p:txBody>
-          <a:bodyPr wrap="none">
-            <a:spAutoFit/>
-          </a:bodyPr>
-          <a:lstStyle/>
-          <a:p>
-            <a:pPr algn="ctr">
-              <a:spcBef>
-                <a:spcPts val="3209"/>
-              </a:spcBef>
-            </a:pPr>
-            <a:r>
-              <a:rPr sz="1600" b="1" i="0">
-                <a:solidFill>
-                  <a:srgbClr val="0066CD"/>
-                </a:solidFill>
-                <a:latin typeface="Meiryo UI"/>
-              </a:rPr>
-              <a:t>→</a:t>
-            </a:r>
-          </a:p>
-        </p:txBody>
-      </p:sp>
-      <p:sp>
-        <p:nvSpPr>
-          <p:cNvPr id="11" name="TextBox 10"/>
-          <p:cNvSpPr txBox="1"/>
-          <p:nvPr/>
-        </p:nvSpPr>
-        <p:spPr>
-          <a:xfrm>
-            <a:off x="3828592" y="3975200"/>
-            <a:ext cx="329184" cy="1164640"/>
-          </a:xfrm>
-          <a:prstGeom prst="rect">
-            <a:avLst/>
-          </a:prstGeom>
-          <a:noFill/>
-          <a:effectLst/>
-        </p:spPr>
-        <p:txBody>
-          <a:bodyPr wrap="none">
-            <a:spAutoFit/>
-          </a:bodyPr>
-          <a:lstStyle/>
-          <a:p>
-            <a:pPr algn="ctr">
-              <a:spcBef>
-                <a:spcPts val="3209"/>
-              </a:spcBef>
-            </a:pPr>
-            <a:r>
-              <a:rPr sz="1600" b="1" i="0">
-                <a:solidFill>
-                  <a:srgbClr val="0066CD"/>
-                </a:solidFill>
-                <a:latin typeface="Meiryo UI"/>
-              </a:rPr>
-              <a:t>→</a:t>
-            </a:r>
-          </a:p>
-        </p:txBody>
-      </p:sp>
-      <p:sp>
-        <p:nvSpPr>
-          <p:cNvPr id="12" name="TextBox 11"/>
-          <p:cNvSpPr txBox="1"/>
-          <p:nvPr/>
-        </p:nvSpPr>
-        <p:spPr>
-          <a:xfrm>
-            <a:off x="7824520" y="3975200"/>
-            <a:ext cx="329184" cy="1164640"/>
-          </a:xfrm>
-          <a:prstGeom prst="rect">
-            <a:avLst/>
-          </a:prstGeom>
-          <a:noFill/>
-          <a:effectLst/>
-        </p:spPr>
-        <p:txBody>
-          <a:bodyPr wrap="none">
-            <a:spAutoFit/>
-          </a:bodyPr>
-          <a:lstStyle/>
-          <a:p>
-            <a:pPr algn="ctr">
-              <a:spcBef>
-                <a:spcPts val="3209"/>
-              </a:spcBef>
-            </a:pPr>
-            <a:r>
-              <a:rPr sz="1600" b="1" i="0">
-                <a:solidFill>
-                  <a:srgbClr val="0066CD"/>
-                </a:solidFill>
-                <a:latin typeface="Meiryo UI"/>
-              </a:rPr>
-              <a:t>→</a:t>
-            </a:r>
-          </a:p>
-        </p:txBody>
-      </p:sp>
-      <p:sp>
-        <p:nvSpPr>
-          <p:cNvPr id="13" name="Rectangle 12"/>
+          <p:cNvPr id="7" name="Rectangle 6"/>
           <p:cNvSpPr/>
           <p:nvPr/>
         </p:nvSpPr>
@@ -4930,7 +4642,7 @@
       </p:sp>
       <p:sp>
         <p:nvSpPr>
-          <p:cNvPr id="14" name="TextBox 13"/>
+          <p:cNvPr id="8" name="TextBox 7"/>
           <p:cNvSpPr txBox="1"/>
           <p:nvPr/>
         </p:nvSpPr>
@@ -4966,7 +4678,7 @@
       </p:sp>
       <p:sp>
         <p:nvSpPr>
-          <p:cNvPr id="15" name="TextBox 14"/>
+          <p:cNvPr id="9" name="TextBox 8"/>
           <p:cNvSpPr txBox="1"/>
           <p:nvPr/>
         </p:nvSpPr>
@@ -5002,7 +4714,7 @@
       </p:sp>
       <p:sp>
         <p:nvSpPr>
-          <p:cNvPr id="16" name="Rectangle 15"/>
+          <p:cNvPr id="10" name="Rectangle 9"/>
           <p:cNvSpPr/>
           <p:nvPr/>
         </p:nvSpPr>
@@ -5046,7 +4758,7 @@
       </p:sp>
       <p:sp>
         <p:nvSpPr>
-          <p:cNvPr id="17" name="TextBox 16"/>
+          <p:cNvPr id="11" name="TextBox 10"/>
           <p:cNvSpPr txBox="1"/>
           <p:nvPr/>
         </p:nvSpPr>
@@ -5075,14 +4787,14 @@
                 </a:solidFill>
                 <a:latin typeface="Meiryo UI"/>
               </a:rPr>
-              <a:t>前職スキルが通用しない</a:t>
-            </a:r>
-          </a:p>
-        </p:txBody>
-      </p:sp>
-      <p:sp>
-        <p:nvSpPr>
-          <p:cNvPr id="18" name="TextBox 17"/>
+              <a:t>前職スキルが通用しない複雑さ</a:t>
+            </a:r>
+          </a:p>
+        </p:txBody>
+      </p:sp>
+      <p:sp>
+        <p:nvSpPr>
+          <p:cNvPr id="12" name="TextBox 11"/>
           <p:cNvSpPr txBox="1"/>
           <p:nvPr/>
         </p:nvSpPr>
@@ -5118,7 +4830,7 @@
       </p:sp>
       <p:sp>
         <p:nvSpPr>
-          <p:cNvPr id="19" name="Rectangle 18"/>
+          <p:cNvPr id="13" name="Rectangle 12"/>
           <p:cNvSpPr/>
           <p:nvPr/>
         </p:nvSpPr>
@@ -5162,7 +4874,7 @@
       </p:sp>
       <p:sp>
         <p:nvSpPr>
-          <p:cNvPr id="20" name="TextBox 19"/>
+          <p:cNvPr id="14" name="TextBox 13"/>
           <p:cNvSpPr txBox="1"/>
           <p:nvPr/>
         </p:nvSpPr>
@@ -5198,7 +4910,7 @@
       </p:sp>
       <p:sp>
         <p:nvSpPr>
-          <p:cNvPr id="21" name="TextBox 20"/>
+          <p:cNvPr id="15" name="TextBox 14"/>
           <p:cNvSpPr txBox="1"/>
           <p:nvPr/>
         </p:nvSpPr>
@@ -5234,7 +4946,7 @@
       </p:sp>
       <p:sp>
         <p:nvSpPr>
-          <p:cNvPr id="22" name="Rectangle 21"/>
+          <p:cNvPr id="16" name="Rectangle 15"/>
           <p:cNvSpPr/>
           <p:nvPr/>
         </p:nvSpPr>
@@ -5278,7 +4990,7 @@
       </p:sp>
       <p:sp>
         <p:nvSpPr>
-          <p:cNvPr id="23" name="TextBox 22"/>
+          <p:cNvPr id="17" name="TextBox 16"/>
           <p:cNvSpPr txBox="1"/>
           <p:nvPr/>
         </p:nvSpPr>
@@ -5332,7 +5044,7 @@
       </p:sp>
       <p:pic>
         <p:nvPicPr>
-          <p:cNvPr id="24" name="Picture 23" descr="logo.png"/>
+          <p:cNvPr id="18" name="Picture 17" descr="logo.png"/>
           <p:cNvPicPr>
             <a:picLocks noChangeAspect="1"/>
           </p:cNvPicPr>
@@ -5356,7 +5068,7 @@
       </p:pic>
       <p:sp>
         <p:nvSpPr>
-          <p:cNvPr id="25" name="Rectangle 24"/>
+          <p:cNvPr id="19" name="Rectangle 18"/>
           <p:cNvSpPr/>
           <p:nvPr/>
         </p:nvSpPr>
@@ -5400,7 +5112,7 @@
       </p:sp>
       <p:sp>
         <p:nvSpPr>
-          <p:cNvPr id="26" name="TextBox 25"/>
+          <p:cNvPr id="20" name="TextBox 19"/>
           <p:cNvSpPr txBox="1"/>
           <p:nvPr/>
         </p:nvSpPr>
@@ -5434,7 +5146,7 @@
       </p:sp>
       <p:sp>
         <p:nvSpPr>
-          <p:cNvPr id="27" name="TextBox 26"/>
+          <p:cNvPr id="21" name="TextBox 20"/>
           <p:cNvSpPr txBox="1"/>
           <p:nvPr/>
         </p:nvSpPr>

--- a/slides_p10_p12.pptx
+++ b/slides_p10_p12.pptx
@@ -4295,7 +4295,7 @@
         </p:nvGraphicFramePr>
         <p:xfrm>
           <a:off x="838504" y="1280160"/>
-          <a:ext cx="10515600" cy="3657600"/>
+          <a:ext cx="10515600" cy="3420768"/>
         </p:xfrm>
         <a:graphic>
           <a:graphicData uri="http://schemas.openxmlformats.org/drawingml/2006/table">
@@ -4379,7 +4379,7 @@
                   </a:tcPr>
                 </a:tc>
               </a:tr>
-              <a:tr h="1097280">
+              <a:tr h="1018336">
                 <a:tc>
                   <a:txBody>
                     <a:bodyPr wrap="square"/>
@@ -4450,7 +4450,7 @@
                   </a:tcPr>
                 </a:tc>
               </a:tr>
-              <a:tr h="1097280">
+              <a:tr h="1018336">
                 <a:tc>
                   <a:txBody>
                     <a:bodyPr wrap="square"/>
@@ -4521,7 +4521,7 @@
                   </a:tcPr>
                 </a:tc>
               </a:tr>
-              <a:tr h="1097280">
+              <a:tr h="1018336">
                 <a:tc>
                   <a:txBody>
                     <a:bodyPr wrap="square"/>
@@ -4604,8 +4604,8 @@
         </p:nvSpPr>
         <p:spPr>
           <a:xfrm>
-            <a:off x="838504" y="5231282"/>
-            <a:ext cx="3310128" cy="384048"/>
+            <a:off x="838504" y="4792370"/>
+            <a:ext cx="3310128" cy="566928"/>
           </a:xfrm>
           <a:prstGeom prst="rect">
             <a:avLst/>
@@ -4642,14 +4642,71 @@
       </p:sp>
       <p:sp>
         <p:nvSpPr>
-          <p:cNvPr id="8" name="TextBox 7"/>
+          <p:cNvPr id="8" name="Oval 7"/>
+          <p:cNvSpPr/>
+          <p:nvPr/>
+        </p:nvSpPr>
+        <p:spPr>
+          <a:xfrm>
+            <a:off x="902512" y="4856378"/>
+            <a:ext cx="182880" cy="182880"/>
+          </a:xfrm>
+          <a:prstGeom prst="ellipse">
+            <a:avLst/>
+          </a:prstGeom>
+          <a:solidFill>
+            <a:srgbClr val="284F88"/>
+          </a:solidFill>
+          <a:ln>
+            <a:noFill/>
+          </a:ln>
+          <a:effectLst/>
+        </p:spPr>
+        <p:style>
+          <a:lnRef idx="1">
+            <a:schemeClr val="accent1"/>
+          </a:lnRef>
+          <a:fillRef idx="3">
+            <a:schemeClr val="accent1"/>
+          </a:fillRef>
+          <a:effectRef idx="2">
+            <a:schemeClr val="accent1"/>
+          </a:effectRef>
+          <a:fontRef idx="minor">
+            <a:schemeClr val="lt1"/>
+          </a:fontRef>
+        </p:style>
+        <p:txBody>
+          <a:bodyPr rtlCol="0" anchor="ctr" wrap="none"/>
+          <a:lstStyle/>
+          <a:p>
+            <a:pPr algn="ctr">
+              <a:spcBef>
+                <a:spcPts val="100"/>
+              </a:spcBef>
+            </a:pPr>
+            <a:r>
+              <a:rPr sz="1200" b="1" i="0">
+                <a:solidFill>
+                  <a:srgbClr val="4A9EFF"/>
+                </a:solidFill>
+                <a:latin typeface="Meiryo UI"/>
+              </a:rPr>
+              <a:t>①</a:t>
+            </a:r>
+          </a:p>
+        </p:txBody>
+      </p:sp>
+      <p:sp>
+        <p:nvSpPr>
+          <p:cNvPr id="9" name="TextBox 8"/>
           <p:cNvSpPr txBox="1"/>
           <p:nvPr/>
         </p:nvSpPr>
         <p:spPr>
           <a:xfrm>
-            <a:off x="893368" y="5231282"/>
-            <a:ext cx="3200400" cy="384048"/>
+            <a:off x="911656" y="5066690"/>
+            <a:ext cx="3163824" cy="256032"/>
           </a:xfrm>
           <a:prstGeom prst="rect">
             <a:avLst/>
@@ -4665,7 +4722,7 @@
           <a:p>
             <a:pPr algn="ctr"/>
             <a:r>
-              <a:rPr sz="1300" b="1" i="0">
+              <a:rPr sz="1200" b="1" i="0">
                 <a:solidFill>
                   <a:srgbClr val="FFFFFF"/>
                 </a:solidFill>
@@ -4674,18 +4731,34 @@
               <a:t>提案の型がない</a:t>
             </a:r>
           </a:p>
-        </p:txBody>
-      </p:sp>
-      <p:sp>
-        <p:nvSpPr>
-          <p:cNvPr id="9" name="TextBox 8"/>
+          <a:p>
+            <a:pPr algn="ctr">
+              <a:spcBef>
+                <a:spcPts val="200"/>
+              </a:spcBef>
+            </a:pPr>
+            <a:r>
+              <a:rPr sz="1200" b="0" i="0">
+                <a:solidFill>
+                  <a:srgbClr val="BBC2D0"/>
+                </a:solidFill>
+                <a:latin typeface="Meiryo UI"/>
+              </a:rPr>
+              <a:t>課題パターン×PdX組合せ不在</a:t>
+            </a:r>
+          </a:p>
+        </p:txBody>
+      </p:sp>
+      <p:sp>
+        <p:nvSpPr>
+          <p:cNvPr id="10" name="TextBox 9"/>
           <p:cNvSpPr txBox="1"/>
           <p:nvPr/>
         </p:nvSpPr>
         <p:spPr>
           <a:xfrm>
-            <a:off x="4148632" y="5231282"/>
-            <a:ext cx="292608" cy="384048"/>
+            <a:off x="4148632" y="4792370"/>
+            <a:ext cx="292608" cy="566928"/>
           </a:xfrm>
           <a:prstGeom prst="rect">
             <a:avLst/>
@@ -4699,7 +4772,11 @@
           </a:bodyPr>
           <a:lstStyle/>
           <a:p>
-            <a:pPr algn="ctr"/>
+            <a:pPr algn="ctr">
+              <a:spcBef>
+                <a:spcPts val="1000"/>
+              </a:spcBef>
+            </a:pPr>
             <a:r>
               <a:rPr sz="1400" b="1" i="0">
                 <a:solidFill>
@@ -4714,14 +4791,14 @@
       </p:sp>
       <p:sp>
         <p:nvSpPr>
-          <p:cNvPr id="10" name="Rectangle 9"/>
+          <p:cNvPr id="11" name="Rectangle 10"/>
           <p:cNvSpPr/>
           <p:nvPr/>
         </p:nvSpPr>
         <p:spPr>
           <a:xfrm>
-            <a:off x="4441240" y="5231282"/>
-            <a:ext cx="3310128" cy="384048"/>
+            <a:off x="4441240" y="4792370"/>
+            <a:ext cx="3310128" cy="566928"/>
           </a:xfrm>
           <a:prstGeom prst="rect">
             <a:avLst/>
@@ -4758,14 +4835,71 @@
       </p:sp>
       <p:sp>
         <p:nvSpPr>
-          <p:cNvPr id="11" name="TextBox 10"/>
+          <p:cNvPr id="12" name="Oval 11"/>
+          <p:cNvSpPr/>
+          <p:nvPr/>
+        </p:nvSpPr>
+        <p:spPr>
+          <a:xfrm>
+            <a:off x="4505248" y="4856378"/>
+            <a:ext cx="182880" cy="182880"/>
+          </a:xfrm>
+          <a:prstGeom prst="ellipse">
+            <a:avLst/>
+          </a:prstGeom>
+          <a:solidFill>
+            <a:srgbClr val="284F88"/>
+          </a:solidFill>
+          <a:ln>
+            <a:noFill/>
+          </a:ln>
+          <a:effectLst/>
+        </p:spPr>
+        <p:style>
+          <a:lnRef idx="1">
+            <a:schemeClr val="accent1"/>
+          </a:lnRef>
+          <a:fillRef idx="3">
+            <a:schemeClr val="accent1"/>
+          </a:fillRef>
+          <a:effectRef idx="2">
+            <a:schemeClr val="accent1"/>
+          </a:effectRef>
+          <a:fontRef idx="minor">
+            <a:schemeClr val="lt1"/>
+          </a:fontRef>
+        </p:style>
+        <p:txBody>
+          <a:bodyPr rtlCol="0" anchor="ctr" wrap="none"/>
+          <a:lstStyle/>
+          <a:p>
+            <a:pPr algn="ctr">
+              <a:spcBef>
+                <a:spcPts val="100"/>
+              </a:spcBef>
+            </a:pPr>
+            <a:r>
+              <a:rPr sz="1200" b="1" i="0">
+                <a:solidFill>
+                  <a:srgbClr val="4A9EFF"/>
+                </a:solidFill>
+                <a:latin typeface="Meiryo UI"/>
+              </a:rPr>
+              <a:t>②</a:t>
+            </a:r>
+          </a:p>
+        </p:txBody>
+      </p:sp>
+      <p:sp>
+        <p:nvSpPr>
+          <p:cNvPr id="13" name="TextBox 12"/>
           <p:cNvSpPr txBox="1"/>
           <p:nvPr/>
         </p:nvSpPr>
         <p:spPr>
           <a:xfrm>
-            <a:off x="4496104" y="5231282"/>
-            <a:ext cx="3200400" cy="384048"/>
+            <a:off x="4514392" y="5066690"/>
+            <a:ext cx="3163824" cy="256032"/>
           </a:xfrm>
           <a:prstGeom prst="rect">
             <a:avLst/>
@@ -4781,7 +4915,7 @@
           <a:p>
             <a:pPr algn="ctr"/>
             <a:r>
-              <a:rPr sz="1300" b="1" i="0">
+              <a:rPr sz="1200" b="1" i="0">
                 <a:solidFill>
                   <a:srgbClr val="FFFFFF"/>
                 </a:solidFill>
@@ -4790,18 +4924,34 @@
               <a:t>前職スキルが通用しない複雑さ</a:t>
             </a:r>
           </a:p>
-        </p:txBody>
-      </p:sp>
-      <p:sp>
-        <p:nvSpPr>
-          <p:cNvPr id="12" name="TextBox 11"/>
+          <a:p>
+            <a:pPr algn="ctr">
+              <a:spcBef>
+                <a:spcPts val="200"/>
+              </a:spcBef>
+            </a:pPr>
+            <a:r>
+              <a:rPr sz="1200" b="0" i="0">
+                <a:solidFill>
+                  <a:srgbClr val="BBC2D0"/>
+                </a:solidFill>
+                <a:latin typeface="Meiryo UI"/>
+              </a:rPr>
+              <a:t>三層構造がスキル移転を阻害</a:t>
+            </a:r>
+          </a:p>
+        </p:txBody>
+      </p:sp>
+      <p:sp>
+        <p:nvSpPr>
+          <p:cNvPr id="14" name="TextBox 13"/>
           <p:cNvSpPr txBox="1"/>
           <p:nvPr/>
         </p:nvSpPr>
         <p:spPr>
           <a:xfrm>
-            <a:off x="7751368" y="5231282"/>
-            <a:ext cx="292608" cy="384048"/>
+            <a:off x="7751368" y="4792370"/>
+            <a:ext cx="292608" cy="566928"/>
           </a:xfrm>
           <a:prstGeom prst="rect">
             <a:avLst/>
@@ -4815,7 +4965,11 @@
           </a:bodyPr>
           <a:lstStyle/>
           <a:p>
-            <a:pPr algn="ctr"/>
+            <a:pPr algn="ctr">
+              <a:spcBef>
+                <a:spcPts val="1000"/>
+              </a:spcBef>
+            </a:pPr>
             <a:r>
               <a:rPr sz="1400" b="1" i="0">
                 <a:solidFill>
@@ -4830,14 +4984,14 @@
       </p:sp>
       <p:sp>
         <p:nvSpPr>
-          <p:cNvPr id="13" name="Rectangle 12"/>
+          <p:cNvPr id="15" name="Rectangle 14"/>
           <p:cNvSpPr/>
           <p:nvPr/>
         </p:nvSpPr>
         <p:spPr>
           <a:xfrm>
-            <a:off x="8043976" y="5231282"/>
-            <a:ext cx="3310128" cy="384048"/>
+            <a:off x="8043976" y="4792370"/>
+            <a:ext cx="3310128" cy="566928"/>
           </a:xfrm>
           <a:prstGeom prst="rect">
             <a:avLst/>
@@ -4874,14 +5028,71 @@
       </p:sp>
       <p:sp>
         <p:nvSpPr>
-          <p:cNvPr id="14" name="TextBox 13"/>
+          <p:cNvPr id="16" name="Oval 15"/>
+          <p:cNvSpPr/>
+          <p:nvPr/>
+        </p:nvSpPr>
+        <p:spPr>
+          <a:xfrm>
+            <a:off x="8107984" y="4856378"/>
+            <a:ext cx="182880" cy="182880"/>
+          </a:xfrm>
+          <a:prstGeom prst="ellipse">
+            <a:avLst/>
+          </a:prstGeom>
+          <a:solidFill>
+            <a:srgbClr val="284F88"/>
+          </a:solidFill>
+          <a:ln>
+            <a:noFill/>
+          </a:ln>
+          <a:effectLst/>
+        </p:spPr>
+        <p:style>
+          <a:lnRef idx="1">
+            <a:schemeClr val="accent1"/>
+          </a:lnRef>
+          <a:fillRef idx="3">
+            <a:schemeClr val="accent1"/>
+          </a:fillRef>
+          <a:effectRef idx="2">
+            <a:schemeClr val="accent1"/>
+          </a:effectRef>
+          <a:fontRef idx="minor">
+            <a:schemeClr val="lt1"/>
+          </a:fontRef>
+        </p:style>
+        <p:txBody>
+          <a:bodyPr rtlCol="0" anchor="ctr" wrap="none"/>
+          <a:lstStyle/>
+          <a:p>
+            <a:pPr algn="ctr">
+              <a:spcBef>
+                <a:spcPts val="100"/>
+              </a:spcBef>
+            </a:pPr>
+            <a:r>
+              <a:rPr sz="1200" b="1" i="0">
+                <a:solidFill>
+                  <a:srgbClr val="4A9EFF"/>
+                </a:solidFill>
+                <a:latin typeface="Meiryo UI"/>
+              </a:rPr>
+              <a:t>③</a:t>
+            </a:r>
+          </a:p>
+        </p:txBody>
+      </p:sp>
+      <p:sp>
+        <p:nvSpPr>
+          <p:cNvPr id="17" name="TextBox 16"/>
           <p:cNvSpPr txBox="1"/>
           <p:nvPr/>
         </p:nvSpPr>
         <p:spPr>
           <a:xfrm>
-            <a:off x="8098840" y="5231282"/>
-            <a:ext cx="3200400" cy="384048"/>
+            <a:off x="8117128" y="5066690"/>
+            <a:ext cx="3163824" cy="256032"/>
           </a:xfrm>
           <a:prstGeom prst="rect">
             <a:avLst/>
@@ -4897,7 +5108,7 @@
           <a:p>
             <a:pPr algn="ctr"/>
             <a:r>
-              <a:rPr sz="1300" b="1" i="0">
+              <a:rPr sz="1200" b="1" i="0">
                 <a:solidFill>
                   <a:srgbClr val="FFFFFF"/>
                 </a:solidFill>
@@ -4906,18 +5117,34 @@
               <a:t>介入ポイントが見えない</a:t>
             </a:r>
           </a:p>
-        </p:txBody>
-      </p:sp>
-      <p:sp>
-        <p:nvSpPr>
-          <p:cNvPr id="15" name="TextBox 14"/>
+          <a:p>
+            <a:pPr algn="ctr">
+              <a:spcBef>
+                <a:spcPts val="200"/>
+              </a:spcBef>
+            </a:pPr>
+            <a:r>
+              <a:rPr sz="1200" b="0" i="0">
+                <a:solidFill>
+                  <a:srgbClr val="BBC2D0"/>
+                </a:solidFill>
+                <a:latin typeface="Meiryo UI"/>
+              </a:rPr>
+              <a:t>データ基盤なく原因特定不可</a:t>
+            </a:r>
+          </a:p>
+        </p:txBody>
+      </p:sp>
+      <p:sp>
+        <p:nvSpPr>
+          <p:cNvPr id="18" name="TextBox 17"/>
           <p:cNvSpPr txBox="1"/>
           <p:nvPr/>
         </p:nvSpPr>
         <p:spPr>
           <a:xfrm>
-            <a:off x="5959144" y="5615330"/>
-            <a:ext cx="274320" cy="256032"/>
+            <a:off x="5547664" y="5359298"/>
+            <a:ext cx="1097280" cy="329184"/>
           </a:xfrm>
           <a:prstGeom prst="rect">
             <a:avLst/>
@@ -4933,7 +5160,7 @@
           <a:p>
             <a:pPr algn="ctr"/>
             <a:r>
-              <a:rPr sz="1400" b="1" i="0">
+              <a:rPr sz="2000" b="1" i="0">
                 <a:solidFill>
                   <a:srgbClr val="0066CD"/>
                 </a:solidFill>
@@ -4942,18 +5169,30 @@
               <a:t>↓</a:t>
             </a:r>
           </a:p>
-        </p:txBody>
-      </p:sp>
-      <p:sp>
-        <p:nvSpPr>
-          <p:cNvPr id="16" name="Rectangle 15"/>
+          <a:p>
+            <a:pPr algn="ctr"/>
+            <a:r>
+              <a:rPr sz="1200" b="0" i="0">
+                <a:solidFill>
+                  <a:srgbClr val="4A9EFF"/>
+                </a:solidFill>
+                <a:latin typeface="Meiryo UI"/>
+              </a:rPr>
+              <a:t>3つの課題が収束</a:t>
+            </a:r>
+          </a:p>
+        </p:txBody>
+      </p:sp>
+      <p:sp>
+        <p:nvSpPr>
+          <p:cNvPr id="19" name="Rectangle 18"/>
           <p:cNvSpPr/>
           <p:nvPr/>
         </p:nvSpPr>
         <p:spPr>
           <a:xfrm>
-            <a:off x="838504" y="5871362"/>
-            <a:ext cx="10515600" cy="411480"/>
+            <a:off x="838504" y="5688482"/>
+            <a:ext cx="10515600" cy="594360"/>
           </a:xfrm>
           <a:prstGeom prst="rect">
             <a:avLst/>
@@ -4961,8 +5200,10 @@
           <a:solidFill>
             <a:srgbClr val="1D3461"/>
           </a:solidFill>
-          <a:ln>
-            <a:noFill/>
+          <a:ln w="25400">
+            <a:solidFill>
+              <a:srgbClr val="4A9EFF"/>
+            </a:solidFill>
           </a:ln>
           <a:effectLst/>
         </p:spPr>
@@ -4990,14 +5231,14 @@
       </p:sp>
       <p:sp>
         <p:nvSpPr>
-          <p:cNvPr id="17" name="TextBox 16"/>
+          <p:cNvPr id="20" name="TextBox 19"/>
           <p:cNvSpPr txBox="1"/>
           <p:nvPr/>
         </p:nvSpPr>
         <p:spPr>
           <a:xfrm>
-            <a:off x="1021384" y="5871362"/>
-            <a:ext cx="10149840" cy="411480"/>
+            <a:off x="1003096" y="5743346"/>
+            <a:ext cx="10186416" cy="521208"/>
           </a:xfrm>
           <a:prstGeom prst="rect">
             <a:avLst/>
@@ -5013,38 +5254,52 @@
           <a:p>
             <a:pPr algn="ctr"/>
             <a:r>
-              <a:rPr sz="1400" b="0" i="0">
+              <a:rPr sz="1200" b="1" i="0">
+                <a:solidFill>
+                  <a:srgbClr val="4A9EFF"/>
+                </a:solidFill>
+                <a:latin typeface="Meiryo UI"/>
+              </a:rPr>
+              <a:t>▶  帰着点</a:t>
+            </a:r>
+          </a:p>
+          <a:p>
+            <a:pPr algn="ctr">
+              <a:spcBef>
+                <a:spcPts val="300"/>
+              </a:spcBef>
+            </a:pPr>
+            <a:r>
+              <a:rPr sz="1600" b="1" i="0">
                 <a:solidFill>
                   <a:srgbClr val="FFFFFF"/>
                 </a:solidFill>
                 <a:latin typeface="Meiryo UI"/>
               </a:rPr>
-              <a:t>帰着点：</a:t>
-            </a:r>
-            <a:r>
-              <a:rPr sz="1400" b="1" i="0">
-                <a:solidFill>
-                  <a:srgbClr val="FFFFFF"/>
-                </a:solidFill>
-                <a:latin typeface="Meiryo UI"/>
-              </a:rPr>
               <a:t>「営業の型が可視化されていないこと」</a:t>
             </a:r>
-            <a:r>
-              <a:rPr sz="1400" b="0" i="0">
-                <a:solidFill>
-                  <a:srgbClr val="FFFFFF"/>
-                </a:solidFill>
-                <a:latin typeface="Meiryo UI"/>
-              </a:rPr>
-              <a:t>　採用数に比例して売上が伸びる組織構造が実現できていない</a:t>
+          </a:p>
+          <a:p>
+            <a:pPr algn="ctr">
+              <a:spcBef>
+                <a:spcPts val="200"/>
+              </a:spcBef>
+            </a:pPr>
+            <a:r>
+              <a:rPr sz="1200" b="0" i="0">
+                <a:solidFill>
+                  <a:srgbClr val="BBC2D0"/>
+                </a:solidFill>
+                <a:latin typeface="Meiryo UI"/>
+              </a:rPr>
+              <a:t>採用数に比例して売上が伸びる組織構造が実現できていない</a:t>
             </a:r>
           </a:p>
         </p:txBody>
       </p:sp>
       <p:pic>
         <p:nvPicPr>
-          <p:cNvPr id="18" name="Picture 17" descr="logo.png"/>
+          <p:cNvPr id="21" name="Picture 20" descr="logo.png"/>
           <p:cNvPicPr>
             <a:picLocks noChangeAspect="1"/>
           </p:cNvPicPr>
@@ -5068,7 +5323,7 @@
       </p:pic>
       <p:sp>
         <p:nvSpPr>
-          <p:cNvPr id="19" name="Rectangle 18"/>
+          <p:cNvPr id="22" name="Rectangle 21"/>
           <p:cNvSpPr/>
           <p:nvPr/>
         </p:nvSpPr>
@@ -5112,7 +5367,7 @@
       </p:sp>
       <p:sp>
         <p:nvSpPr>
-          <p:cNvPr id="20" name="TextBox 19"/>
+          <p:cNvPr id="23" name="TextBox 22"/>
           <p:cNvSpPr txBox="1"/>
           <p:nvPr/>
         </p:nvSpPr>
@@ -5146,7 +5401,7 @@
       </p:sp>
       <p:sp>
         <p:nvSpPr>
-          <p:cNvPr id="21" name="TextBox 20"/>
+          <p:cNvPr id="24" name="TextBox 23"/>
           <p:cNvSpPr txBox="1"/>
           <p:nvPr/>
         </p:nvSpPr>

--- a/slides_p10_p12.pptx
+++ b/slides_p10_p12.pptx
@@ -5617,12 +5617,13 @@
         <p:spPr>
           <a:xfrm>
             <a:off x="838504" y="1280160"/>
-            <a:ext cx="5097780" cy="320040"/>
+            <a:ext cx="4994910" cy="246888"/>
           </a:xfrm>
           <a:prstGeom prst="rect">
             <a:avLst/>
           </a:prstGeom>
           <a:noFill/>
+          <a:effectLst/>
         </p:spPr>
         <p:txBody>
           <a:bodyPr wrap="none">
@@ -5631,9 +5632,9 @@
           <a:lstStyle/>
           <a:p>
             <a:r>
-              <a:rPr sz="1400" b="1" i="0">
-                <a:solidFill>
-                  <a:srgbClr val="1D3461"/>
+              <a:rPr sz="1200" b="1" i="0">
+                <a:solidFill>
+                  <a:srgbClr val="8B2020"/>
                 </a:solidFill>
                 <a:latin typeface="Meiryo UI"/>
               </a:rPr>
@@ -5650,13 +5651,14 @@
         </p:nvSpPr>
         <p:spPr>
           <a:xfrm>
-            <a:off x="6256324" y="1280160"/>
-            <a:ext cx="5097780" cy="320040"/>
+            <a:off x="6359194" y="1280160"/>
+            <a:ext cx="4994910" cy="246888"/>
           </a:xfrm>
           <a:prstGeom prst="rect">
             <a:avLst/>
           </a:prstGeom>
           <a:noFill/>
+          <a:effectLst/>
         </p:spPr>
         <p:txBody>
           <a:bodyPr wrap="none">
@@ -5665,7 +5667,7 @@
           <a:lstStyle/>
           <a:p>
             <a:r>
-              <a:rPr sz="1400" b="1" i="0">
+              <a:rPr sz="1200" b="1" i="0">
                 <a:solidFill>
                   <a:srgbClr val="1D3461"/>
                 </a:solidFill>
@@ -5684,14 +5686,14 @@
         </p:nvSpPr>
         <p:spPr>
           <a:xfrm>
-            <a:off x="6089954" y="1280160"/>
-            <a:ext cx="12700" cy="4408322"/>
+            <a:off x="838504" y="1527048"/>
+            <a:ext cx="4994910" cy="1332280"/>
           </a:xfrm>
           <a:prstGeom prst="rect">
             <a:avLst/>
           </a:prstGeom>
           <a:solidFill>
-            <a:srgbClr val="CCCCCC"/>
+            <a:srgbClr val="F9F5F5"/>
           </a:solidFill>
           <a:ln>
             <a:noFill/>
@@ -5722,19 +5724,156 @@
       </p:sp>
       <p:sp>
         <p:nvSpPr>
-          <p:cNvPr id="9" name="TextBox 8"/>
+          <p:cNvPr id="9" name="Rectangle 8"/>
+          <p:cNvSpPr/>
+          <p:nvPr/>
+        </p:nvSpPr>
+        <p:spPr>
+          <a:xfrm>
+            <a:off x="838504" y="1527048"/>
+            <a:ext cx="38100" cy="1332280"/>
+          </a:xfrm>
+          <a:prstGeom prst="rect">
+            <a:avLst/>
+          </a:prstGeom>
+          <a:solidFill>
+            <a:srgbClr val="C0392B"/>
+          </a:solidFill>
+          <a:ln>
+            <a:noFill/>
+          </a:ln>
+          <a:effectLst/>
+        </p:spPr>
+        <p:style>
+          <a:lnRef idx="1">
+            <a:schemeClr val="accent1"/>
+          </a:lnRef>
+          <a:fillRef idx="3">
+            <a:schemeClr val="accent1"/>
+          </a:fillRef>
+          <a:effectRef idx="2">
+            <a:schemeClr val="accent1"/>
+          </a:effectRef>
+          <a:fontRef idx="minor">
+            <a:schemeClr val="lt1"/>
+          </a:fontRef>
+        </p:style>
+        <p:txBody>
+          <a:bodyPr rtlCol="0" anchor="ctr"/>
+          <a:lstStyle/>
+          <a:p>
+            <a:pPr algn="ctr"/>
+          </a:p>
+        </p:txBody>
+      </p:sp>
+      <p:sp>
+        <p:nvSpPr>
+          <p:cNvPr id="10" name="Oval 9"/>
+          <p:cNvSpPr/>
+          <p:nvPr/>
+        </p:nvSpPr>
+        <p:spPr>
+          <a:xfrm>
+            <a:off x="940612" y="1591056"/>
+            <a:ext cx="182880" cy="182880"/>
+          </a:xfrm>
+          <a:prstGeom prst="ellipse">
+            <a:avLst/>
+          </a:prstGeom>
+          <a:solidFill>
+            <a:srgbClr val="E5B4B0"/>
+          </a:solidFill>
+          <a:ln>
+            <a:noFill/>
+          </a:ln>
+          <a:effectLst/>
+        </p:spPr>
+        <p:style>
+          <a:lnRef idx="1">
+            <a:schemeClr val="accent1"/>
+          </a:lnRef>
+          <a:fillRef idx="3">
+            <a:schemeClr val="accent1"/>
+          </a:fillRef>
+          <a:effectRef idx="2">
+            <a:schemeClr val="accent1"/>
+          </a:effectRef>
+          <a:fontRef idx="minor">
+            <a:schemeClr val="lt1"/>
+          </a:fontRef>
+        </p:style>
+        <p:txBody>
+          <a:bodyPr rtlCol="0" anchor="ctr"/>
+          <a:lstStyle/>
+          <a:p>
+            <a:pPr algn="ctr">
+              <a:spcBef>
+                <a:spcPts val="100"/>
+              </a:spcBef>
+            </a:pPr>
+            <a:r>
+              <a:rPr sz="1200" b="1" i="0">
+                <a:solidFill>
+                  <a:srgbClr val="C0392B"/>
+                </a:solidFill>
+                <a:latin typeface="Meiryo UI"/>
+              </a:rPr>
+              <a:t>①</a:t>
+            </a:r>
+          </a:p>
+        </p:txBody>
+      </p:sp>
+      <p:sp>
+        <p:nvSpPr>
+          <p:cNvPr id="11" name="TextBox 10"/>
           <p:cNvSpPr txBox="1"/>
           <p:nvPr/>
         </p:nvSpPr>
         <p:spPr>
           <a:xfrm>
-            <a:off x="838504" y="1627632"/>
-            <a:ext cx="5097780" cy="4060850"/>
+            <a:off x="1160068" y="1591056"/>
+            <a:ext cx="4609338" cy="182880"/>
           </a:xfrm>
           <a:prstGeom prst="rect">
             <a:avLst/>
           </a:prstGeom>
           <a:noFill/>
+          <a:effectLst/>
+        </p:spPr>
+        <p:txBody>
+          <a:bodyPr wrap="none">
+            <a:spAutoFit/>
+          </a:bodyPr>
+          <a:lstStyle/>
+          <a:p>
+            <a:r>
+              <a:rPr sz="1200" b="1" i="0">
+                <a:solidFill>
+                  <a:srgbClr val="8B2020"/>
+                </a:solidFill>
+                <a:latin typeface="Meiryo UI"/>
+              </a:rPr>
+              <a:t>受注率のバラつき</a:t>
+            </a:r>
+          </a:p>
+        </p:txBody>
+      </p:sp>
+      <p:sp>
+        <p:nvSpPr>
+          <p:cNvPr id="12" name="TextBox 11"/>
+          <p:cNvSpPr txBox="1"/>
+          <p:nvPr/>
+        </p:nvSpPr>
+        <p:spPr>
+          <a:xfrm>
+            <a:off x="940612" y="1810512"/>
+            <a:ext cx="4828794" cy="1012240"/>
+          </a:xfrm>
+          <a:prstGeom prst="rect">
+            <a:avLst/>
+          </a:prstGeom>
+          <a:noFill/>
+          <a:effectLst/>
         </p:spPr>
         <p:txBody>
           <a:bodyPr wrap="square">
@@ -5742,712 +5881,146 @@
           </a:bodyPr>
           <a:lstStyle/>
           <a:p>
+            <a:r>
+              <a:rPr sz="1200" b="0" i="0">
+                <a:solidFill>
+                  <a:srgbClr val="C0392B"/>
+                </a:solidFill>
+                <a:latin typeface="Meiryo UI"/>
+              </a:rPr>
+              <a:t>– </a:t>
+            </a:r>
+            <a:r>
+              <a:rPr sz="1200" b="0" i="0">
+                <a:solidFill>
+                  <a:srgbClr val="555555"/>
+                </a:solidFill>
+                <a:latin typeface="Meiryo UI"/>
+              </a:rPr>
+              <a:t>「課題パターン×組み合わせ提案」の型がなく個人依存</a:t>
+            </a:r>
+          </a:p>
+          <a:p>
             <a:pPr>
               <a:spcBef>
-                <a:spcPts val="600"/>
+                <a:spcPts val="200"/>
               </a:spcBef>
-              <a:spcAft>
-                <a:spcPts val="200"/>
-              </a:spcAft>
             </a:pPr>
             <a:r>
-              <a:rPr sz="1600" b="1" i="0">
-                <a:solidFill>
-                  <a:srgbClr val="0066CD"/>
-                </a:solidFill>
-                <a:latin typeface="Meiryo UI"/>
-              </a:rPr>
-              <a:t>1. </a:t>
-            </a:r>
-            <a:r>
-              <a:rPr sz="1600" b="1" i="0">
-                <a:solidFill>
-                  <a:srgbClr val="1A1A1A"/>
-                </a:solidFill>
-                <a:latin typeface="Meiryo UI"/>
-              </a:rPr>
-              <a:t>受注率のバラつき</a:t>
-            </a:r>
-          </a:p>
-          <a:p>
-            <a:pPr>
-              <a:spcBef>
-                <a:spcPts val="300"/>
-              </a:spcBef>
-              <a:spcAft>
-                <a:spcPts val="100"/>
-              </a:spcAft>
-            </a:pPr>
-            <a:r>
-              <a:rPr sz="1400" b="0" i="0">
-                <a:solidFill>
-                  <a:srgbClr val="888888"/>
-                </a:solidFill>
-                <a:latin typeface="Meiryo UI"/>
-              </a:rPr>
-              <a:t>      – </a:t>
-            </a:r>
-            <a:r>
-              <a:rPr sz="1400" b="0" i="0">
-                <a:solidFill>
-                  <a:srgbClr val="1A1A1A"/>
-                </a:solidFill>
-                <a:latin typeface="Meiryo UI"/>
-              </a:rPr>
-              <a:t>「課題パターン×組み合わせ提案」の型がなく個人の商品知識に依存</a:t>
-            </a:r>
-          </a:p>
-          <a:p>
-            <a:pPr>
-              <a:spcBef>
-                <a:spcPts val="300"/>
-              </a:spcBef>
-              <a:spcAft>
-                <a:spcPts val="100"/>
-              </a:spcAft>
-            </a:pPr>
-            <a:r>
-              <a:rPr sz="1400" b="0" i="0">
-                <a:solidFill>
-                  <a:srgbClr val="888888"/>
-                </a:solidFill>
-                <a:latin typeface="Meiryo UI"/>
-              </a:rPr>
-              <a:t>      – </a:t>
-            </a:r>
-            <a:r>
-              <a:rPr sz="1400" b="0" i="0">
-                <a:solidFill>
-                  <a:srgbClr val="1A1A1A"/>
-                </a:solidFill>
-                <a:latin typeface="Meiryo UI"/>
-              </a:rPr>
-              <a:t>ヒアリングが浅いまま提案に入り、機能売りに逃げる構造</a:t>
-            </a:r>
-          </a:p>
-          <a:p>
-            <a:pPr>
-              <a:spcBef>
-                <a:spcPts val="300"/>
-              </a:spcBef>
-              <a:spcAft>
-                <a:spcPts val="100"/>
-              </a:spcAft>
-            </a:pPr>
-            <a:r>
-              <a:rPr sz="1400" b="0" i="0">
-                <a:solidFill>
-                  <a:srgbClr val="888888"/>
-                </a:solidFill>
-                <a:latin typeface="Meiryo UI"/>
-              </a:rPr>
-              <a:t>      – </a:t>
-            </a:r>
-            <a:r>
-              <a:rPr sz="1400" b="0" i="0">
-                <a:solidFill>
-                  <a:srgbClr val="1A1A1A"/>
-                </a:solidFill>
-                <a:latin typeface="Meiryo UI"/>
-              </a:rPr>
-              <a:t>競合との機能比較→価格勝負に陥るケースが増加</a:t>
-            </a:r>
-          </a:p>
-          <a:p>
-            <a:pPr>
-              <a:spcBef>
-                <a:spcPts val="600"/>
-              </a:spcBef>
-              <a:spcAft>
-                <a:spcPts val="200"/>
-              </a:spcAft>
-            </a:pPr>
-            <a:r>
-              <a:rPr sz="1600" b="1" i="0">
-                <a:solidFill>
-                  <a:srgbClr val="0066CD"/>
-                </a:solidFill>
-                <a:latin typeface="Meiryo UI"/>
-              </a:rPr>
-              <a:t>2. </a:t>
-            </a:r>
-            <a:r>
-              <a:rPr sz="1600" b="1" i="0">
-                <a:solidFill>
-                  <a:srgbClr val="1A1A1A"/>
-                </a:solidFill>
-                <a:latin typeface="Meiryo UI"/>
-              </a:rPr>
-              <a:t>中途がワークしない</a:t>
-            </a:r>
-          </a:p>
-          <a:p>
-            <a:pPr>
-              <a:spcBef>
-                <a:spcPts val="300"/>
-              </a:spcBef>
-              <a:spcAft>
-                <a:spcPts val="100"/>
-              </a:spcAft>
-            </a:pPr>
-            <a:r>
-              <a:rPr sz="1400" b="0" i="0">
-                <a:solidFill>
-                  <a:srgbClr val="888888"/>
-                </a:solidFill>
-                <a:latin typeface="Meiryo UI"/>
-              </a:rPr>
-              <a:t>      – </a:t>
-            </a:r>
-            <a:r>
-              <a:rPr sz="1400" b="0" i="0">
-                <a:solidFill>
-                  <a:srgbClr val="1A1A1A"/>
-                </a:solidFill>
-                <a:latin typeface="Meiryo UI"/>
-              </a:rPr>
-              <a:t>採用市場の構造変化×マネフォ固有の複雑さが重なる</a:t>
-            </a:r>
-          </a:p>
-          <a:p>
-            <a:pPr>
-              <a:spcBef>
-                <a:spcPts val="300"/>
-              </a:spcBef>
-              <a:spcAft>
-                <a:spcPts val="100"/>
-              </a:spcAft>
-            </a:pPr>
-            <a:r>
-              <a:rPr sz="1400" b="0" i="0">
-                <a:solidFill>
-                  <a:srgbClr val="888888"/>
-                </a:solidFill>
-                <a:latin typeface="Meiryo UI"/>
-              </a:rPr>
-              <a:t>      – </a:t>
-            </a:r>
-            <a:r>
-              <a:rPr sz="1400" b="0" i="0">
-                <a:solidFill>
-                  <a:srgbClr val="1A1A1A"/>
-                </a:solidFill>
-                <a:latin typeface="Meiryo UI"/>
-              </a:rPr>
-              <a:t>前職スキルが通用せず、得意な1-2商品に偏る</a:t>
-            </a:r>
-          </a:p>
-          <a:p>
-            <a:pPr>
-              <a:spcBef>
-                <a:spcPts val="300"/>
-              </a:spcBef>
-              <a:spcAft>
-                <a:spcPts val="100"/>
-              </a:spcAft>
-            </a:pPr>
-            <a:r>
-              <a:rPr sz="1400" b="0" i="0">
-                <a:solidFill>
-                  <a:srgbClr val="888888"/>
-                </a:solidFill>
-                <a:latin typeface="Meiryo UI"/>
-              </a:rPr>
-              <a:t>      – </a:t>
-            </a:r>
-            <a:r>
-              <a:rPr sz="1400" b="0" i="0">
-                <a:solidFill>
-                  <a:srgbClr val="1A1A1A"/>
-                </a:solidFill>
-                <a:latin typeface="Meiryo UI"/>
-              </a:rPr>
-              <a:t>採用数が増えても1人あたり売上が低下</a:t>
-            </a:r>
-          </a:p>
-          <a:p>
-            <a:pPr>
-              <a:spcBef>
-                <a:spcPts val="600"/>
-              </a:spcBef>
-              <a:spcAft>
-                <a:spcPts val="200"/>
-              </a:spcAft>
-            </a:pPr>
-            <a:r>
-              <a:rPr sz="1600" b="1" i="0">
-                <a:solidFill>
-                  <a:srgbClr val="0066CD"/>
-                </a:solidFill>
-                <a:latin typeface="Meiryo UI"/>
-              </a:rPr>
-              <a:t>3. </a:t>
-            </a:r>
-            <a:r>
-              <a:rPr sz="1600" b="1" i="0">
-                <a:solidFill>
-                  <a:srgbClr val="1A1A1A"/>
-                </a:solidFill>
-                <a:latin typeface="Meiryo UI"/>
-              </a:rPr>
-              <a:t>介入ポイントが見えない</a:t>
-            </a:r>
-          </a:p>
-          <a:p>
-            <a:pPr>
-              <a:spcBef>
-                <a:spcPts val="300"/>
-              </a:spcBef>
-              <a:spcAft>
-                <a:spcPts val="100"/>
-              </a:spcAft>
-            </a:pPr>
-            <a:r>
-              <a:rPr sz="1400" b="0" i="0">
-                <a:solidFill>
-                  <a:srgbClr val="888888"/>
-                </a:solidFill>
-                <a:latin typeface="Meiryo UI"/>
-              </a:rPr>
-              <a:t>      – </a:t>
-            </a:r>
-            <a:r>
-              <a:rPr sz="1400" b="0" i="0">
-                <a:solidFill>
-                  <a:srgbClr val="1A1A1A"/>
-                </a:solidFill>
-                <a:latin typeface="Meiryo UI"/>
-              </a:rPr>
-              <a:t>どのフェーズで受注率が落ちているか可視化できていない</a:t>
-            </a:r>
-          </a:p>
-          <a:p>
-            <a:pPr>
-              <a:spcBef>
-                <a:spcPts val="300"/>
-              </a:spcBef>
-              <a:spcAft>
-                <a:spcPts val="100"/>
-              </a:spcAft>
-            </a:pPr>
-            <a:r>
-              <a:rPr sz="1400" b="0" i="0">
-                <a:solidFill>
-                  <a:srgbClr val="888888"/>
-                </a:solidFill>
-                <a:latin typeface="Meiryo UI"/>
-              </a:rPr>
-              <a:t>      – </a:t>
-            </a:r>
-            <a:r>
-              <a:rPr sz="1400" b="0" i="0">
-                <a:solidFill>
-                  <a:srgbClr val="1A1A1A"/>
-                </a:solidFill>
-                <a:latin typeface="Meiryo UI"/>
-              </a:rPr>
-              <a:t>Excel集計＝ドリルダウン不可＝PDCAの回転が遅い</a:t>
-            </a:r>
-          </a:p>
-          <a:p>
-            <a:pPr>
-              <a:spcBef>
-                <a:spcPts val="300"/>
-              </a:spcBef>
-              <a:spcAft>
-                <a:spcPts val="100"/>
-              </a:spcAft>
-            </a:pPr>
-            <a:r>
-              <a:rPr sz="1400" b="0" i="0">
-                <a:solidFill>
-                  <a:srgbClr val="888888"/>
-                </a:solidFill>
-                <a:latin typeface="Meiryo UI"/>
-              </a:rPr>
-              <a:t>      – </a:t>
-            </a:r>
-            <a:r>
-              <a:rPr sz="1400" b="0" i="0">
-                <a:solidFill>
-                  <a:srgbClr val="1A1A1A"/>
-                </a:solidFill>
-                <a:latin typeface="Meiryo UI"/>
-              </a:rPr>
-              <a:t>営業企画として打ち手の判断材料がない</a:t>
-            </a:r>
-          </a:p>
-        </p:txBody>
-      </p:sp>
-      <p:sp>
-        <p:nvSpPr>
-          <p:cNvPr id="10" name="TextBox 9"/>
+              <a:rPr sz="1200" b="0" i="0">
+                <a:solidFill>
+                  <a:srgbClr val="C0392B"/>
+                </a:solidFill>
+                <a:latin typeface="Meiryo UI"/>
+              </a:rPr>
+              <a:t>– </a:t>
+            </a:r>
+            <a:r>
+              <a:rPr sz="1200" b="0" i="0">
+                <a:solidFill>
+                  <a:srgbClr val="555555"/>
+                </a:solidFill>
+                <a:latin typeface="Meiryo UI"/>
+              </a:rPr>
+              <a:t>機能売り→競合比較→価格勝負に陥る構造</a:t>
+            </a:r>
+          </a:p>
+        </p:txBody>
+      </p:sp>
+      <p:sp>
+        <p:nvSpPr>
+          <p:cNvPr id="13" name="TextBox 12"/>
           <p:cNvSpPr txBox="1"/>
           <p:nvPr/>
         </p:nvSpPr>
         <p:spPr>
           <a:xfrm>
-            <a:off x="6256324" y="1627632"/>
-            <a:ext cx="5097780" cy="4060850"/>
+            <a:off x="5833414" y="1527048"/>
+            <a:ext cx="525780" cy="1332280"/>
           </a:xfrm>
           <a:prstGeom prst="rect">
             <a:avLst/>
           </a:prstGeom>
           <a:noFill/>
-        </p:spPr>
-        <p:txBody>
-          <a:bodyPr wrap="square">
+          <a:effectLst/>
+        </p:spPr>
+        <p:txBody>
+          <a:bodyPr wrap="none">
             <a:spAutoFit/>
           </a:bodyPr>
           <a:lstStyle/>
           <a:p>
-            <a:pPr>
+            <a:pPr algn="ctr">
               <a:spcBef>
-                <a:spcPts val="600"/>
+                <a:spcPts val="3147"/>
               </a:spcBef>
-              <a:spcAft>
-                <a:spcPts val="200"/>
-              </a:spcAft>
             </a:pPr>
             <a:r>
               <a:rPr sz="1600" b="1" i="0">
                 <a:solidFill>
-                  <a:srgbClr val="0066CD"/>
-                </a:solidFill>
-                <a:latin typeface="Meiryo UI"/>
-              </a:rPr>
-              <a:t>1. </a:t>
-            </a:r>
-            <a:r>
-              <a:rPr sz="1600" b="1" i="0">
-                <a:solidFill>
-                  <a:srgbClr val="1A1A1A"/>
-                </a:solidFill>
-                <a:latin typeface="Meiryo UI"/>
-              </a:rPr>
-              <a:t>SEP：会計特化の営業の型を設計</a:t>
-            </a:r>
-          </a:p>
-          <a:p>
-            <a:pPr>
-              <a:spcBef>
-                <a:spcPts val="300"/>
-              </a:spcBef>
-              <a:spcAft>
-                <a:spcPts val="100"/>
-              </a:spcAft>
-            </a:pPr>
-            <a:r>
-              <a:rPr sz="1400" b="0" i="0">
-                <a:solidFill>
-                  <a:srgbClr val="888888"/>
-                </a:solidFill>
-                <a:latin typeface="Meiryo UI"/>
-              </a:rPr>
-              <a:t>      – </a:t>
-            </a:r>
-            <a:r>
-              <a:rPr sz="1400" b="0" i="0">
-                <a:solidFill>
-                  <a:srgbClr val="1A1A1A"/>
-                </a:solidFill>
-                <a:latin typeface="Meiryo UI"/>
-              </a:rPr>
-              <a:t>カスタマーパス設計：意思決定プロセスに沿ったヒアリングの型を実装</a:t>
-            </a:r>
-          </a:p>
-          <a:p>
-            <a:pPr>
-              <a:spcBef>
-                <a:spcPts val="300"/>
-              </a:spcBef>
-              <a:spcAft>
-                <a:spcPts val="100"/>
-              </a:spcAft>
-            </a:pPr>
-            <a:r>
-              <a:rPr sz="1400" b="0" i="0">
-                <a:solidFill>
-                  <a:srgbClr val="888888"/>
-                </a:solidFill>
-                <a:latin typeface="Meiryo UI"/>
-              </a:rPr>
-              <a:t>      – </a:t>
-            </a:r>
-            <a:r>
-              <a:rPr sz="1400" b="0" i="0">
-                <a:solidFill>
-                  <a:srgbClr val="1A1A1A"/>
-                </a:solidFill>
-                <a:latin typeface="Meiryo UI"/>
-              </a:rPr>
-              <a:t>ニーズマップ：課題パターン×プロダクト組み合わせを体系化</a:t>
-            </a:r>
-          </a:p>
-          <a:p>
-            <a:pPr>
-              <a:spcBef>
-                <a:spcPts val="300"/>
-              </a:spcBef>
-              <a:spcAft>
-                <a:spcPts val="100"/>
-              </a:spcAft>
-            </a:pPr>
-            <a:r>
-              <a:rPr sz="1400" b="0" i="0">
-                <a:solidFill>
-                  <a:srgbClr val="888888"/>
-                </a:solidFill>
-                <a:latin typeface="Meiryo UI"/>
-              </a:rPr>
-              <a:t>      – </a:t>
-            </a:r>
-            <a:r>
-              <a:rPr sz="1400" b="0" i="0">
-                <a:solidFill>
-                  <a:srgbClr val="1A1A1A"/>
-                </a:solidFill>
-                <a:latin typeface="Meiryo UI"/>
-              </a:rPr>
-              <a:t>中途でも型に沿えば最適提案が可能に</a:t>
-            </a:r>
-          </a:p>
-          <a:p>
-            <a:pPr>
-              <a:spcBef>
-                <a:spcPts val="600"/>
-              </a:spcBef>
-              <a:spcAft>
-                <a:spcPts val="200"/>
-              </a:spcAft>
-            </a:pPr>
-            <a:r>
-              <a:rPr sz="1600" b="1" i="0">
-                <a:solidFill>
-                  <a:srgbClr val="0066CD"/>
-                </a:solidFill>
-                <a:latin typeface="Meiryo UI"/>
-              </a:rPr>
-              <a:t>2. </a:t>
-            </a:r>
-            <a:r>
-              <a:rPr sz="1600" b="1" i="0">
-                <a:solidFill>
-                  <a:srgbClr val="1A1A1A"/>
-                </a:solidFill>
-                <a:latin typeface="Meiryo UI"/>
-              </a:rPr>
-              <a:t>VISUALIZE：介入ポイントを可視化</a:t>
-            </a:r>
-          </a:p>
-          <a:p>
-            <a:pPr>
-              <a:spcBef>
-                <a:spcPts val="300"/>
-              </a:spcBef>
-              <a:spcAft>
-                <a:spcPts val="100"/>
-              </a:spcAft>
-            </a:pPr>
-            <a:r>
-              <a:rPr sz="1400" b="0" i="0">
-                <a:solidFill>
-                  <a:srgbClr val="888888"/>
-                </a:solidFill>
-                <a:latin typeface="Meiryo UI"/>
-              </a:rPr>
-              <a:t>      – </a:t>
-            </a:r>
-            <a:r>
-              <a:rPr sz="1400" b="0" i="0">
-                <a:solidFill>
-                  <a:srgbClr val="1A1A1A"/>
-                </a:solidFill>
-                <a:latin typeface="Meiryo UI"/>
-              </a:rPr>
-              <a:t>受注率×フェーズ移行率をリアルタイム可視化</a:t>
-            </a:r>
-          </a:p>
-          <a:p>
-            <a:pPr>
-              <a:spcBef>
-                <a:spcPts val="300"/>
-              </a:spcBef>
-              <a:spcAft>
-                <a:spcPts val="100"/>
-              </a:spcAft>
-            </a:pPr>
-            <a:r>
-              <a:rPr sz="1400" b="0" i="0">
-                <a:solidFill>
-                  <a:srgbClr val="888888"/>
-                </a:solidFill>
-                <a:latin typeface="Meiryo UI"/>
-              </a:rPr>
-              <a:t>      – </a:t>
-            </a:r>
-            <a:r>
-              <a:rPr sz="1400" b="0" i="0">
-                <a:solidFill>
-                  <a:srgbClr val="1A1A1A"/>
-                </a:solidFill>
-                <a:latin typeface="Meiryo UI"/>
-              </a:rPr>
-              <a:t>リードソース×担当者別のドリルダウン分析</a:t>
-            </a:r>
-          </a:p>
-          <a:p>
-            <a:pPr>
-              <a:spcBef>
-                <a:spcPts val="300"/>
-              </a:spcBef>
-              <a:spcAft>
-                <a:spcPts val="100"/>
-              </a:spcAft>
-            </a:pPr>
-            <a:r>
-              <a:rPr sz="1400" b="0" i="0">
-                <a:solidFill>
-                  <a:srgbClr val="888888"/>
-                </a:solidFill>
-                <a:latin typeface="Meiryo UI"/>
-              </a:rPr>
-              <a:t>      – </a:t>
-            </a:r>
-            <a:r>
-              <a:rPr sz="1400" b="0" i="0">
-                <a:solidFill>
-                  <a:srgbClr val="1A1A1A"/>
-                </a:solidFill>
-                <a:latin typeface="Meiryo UI"/>
-              </a:rPr>
-              <a:t>Excel撤廃→営業企画がデータで即時介入</a:t>
-            </a:r>
-          </a:p>
-          <a:p>
-            <a:pPr>
-              <a:spcBef>
-                <a:spcPts val="600"/>
-              </a:spcBef>
-              <a:spcAft>
-                <a:spcPts val="200"/>
-              </a:spcAft>
-            </a:pPr>
-            <a:r>
-              <a:rPr sz="1600" b="1" i="0">
-                <a:solidFill>
-                  <a:srgbClr val="0066CD"/>
-                </a:solidFill>
-                <a:latin typeface="Meiryo UI"/>
-              </a:rPr>
-              <a:t>3. </a:t>
-            </a:r>
-            <a:r>
-              <a:rPr sz="1600" b="1" i="0">
-                <a:solidFill>
-                  <a:srgbClr val="1A1A1A"/>
-                </a:solidFill>
-                <a:latin typeface="Meiryo UI"/>
-              </a:rPr>
-              <a:t>Buddy伴走：戦略と実行の断絶を埋める</a:t>
-            </a:r>
-          </a:p>
-          <a:p>
-            <a:pPr>
-              <a:spcBef>
-                <a:spcPts val="300"/>
-              </a:spcBef>
-              <a:spcAft>
-                <a:spcPts val="100"/>
-              </a:spcAft>
-            </a:pPr>
-            <a:r>
-              <a:rPr sz="1400" b="0" i="0">
-                <a:solidFill>
-                  <a:srgbClr val="888888"/>
-                </a:solidFill>
-                <a:latin typeface="Meiryo UI"/>
-              </a:rPr>
-              <a:t>      – </a:t>
-            </a:r>
-            <a:r>
-              <a:rPr sz="1400" b="0" i="0">
-                <a:solidFill>
-                  <a:srgbClr val="1A1A1A"/>
-                </a:solidFill>
-                <a:latin typeface="Meiryo UI"/>
-              </a:rPr>
-              <a:t>朝会夕会の運用設計×専任Buddy伴走で行動変容を支援</a:t>
-            </a:r>
-          </a:p>
-          <a:p>
-            <a:pPr>
-              <a:spcBef>
-                <a:spcPts val="300"/>
-              </a:spcBef>
-              <a:spcAft>
-                <a:spcPts val="100"/>
-              </a:spcAft>
-            </a:pPr>
-            <a:r>
-              <a:rPr sz="1400" b="0" i="0">
-                <a:solidFill>
-                  <a:srgbClr val="888888"/>
-                </a:solidFill>
-                <a:latin typeface="Meiryo UI"/>
-              </a:rPr>
-              <a:t>      – </a:t>
-            </a:r>
-            <a:r>
-              <a:rPr sz="1400" b="0" i="0">
-                <a:solidFill>
-                  <a:srgbClr val="1A1A1A"/>
-                </a:solidFill>
-                <a:latin typeface="Meiryo UI"/>
-              </a:rPr>
-              <a:t>型を知る→実行できる→文化になるまで定着支援</a:t>
-            </a:r>
-          </a:p>
-          <a:p>
-            <a:pPr>
-              <a:spcBef>
-                <a:spcPts val="300"/>
-              </a:spcBef>
-              <a:spcAft>
-                <a:spcPts val="100"/>
-              </a:spcAft>
-            </a:pPr>
-            <a:r>
-              <a:rPr sz="1400" b="0" i="0">
-                <a:solidFill>
-                  <a:srgbClr val="888888"/>
-                </a:solidFill>
-                <a:latin typeface="Meiryo UI"/>
-              </a:rPr>
-              <a:t>      – </a:t>
-            </a:r>
-            <a:r>
-              <a:rPr sz="1400" b="0" i="0">
-                <a:solidFill>
-                  <a:srgbClr val="1A1A1A"/>
-                </a:solidFill>
-                <a:latin typeface="Meiryo UI"/>
-              </a:rPr>
-              <a:t>FY28へ向け採用数比例の成長組織を構築</a:t>
-            </a:r>
-          </a:p>
-        </p:txBody>
-      </p:sp>
-      <p:sp>
-        <p:nvSpPr>
-          <p:cNvPr id="11" name="Rectangle 10"/>
+                  <a:srgbClr val="4A9EFF"/>
+                </a:solidFill>
+                <a:latin typeface="Meiryo UI"/>
+              </a:rPr>
+              <a:t>→</a:t>
+            </a:r>
+          </a:p>
+        </p:txBody>
+      </p:sp>
+      <p:sp>
+        <p:nvSpPr>
+          <p:cNvPr id="14" name="Rectangle 13"/>
           <p:cNvSpPr/>
           <p:nvPr/>
         </p:nvSpPr>
         <p:spPr>
           <a:xfrm>
-            <a:off x="838504" y="5779922"/>
-            <a:ext cx="10515600" cy="502920"/>
+            <a:off x="6359194" y="1527048"/>
+            <a:ext cx="4994910" cy="1332280"/>
+          </a:xfrm>
+          <a:prstGeom prst="rect">
+            <a:avLst/>
+          </a:prstGeom>
+          <a:solidFill>
+            <a:srgbClr val="FFFFFF"/>
+          </a:solidFill>
+          <a:ln>
+            <a:noFill/>
+          </a:ln>
+          <a:effectLst/>
+        </p:spPr>
+        <p:style>
+          <a:lnRef idx="1">
+            <a:schemeClr val="accent1"/>
+          </a:lnRef>
+          <a:fillRef idx="3">
+            <a:schemeClr val="accent1"/>
+          </a:fillRef>
+          <a:effectRef idx="2">
+            <a:schemeClr val="accent1"/>
+          </a:effectRef>
+          <a:fontRef idx="minor">
+            <a:schemeClr val="lt1"/>
+          </a:fontRef>
+        </p:style>
+        <p:txBody>
+          <a:bodyPr rtlCol="0" anchor="ctr"/>
+          <a:lstStyle/>
+          <a:p>
+            <a:pPr algn="ctr"/>
+          </a:p>
+        </p:txBody>
+      </p:sp>
+      <p:sp>
+        <p:nvSpPr>
+          <p:cNvPr id="15" name="Rectangle 14"/>
+          <p:cNvSpPr/>
+          <p:nvPr/>
+        </p:nvSpPr>
+        <p:spPr>
+          <a:xfrm>
+            <a:off x="6359194" y="1527048"/>
+            <a:ext cx="38100" cy="1332280"/>
           </a:xfrm>
           <a:prstGeom prst="rect">
             <a:avLst/>
@@ -6484,14 +6057,155 @@
       </p:sp>
       <p:sp>
         <p:nvSpPr>
-          <p:cNvPr id="12" name="TextBox 11"/>
+          <p:cNvPr id="16" name="Oval 15"/>
+          <p:cNvSpPr/>
+          <p:nvPr/>
+        </p:nvSpPr>
+        <p:spPr>
+          <a:xfrm>
+            <a:off x="6461302" y="1591056"/>
+            <a:ext cx="182880" cy="182880"/>
+          </a:xfrm>
+          <a:prstGeom prst="ellipse">
+            <a:avLst/>
+          </a:prstGeom>
+          <a:solidFill>
+            <a:srgbClr val="2A4E8A"/>
+          </a:solidFill>
+          <a:ln>
+            <a:noFill/>
+          </a:ln>
+          <a:effectLst/>
+        </p:spPr>
+        <p:style>
+          <a:lnRef idx="1">
+            <a:schemeClr val="accent1"/>
+          </a:lnRef>
+          <a:fillRef idx="3">
+            <a:schemeClr val="accent1"/>
+          </a:fillRef>
+          <a:effectRef idx="2">
+            <a:schemeClr val="accent1"/>
+          </a:effectRef>
+          <a:fontRef idx="minor">
+            <a:schemeClr val="lt1"/>
+          </a:fontRef>
+        </p:style>
+        <p:txBody>
+          <a:bodyPr rtlCol="0" anchor="ctr"/>
+          <a:lstStyle/>
+          <a:p>
+            <a:pPr algn="ctr">
+              <a:spcBef>
+                <a:spcPts val="100"/>
+              </a:spcBef>
+            </a:pPr>
+            <a:r>
+              <a:rPr sz="1200" b="1" i="0">
+                <a:solidFill>
+                  <a:srgbClr val="FFFFFF"/>
+                </a:solidFill>
+                <a:latin typeface="Meiryo UI"/>
+              </a:rPr>
+              <a:t>①</a:t>
+            </a:r>
+          </a:p>
+        </p:txBody>
+      </p:sp>
+      <p:sp>
+        <p:nvSpPr>
+          <p:cNvPr id="17" name="Rectangle 16"/>
+          <p:cNvSpPr/>
+          <p:nvPr/>
+        </p:nvSpPr>
+        <p:spPr>
+          <a:xfrm>
+            <a:off x="6689902" y="1591056"/>
+            <a:ext cx="868680" cy="182880"/>
+          </a:xfrm>
+          <a:prstGeom prst="rect">
+            <a:avLst/>
+          </a:prstGeom>
+          <a:solidFill>
+            <a:srgbClr val="4A9EFF"/>
+          </a:solidFill>
+          <a:ln>
+            <a:noFill/>
+          </a:ln>
+          <a:effectLst/>
+        </p:spPr>
+        <p:style>
+          <a:lnRef idx="1">
+            <a:schemeClr val="accent1"/>
+          </a:lnRef>
+          <a:fillRef idx="3">
+            <a:schemeClr val="accent1"/>
+          </a:fillRef>
+          <a:effectRef idx="2">
+            <a:schemeClr val="accent1"/>
+          </a:effectRef>
+          <a:fontRef idx="minor">
+            <a:schemeClr val="lt1"/>
+          </a:fontRef>
+        </p:style>
+        <p:txBody>
+          <a:bodyPr rtlCol="0" anchor="ctr"/>
+          <a:lstStyle/>
+          <a:p>
+            <a:pPr algn="ctr"/>
+          </a:p>
+        </p:txBody>
+      </p:sp>
+      <p:sp>
+        <p:nvSpPr>
+          <p:cNvPr id="18" name="TextBox 17"/>
           <p:cNvSpPr txBox="1"/>
           <p:nvPr/>
         </p:nvSpPr>
         <p:spPr>
           <a:xfrm>
-            <a:off x="1021384" y="5779922"/>
-            <a:ext cx="10149840" cy="502920"/>
+            <a:off x="6689902" y="1591056"/>
+            <a:ext cx="868680" cy="182880"/>
+          </a:xfrm>
+          <a:prstGeom prst="rect">
+            <a:avLst/>
+          </a:prstGeom>
+          <a:noFill/>
+          <a:effectLst/>
+        </p:spPr>
+        <p:txBody>
+          <a:bodyPr wrap="none">
+            <a:spAutoFit/>
+          </a:bodyPr>
+          <a:lstStyle/>
+          <a:p>
+            <a:pPr algn="ctr">
+              <a:spcBef>
+                <a:spcPts val="100"/>
+              </a:spcBef>
+            </a:pPr>
+            <a:r>
+              <a:rPr sz="1200" b="0" i="0">
+                <a:solidFill>
+                  <a:srgbClr val="FFFFFF"/>
+                </a:solidFill>
+                <a:latin typeface="Meiryo UI"/>
+              </a:rPr>
+              <a:t>SEP</a:t>
+            </a:r>
+          </a:p>
+        </p:txBody>
+      </p:sp>
+      <p:sp>
+        <p:nvSpPr>
+          <p:cNvPr id="19" name="TextBox 18"/>
+          <p:cNvSpPr txBox="1"/>
+          <p:nvPr/>
+        </p:nvSpPr>
+        <p:spPr>
+          <a:xfrm>
+            <a:off x="6461302" y="1810512"/>
+            <a:ext cx="4828794" cy="237744"/>
           </a:xfrm>
           <a:prstGeom prst="rect">
             <a:avLst/>
@@ -6505,6 +6219,1398 @@
           </a:bodyPr>
           <a:lstStyle/>
           <a:p>
+            <a:r>
+              <a:rPr sz="1200" b="1" i="0">
+                <a:solidFill>
+                  <a:srgbClr val="1D3461"/>
+                </a:solidFill>
+                <a:latin typeface="Meiryo UI"/>
+              </a:rPr>
+              <a:t>SEP：会計特化の営業の型を設計</a:t>
+            </a:r>
+          </a:p>
+        </p:txBody>
+      </p:sp>
+      <p:sp>
+        <p:nvSpPr>
+          <p:cNvPr id="20" name="TextBox 19"/>
+          <p:cNvSpPr txBox="1"/>
+          <p:nvPr/>
+        </p:nvSpPr>
+        <p:spPr>
+          <a:xfrm>
+            <a:off x="6461302" y="2066544"/>
+            <a:ext cx="4828794" cy="756208"/>
+          </a:xfrm>
+          <a:prstGeom prst="rect">
+            <a:avLst/>
+          </a:prstGeom>
+          <a:noFill/>
+          <a:effectLst/>
+        </p:spPr>
+        <p:txBody>
+          <a:bodyPr wrap="square">
+            <a:spAutoFit/>
+          </a:bodyPr>
+          <a:lstStyle/>
+          <a:p>
+            <a:r>
+              <a:rPr sz="1200" b="0" i="0">
+                <a:solidFill>
+                  <a:srgbClr val="4A9EFF"/>
+                </a:solidFill>
+                <a:latin typeface="Meiryo UI"/>
+              </a:rPr>
+              <a:t>– </a:t>
+            </a:r>
+            <a:r>
+              <a:rPr sz="1200" b="0" i="0">
+                <a:solidFill>
+                  <a:srgbClr val="555555"/>
+                </a:solidFill>
+                <a:latin typeface="Meiryo UI"/>
+              </a:rPr>
+              <a:t>カスタマーパス設計 / ニーズマップで型を体系化</a:t>
+            </a:r>
+          </a:p>
+          <a:p>
+            <a:pPr>
+              <a:spcBef>
+                <a:spcPts val="200"/>
+              </a:spcBef>
+            </a:pPr>
+            <a:r>
+              <a:rPr sz="1200" b="0" i="0">
+                <a:solidFill>
+                  <a:srgbClr val="4A9EFF"/>
+                </a:solidFill>
+                <a:latin typeface="Meiryo UI"/>
+              </a:rPr>
+              <a:t>– </a:t>
+            </a:r>
+            <a:r>
+              <a:rPr sz="1200" b="0" i="0">
+                <a:solidFill>
+                  <a:srgbClr val="555555"/>
+                </a:solidFill>
+                <a:latin typeface="Meiryo UI"/>
+              </a:rPr>
+              <a:t>中途でも型に沿えば最適提案が可能に</a:t>
+            </a:r>
+          </a:p>
+        </p:txBody>
+      </p:sp>
+      <p:sp>
+        <p:nvSpPr>
+          <p:cNvPr id="21" name="Rectangle 20"/>
+          <p:cNvSpPr/>
+          <p:nvPr/>
+        </p:nvSpPr>
+        <p:spPr>
+          <a:xfrm>
+            <a:off x="838504" y="2941624"/>
+            <a:ext cx="4994910" cy="1332280"/>
+          </a:xfrm>
+          <a:prstGeom prst="rect">
+            <a:avLst/>
+          </a:prstGeom>
+          <a:solidFill>
+            <a:srgbClr val="F9F5F5"/>
+          </a:solidFill>
+          <a:ln>
+            <a:noFill/>
+          </a:ln>
+          <a:effectLst/>
+        </p:spPr>
+        <p:style>
+          <a:lnRef idx="1">
+            <a:schemeClr val="accent1"/>
+          </a:lnRef>
+          <a:fillRef idx="3">
+            <a:schemeClr val="accent1"/>
+          </a:fillRef>
+          <a:effectRef idx="2">
+            <a:schemeClr val="accent1"/>
+          </a:effectRef>
+          <a:fontRef idx="minor">
+            <a:schemeClr val="lt1"/>
+          </a:fontRef>
+        </p:style>
+        <p:txBody>
+          <a:bodyPr rtlCol="0" anchor="ctr"/>
+          <a:lstStyle/>
+          <a:p>
+            <a:pPr algn="ctr"/>
+          </a:p>
+        </p:txBody>
+      </p:sp>
+      <p:sp>
+        <p:nvSpPr>
+          <p:cNvPr id="22" name="Rectangle 21"/>
+          <p:cNvSpPr/>
+          <p:nvPr/>
+        </p:nvSpPr>
+        <p:spPr>
+          <a:xfrm>
+            <a:off x="838504" y="2941624"/>
+            <a:ext cx="38100" cy="1332280"/>
+          </a:xfrm>
+          <a:prstGeom prst="rect">
+            <a:avLst/>
+          </a:prstGeom>
+          <a:solidFill>
+            <a:srgbClr val="C0392B"/>
+          </a:solidFill>
+          <a:ln>
+            <a:noFill/>
+          </a:ln>
+          <a:effectLst/>
+        </p:spPr>
+        <p:style>
+          <a:lnRef idx="1">
+            <a:schemeClr val="accent1"/>
+          </a:lnRef>
+          <a:fillRef idx="3">
+            <a:schemeClr val="accent1"/>
+          </a:fillRef>
+          <a:effectRef idx="2">
+            <a:schemeClr val="accent1"/>
+          </a:effectRef>
+          <a:fontRef idx="minor">
+            <a:schemeClr val="lt1"/>
+          </a:fontRef>
+        </p:style>
+        <p:txBody>
+          <a:bodyPr rtlCol="0" anchor="ctr"/>
+          <a:lstStyle/>
+          <a:p>
+            <a:pPr algn="ctr"/>
+          </a:p>
+        </p:txBody>
+      </p:sp>
+      <p:sp>
+        <p:nvSpPr>
+          <p:cNvPr id="23" name="Oval 22"/>
+          <p:cNvSpPr/>
+          <p:nvPr/>
+        </p:nvSpPr>
+        <p:spPr>
+          <a:xfrm>
+            <a:off x="940612" y="3005632"/>
+            <a:ext cx="182880" cy="182880"/>
+          </a:xfrm>
+          <a:prstGeom prst="ellipse">
+            <a:avLst/>
+          </a:prstGeom>
+          <a:solidFill>
+            <a:srgbClr val="E5B4B0"/>
+          </a:solidFill>
+          <a:ln>
+            <a:noFill/>
+          </a:ln>
+          <a:effectLst/>
+        </p:spPr>
+        <p:style>
+          <a:lnRef idx="1">
+            <a:schemeClr val="accent1"/>
+          </a:lnRef>
+          <a:fillRef idx="3">
+            <a:schemeClr val="accent1"/>
+          </a:fillRef>
+          <a:effectRef idx="2">
+            <a:schemeClr val="accent1"/>
+          </a:effectRef>
+          <a:fontRef idx="minor">
+            <a:schemeClr val="lt1"/>
+          </a:fontRef>
+        </p:style>
+        <p:txBody>
+          <a:bodyPr rtlCol="0" anchor="ctr"/>
+          <a:lstStyle/>
+          <a:p>
+            <a:pPr algn="ctr">
+              <a:spcBef>
+                <a:spcPts val="100"/>
+              </a:spcBef>
+            </a:pPr>
+            <a:r>
+              <a:rPr sz="1200" b="1" i="0">
+                <a:solidFill>
+                  <a:srgbClr val="C0392B"/>
+                </a:solidFill>
+                <a:latin typeface="Meiryo UI"/>
+              </a:rPr>
+              <a:t>②</a:t>
+            </a:r>
+          </a:p>
+        </p:txBody>
+      </p:sp>
+      <p:sp>
+        <p:nvSpPr>
+          <p:cNvPr id="24" name="TextBox 23"/>
+          <p:cNvSpPr txBox="1"/>
+          <p:nvPr/>
+        </p:nvSpPr>
+        <p:spPr>
+          <a:xfrm>
+            <a:off x="1160068" y="3005632"/>
+            <a:ext cx="4609338" cy="182880"/>
+          </a:xfrm>
+          <a:prstGeom prst="rect">
+            <a:avLst/>
+          </a:prstGeom>
+          <a:noFill/>
+          <a:effectLst/>
+        </p:spPr>
+        <p:txBody>
+          <a:bodyPr wrap="none">
+            <a:spAutoFit/>
+          </a:bodyPr>
+          <a:lstStyle/>
+          <a:p>
+            <a:r>
+              <a:rPr sz="1200" b="1" i="0">
+                <a:solidFill>
+                  <a:srgbClr val="8B2020"/>
+                </a:solidFill>
+                <a:latin typeface="Meiryo UI"/>
+              </a:rPr>
+              <a:t>中途がワークしない</a:t>
+            </a:r>
+          </a:p>
+        </p:txBody>
+      </p:sp>
+      <p:sp>
+        <p:nvSpPr>
+          <p:cNvPr id="25" name="TextBox 24"/>
+          <p:cNvSpPr txBox="1"/>
+          <p:nvPr/>
+        </p:nvSpPr>
+        <p:spPr>
+          <a:xfrm>
+            <a:off x="940612" y="3225088"/>
+            <a:ext cx="4828794" cy="1012240"/>
+          </a:xfrm>
+          <a:prstGeom prst="rect">
+            <a:avLst/>
+          </a:prstGeom>
+          <a:noFill/>
+          <a:effectLst/>
+        </p:spPr>
+        <p:txBody>
+          <a:bodyPr wrap="square">
+            <a:spAutoFit/>
+          </a:bodyPr>
+          <a:lstStyle/>
+          <a:p>
+            <a:r>
+              <a:rPr sz="1200" b="0" i="0">
+                <a:solidFill>
+                  <a:srgbClr val="C0392B"/>
+                </a:solidFill>
+                <a:latin typeface="Meiryo UI"/>
+              </a:rPr>
+              <a:t>– </a:t>
+            </a:r>
+            <a:r>
+              <a:rPr sz="1200" b="0" i="0">
+                <a:solidFill>
+                  <a:srgbClr val="555555"/>
+                </a:solidFill>
+                <a:latin typeface="Meiryo UI"/>
+              </a:rPr>
+              <a:t>採用市場変化×マネフォ固有の複雑さが重なる</a:t>
+            </a:r>
+          </a:p>
+          <a:p>
+            <a:pPr>
+              <a:spcBef>
+                <a:spcPts val="200"/>
+              </a:spcBef>
+            </a:pPr>
+            <a:r>
+              <a:rPr sz="1200" b="0" i="0">
+                <a:solidFill>
+                  <a:srgbClr val="C0392B"/>
+                </a:solidFill>
+                <a:latin typeface="Meiryo UI"/>
+              </a:rPr>
+              <a:t>– </a:t>
+            </a:r>
+            <a:r>
+              <a:rPr sz="1200" b="0" i="0">
+                <a:solidFill>
+                  <a:srgbClr val="555555"/>
+                </a:solidFill>
+                <a:latin typeface="Meiryo UI"/>
+              </a:rPr>
+              <a:t>前職スキルが通用せず採用増でも1人あたり売上が低下</a:t>
+            </a:r>
+          </a:p>
+        </p:txBody>
+      </p:sp>
+      <p:sp>
+        <p:nvSpPr>
+          <p:cNvPr id="26" name="TextBox 25"/>
+          <p:cNvSpPr txBox="1"/>
+          <p:nvPr/>
+        </p:nvSpPr>
+        <p:spPr>
+          <a:xfrm>
+            <a:off x="5833414" y="2941624"/>
+            <a:ext cx="525780" cy="1332280"/>
+          </a:xfrm>
+          <a:prstGeom prst="rect">
+            <a:avLst/>
+          </a:prstGeom>
+          <a:noFill/>
+          <a:effectLst/>
+        </p:spPr>
+        <p:txBody>
+          <a:bodyPr wrap="none">
+            <a:spAutoFit/>
+          </a:bodyPr>
+          <a:lstStyle/>
+          <a:p>
+            <a:pPr algn="ctr">
+              <a:spcBef>
+                <a:spcPts val="3147"/>
+              </a:spcBef>
+            </a:pPr>
+            <a:r>
+              <a:rPr sz="1600" b="1" i="0">
+                <a:solidFill>
+                  <a:srgbClr val="4A9EFF"/>
+                </a:solidFill>
+                <a:latin typeface="Meiryo UI"/>
+              </a:rPr>
+              <a:t>→</a:t>
+            </a:r>
+          </a:p>
+        </p:txBody>
+      </p:sp>
+      <p:sp>
+        <p:nvSpPr>
+          <p:cNvPr id="27" name="Rectangle 26"/>
+          <p:cNvSpPr/>
+          <p:nvPr/>
+        </p:nvSpPr>
+        <p:spPr>
+          <a:xfrm>
+            <a:off x="6359194" y="2941624"/>
+            <a:ext cx="4994910" cy="1332280"/>
+          </a:xfrm>
+          <a:prstGeom prst="rect">
+            <a:avLst/>
+          </a:prstGeom>
+          <a:solidFill>
+            <a:srgbClr val="FFFFFF"/>
+          </a:solidFill>
+          <a:ln>
+            <a:noFill/>
+          </a:ln>
+          <a:effectLst/>
+        </p:spPr>
+        <p:style>
+          <a:lnRef idx="1">
+            <a:schemeClr val="accent1"/>
+          </a:lnRef>
+          <a:fillRef idx="3">
+            <a:schemeClr val="accent1"/>
+          </a:fillRef>
+          <a:effectRef idx="2">
+            <a:schemeClr val="accent1"/>
+          </a:effectRef>
+          <a:fontRef idx="minor">
+            <a:schemeClr val="lt1"/>
+          </a:fontRef>
+        </p:style>
+        <p:txBody>
+          <a:bodyPr rtlCol="0" anchor="ctr"/>
+          <a:lstStyle/>
+          <a:p>
+            <a:pPr algn="ctr"/>
+          </a:p>
+        </p:txBody>
+      </p:sp>
+      <p:sp>
+        <p:nvSpPr>
+          <p:cNvPr id="28" name="Rectangle 27"/>
+          <p:cNvSpPr/>
+          <p:nvPr/>
+        </p:nvSpPr>
+        <p:spPr>
+          <a:xfrm>
+            <a:off x="6359194" y="2941624"/>
+            <a:ext cx="38100" cy="1332280"/>
+          </a:xfrm>
+          <a:prstGeom prst="rect">
+            <a:avLst/>
+          </a:prstGeom>
+          <a:solidFill>
+            <a:srgbClr val="1D3461"/>
+          </a:solidFill>
+          <a:ln>
+            <a:noFill/>
+          </a:ln>
+          <a:effectLst/>
+        </p:spPr>
+        <p:style>
+          <a:lnRef idx="1">
+            <a:schemeClr val="accent1"/>
+          </a:lnRef>
+          <a:fillRef idx="3">
+            <a:schemeClr val="accent1"/>
+          </a:fillRef>
+          <a:effectRef idx="2">
+            <a:schemeClr val="accent1"/>
+          </a:effectRef>
+          <a:fontRef idx="minor">
+            <a:schemeClr val="lt1"/>
+          </a:fontRef>
+        </p:style>
+        <p:txBody>
+          <a:bodyPr rtlCol="0" anchor="ctr"/>
+          <a:lstStyle/>
+          <a:p>
+            <a:pPr algn="ctr"/>
+          </a:p>
+        </p:txBody>
+      </p:sp>
+      <p:sp>
+        <p:nvSpPr>
+          <p:cNvPr id="29" name="Oval 28"/>
+          <p:cNvSpPr/>
+          <p:nvPr/>
+        </p:nvSpPr>
+        <p:spPr>
+          <a:xfrm>
+            <a:off x="6461302" y="3005632"/>
+            <a:ext cx="182880" cy="182880"/>
+          </a:xfrm>
+          <a:prstGeom prst="ellipse">
+            <a:avLst/>
+          </a:prstGeom>
+          <a:solidFill>
+            <a:srgbClr val="2A4E8A"/>
+          </a:solidFill>
+          <a:ln>
+            <a:noFill/>
+          </a:ln>
+          <a:effectLst/>
+        </p:spPr>
+        <p:style>
+          <a:lnRef idx="1">
+            <a:schemeClr val="accent1"/>
+          </a:lnRef>
+          <a:fillRef idx="3">
+            <a:schemeClr val="accent1"/>
+          </a:fillRef>
+          <a:effectRef idx="2">
+            <a:schemeClr val="accent1"/>
+          </a:effectRef>
+          <a:fontRef idx="minor">
+            <a:schemeClr val="lt1"/>
+          </a:fontRef>
+        </p:style>
+        <p:txBody>
+          <a:bodyPr rtlCol="0" anchor="ctr"/>
+          <a:lstStyle/>
+          <a:p>
+            <a:pPr algn="ctr">
+              <a:spcBef>
+                <a:spcPts val="100"/>
+              </a:spcBef>
+            </a:pPr>
+            <a:r>
+              <a:rPr sz="1200" b="1" i="0">
+                <a:solidFill>
+                  <a:srgbClr val="FFFFFF"/>
+                </a:solidFill>
+                <a:latin typeface="Meiryo UI"/>
+              </a:rPr>
+              <a:t>②</a:t>
+            </a:r>
+          </a:p>
+        </p:txBody>
+      </p:sp>
+      <p:sp>
+        <p:nvSpPr>
+          <p:cNvPr id="30" name="Rectangle 29"/>
+          <p:cNvSpPr/>
+          <p:nvPr/>
+        </p:nvSpPr>
+        <p:spPr>
+          <a:xfrm>
+            <a:off x="6689902" y="3005632"/>
+            <a:ext cx="868680" cy="182880"/>
+          </a:xfrm>
+          <a:prstGeom prst="rect">
+            <a:avLst/>
+          </a:prstGeom>
+          <a:solidFill>
+            <a:srgbClr val="4A9EFF"/>
+          </a:solidFill>
+          <a:ln>
+            <a:noFill/>
+          </a:ln>
+          <a:effectLst/>
+        </p:spPr>
+        <p:style>
+          <a:lnRef idx="1">
+            <a:schemeClr val="accent1"/>
+          </a:lnRef>
+          <a:fillRef idx="3">
+            <a:schemeClr val="accent1"/>
+          </a:fillRef>
+          <a:effectRef idx="2">
+            <a:schemeClr val="accent1"/>
+          </a:effectRef>
+          <a:fontRef idx="minor">
+            <a:schemeClr val="lt1"/>
+          </a:fontRef>
+        </p:style>
+        <p:txBody>
+          <a:bodyPr rtlCol="0" anchor="ctr"/>
+          <a:lstStyle/>
+          <a:p>
+            <a:pPr algn="ctr"/>
+          </a:p>
+        </p:txBody>
+      </p:sp>
+      <p:sp>
+        <p:nvSpPr>
+          <p:cNvPr id="31" name="TextBox 30"/>
+          <p:cNvSpPr txBox="1"/>
+          <p:nvPr/>
+        </p:nvSpPr>
+        <p:spPr>
+          <a:xfrm>
+            <a:off x="6689902" y="3005632"/>
+            <a:ext cx="868680" cy="182880"/>
+          </a:xfrm>
+          <a:prstGeom prst="rect">
+            <a:avLst/>
+          </a:prstGeom>
+          <a:noFill/>
+          <a:effectLst/>
+        </p:spPr>
+        <p:txBody>
+          <a:bodyPr wrap="none">
+            <a:spAutoFit/>
+          </a:bodyPr>
+          <a:lstStyle/>
+          <a:p>
+            <a:pPr algn="ctr">
+              <a:spcBef>
+                <a:spcPts val="100"/>
+              </a:spcBef>
+            </a:pPr>
+            <a:r>
+              <a:rPr sz="1200" b="0" i="0">
+                <a:solidFill>
+                  <a:srgbClr val="FFFFFF"/>
+                </a:solidFill>
+                <a:latin typeface="Meiryo UI"/>
+              </a:rPr>
+              <a:t>VISUALIZE</a:t>
+            </a:r>
+          </a:p>
+        </p:txBody>
+      </p:sp>
+      <p:sp>
+        <p:nvSpPr>
+          <p:cNvPr id="32" name="TextBox 31"/>
+          <p:cNvSpPr txBox="1"/>
+          <p:nvPr/>
+        </p:nvSpPr>
+        <p:spPr>
+          <a:xfrm>
+            <a:off x="6461302" y="3225088"/>
+            <a:ext cx="4828794" cy="237744"/>
+          </a:xfrm>
+          <a:prstGeom prst="rect">
+            <a:avLst/>
+          </a:prstGeom>
+          <a:noFill/>
+          <a:effectLst/>
+        </p:spPr>
+        <p:txBody>
+          <a:bodyPr wrap="square">
+            <a:spAutoFit/>
+          </a:bodyPr>
+          <a:lstStyle/>
+          <a:p>
+            <a:r>
+              <a:rPr sz="1200" b="1" i="0">
+                <a:solidFill>
+                  <a:srgbClr val="1D3461"/>
+                </a:solidFill>
+                <a:latin typeface="Meiryo UI"/>
+              </a:rPr>
+              <a:t>VISUALIZE：介入ポイントを可視化</a:t>
+            </a:r>
+          </a:p>
+        </p:txBody>
+      </p:sp>
+      <p:sp>
+        <p:nvSpPr>
+          <p:cNvPr id="33" name="TextBox 32"/>
+          <p:cNvSpPr txBox="1"/>
+          <p:nvPr/>
+        </p:nvSpPr>
+        <p:spPr>
+          <a:xfrm>
+            <a:off x="6461302" y="3481120"/>
+            <a:ext cx="4828794" cy="756208"/>
+          </a:xfrm>
+          <a:prstGeom prst="rect">
+            <a:avLst/>
+          </a:prstGeom>
+          <a:noFill/>
+          <a:effectLst/>
+        </p:spPr>
+        <p:txBody>
+          <a:bodyPr wrap="square">
+            <a:spAutoFit/>
+          </a:bodyPr>
+          <a:lstStyle/>
+          <a:p>
+            <a:r>
+              <a:rPr sz="1200" b="0" i="0">
+                <a:solidFill>
+                  <a:srgbClr val="4A9EFF"/>
+                </a:solidFill>
+                <a:latin typeface="Meiryo UI"/>
+              </a:rPr>
+              <a:t>– </a:t>
+            </a:r>
+            <a:r>
+              <a:rPr sz="1200" b="0" i="0">
+                <a:solidFill>
+                  <a:srgbClr val="555555"/>
+                </a:solidFill>
+                <a:latin typeface="Meiryo UI"/>
+              </a:rPr>
+              <a:t>受注率×フェーズ移行率をリアルタイム可視化</a:t>
+            </a:r>
+          </a:p>
+          <a:p>
+            <a:pPr>
+              <a:spcBef>
+                <a:spcPts val="200"/>
+              </a:spcBef>
+            </a:pPr>
+            <a:r>
+              <a:rPr sz="1200" b="0" i="0">
+                <a:solidFill>
+                  <a:srgbClr val="4A9EFF"/>
+                </a:solidFill>
+                <a:latin typeface="Meiryo UI"/>
+              </a:rPr>
+              <a:t>– </a:t>
+            </a:r>
+            <a:r>
+              <a:rPr sz="1200" b="0" i="0">
+                <a:solidFill>
+                  <a:srgbClr val="555555"/>
+                </a:solidFill>
+                <a:latin typeface="Meiryo UI"/>
+              </a:rPr>
+              <a:t>Excel撤廃→営業企画がデータで即時介入</a:t>
+            </a:r>
+          </a:p>
+        </p:txBody>
+      </p:sp>
+      <p:sp>
+        <p:nvSpPr>
+          <p:cNvPr id="34" name="Rectangle 33"/>
+          <p:cNvSpPr/>
+          <p:nvPr/>
+        </p:nvSpPr>
+        <p:spPr>
+          <a:xfrm>
+            <a:off x="838504" y="4356200"/>
+            <a:ext cx="4994910" cy="1332280"/>
+          </a:xfrm>
+          <a:prstGeom prst="rect">
+            <a:avLst/>
+          </a:prstGeom>
+          <a:solidFill>
+            <a:srgbClr val="F9F5F5"/>
+          </a:solidFill>
+          <a:ln>
+            <a:noFill/>
+          </a:ln>
+          <a:effectLst/>
+        </p:spPr>
+        <p:style>
+          <a:lnRef idx="1">
+            <a:schemeClr val="accent1"/>
+          </a:lnRef>
+          <a:fillRef idx="3">
+            <a:schemeClr val="accent1"/>
+          </a:fillRef>
+          <a:effectRef idx="2">
+            <a:schemeClr val="accent1"/>
+          </a:effectRef>
+          <a:fontRef idx="minor">
+            <a:schemeClr val="lt1"/>
+          </a:fontRef>
+        </p:style>
+        <p:txBody>
+          <a:bodyPr rtlCol="0" anchor="ctr"/>
+          <a:lstStyle/>
+          <a:p>
+            <a:pPr algn="ctr"/>
+          </a:p>
+        </p:txBody>
+      </p:sp>
+      <p:sp>
+        <p:nvSpPr>
+          <p:cNvPr id="35" name="Rectangle 34"/>
+          <p:cNvSpPr/>
+          <p:nvPr/>
+        </p:nvSpPr>
+        <p:spPr>
+          <a:xfrm>
+            <a:off x="838504" y="4356200"/>
+            <a:ext cx="38100" cy="1332280"/>
+          </a:xfrm>
+          <a:prstGeom prst="rect">
+            <a:avLst/>
+          </a:prstGeom>
+          <a:solidFill>
+            <a:srgbClr val="C0392B"/>
+          </a:solidFill>
+          <a:ln>
+            <a:noFill/>
+          </a:ln>
+          <a:effectLst/>
+        </p:spPr>
+        <p:style>
+          <a:lnRef idx="1">
+            <a:schemeClr val="accent1"/>
+          </a:lnRef>
+          <a:fillRef idx="3">
+            <a:schemeClr val="accent1"/>
+          </a:fillRef>
+          <a:effectRef idx="2">
+            <a:schemeClr val="accent1"/>
+          </a:effectRef>
+          <a:fontRef idx="minor">
+            <a:schemeClr val="lt1"/>
+          </a:fontRef>
+        </p:style>
+        <p:txBody>
+          <a:bodyPr rtlCol="0" anchor="ctr"/>
+          <a:lstStyle/>
+          <a:p>
+            <a:pPr algn="ctr"/>
+          </a:p>
+        </p:txBody>
+      </p:sp>
+      <p:sp>
+        <p:nvSpPr>
+          <p:cNvPr id="36" name="Oval 35"/>
+          <p:cNvSpPr/>
+          <p:nvPr/>
+        </p:nvSpPr>
+        <p:spPr>
+          <a:xfrm>
+            <a:off x="940612" y="4420208"/>
+            <a:ext cx="182880" cy="182880"/>
+          </a:xfrm>
+          <a:prstGeom prst="ellipse">
+            <a:avLst/>
+          </a:prstGeom>
+          <a:solidFill>
+            <a:srgbClr val="E5B4B0"/>
+          </a:solidFill>
+          <a:ln>
+            <a:noFill/>
+          </a:ln>
+          <a:effectLst/>
+        </p:spPr>
+        <p:style>
+          <a:lnRef idx="1">
+            <a:schemeClr val="accent1"/>
+          </a:lnRef>
+          <a:fillRef idx="3">
+            <a:schemeClr val="accent1"/>
+          </a:fillRef>
+          <a:effectRef idx="2">
+            <a:schemeClr val="accent1"/>
+          </a:effectRef>
+          <a:fontRef idx="minor">
+            <a:schemeClr val="lt1"/>
+          </a:fontRef>
+        </p:style>
+        <p:txBody>
+          <a:bodyPr rtlCol="0" anchor="ctr"/>
+          <a:lstStyle/>
+          <a:p>
+            <a:pPr algn="ctr">
+              <a:spcBef>
+                <a:spcPts val="100"/>
+              </a:spcBef>
+            </a:pPr>
+            <a:r>
+              <a:rPr sz="1200" b="1" i="0">
+                <a:solidFill>
+                  <a:srgbClr val="C0392B"/>
+                </a:solidFill>
+                <a:latin typeface="Meiryo UI"/>
+              </a:rPr>
+              <a:t>③</a:t>
+            </a:r>
+          </a:p>
+        </p:txBody>
+      </p:sp>
+      <p:sp>
+        <p:nvSpPr>
+          <p:cNvPr id="37" name="TextBox 36"/>
+          <p:cNvSpPr txBox="1"/>
+          <p:nvPr/>
+        </p:nvSpPr>
+        <p:spPr>
+          <a:xfrm>
+            <a:off x="1160068" y="4420208"/>
+            <a:ext cx="4609338" cy="182880"/>
+          </a:xfrm>
+          <a:prstGeom prst="rect">
+            <a:avLst/>
+          </a:prstGeom>
+          <a:noFill/>
+          <a:effectLst/>
+        </p:spPr>
+        <p:txBody>
+          <a:bodyPr wrap="none">
+            <a:spAutoFit/>
+          </a:bodyPr>
+          <a:lstStyle/>
+          <a:p>
+            <a:r>
+              <a:rPr sz="1200" b="1" i="0">
+                <a:solidFill>
+                  <a:srgbClr val="8B2020"/>
+                </a:solidFill>
+                <a:latin typeface="Meiryo UI"/>
+              </a:rPr>
+              <a:t>介入ポイントが見えない</a:t>
+            </a:r>
+          </a:p>
+        </p:txBody>
+      </p:sp>
+      <p:sp>
+        <p:nvSpPr>
+          <p:cNvPr id="38" name="TextBox 37"/>
+          <p:cNvSpPr txBox="1"/>
+          <p:nvPr/>
+        </p:nvSpPr>
+        <p:spPr>
+          <a:xfrm>
+            <a:off x="940612" y="4639664"/>
+            <a:ext cx="4828794" cy="1012240"/>
+          </a:xfrm>
+          <a:prstGeom prst="rect">
+            <a:avLst/>
+          </a:prstGeom>
+          <a:noFill/>
+          <a:effectLst/>
+        </p:spPr>
+        <p:txBody>
+          <a:bodyPr wrap="square">
+            <a:spAutoFit/>
+          </a:bodyPr>
+          <a:lstStyle/>
+          <a:p>
+            <a:r>
+              <a:rPr sz="1200" b="0" i="0">
+                <a:solidFill>
+                  <a:srgbClr val="C0392B"/>
+                </a:solidFill>
+                <a:latin typeface="Meiryo UI"/>
+              </a:rPr>
+              <a:t>– </a:t>
+            </a:r>
+            <a:r>
+              <a:rPr sz="1200" b="0" i="0">
+                <a:solidFill>
+                  <a:srgbClr val="555555"/>
+                </a:solidFill>
+                <a:latin typeface="Meiryo UI"/>
+              </a:rPr>
+              <a:t>どのフェーズで受注率が落ちているか可視化できていない</a:t>
+            </a:r>
+          </a:p>
+          <a:p>
+            <a:pPr>
+              <a:spcBef>
+                <a:spcPts val="200"/>
+              </a:spcBef>
+            </a:pPr>
+            <a:r>
+              <a:rPr sz="1200" b="0" i="0">
+                <a:solidFill>
+                  <a:srgbClr val="C0392B"/>
+                </a:solidFill>
+                <a:latin typeface="Meiryo UI"/>
+              </a:rPr>
+              <a:t>– </a:t>
+            </a:r>
+            <a:r>
+              <a:rPr sz="1200" b="0" i="0">
+                <a:solidFill>
+                  <a:srgbClr val="555555"/>
+                </a:solidFill>
+                <a:latin typeface="Meiryo UI"/>
+              </a:rPr>
+              <a:t>PDCAが遅く、打ち手の判断材料がない</a:t>
+            </a:r>
+          </a:p>
+        </p:txBody>
+      </p:sp>
+      <p:sp>
+        <p:nvSpPr>
+          <p:cNvPr id="39" name="TextBox 38"/>
+          <p:cNvSpPr txBox="1"/>
+          <p:nvPr/>
+        </p:nvSpPr>
+        <p:spPr>
+          <a:xfrm>
+            <a:off x="5833414" y="4356200"/>
+            <a:ext cx="525780" cy="1332280"/>
+          </a:xfrm>
+          <a:prstGeom prst="rect">
+            <a:avLst/>
+          </a:prstGeom>
+          <a:noFill/>
+          <a:effectLst/>
+        </p:spPr>
+        <p:txBody>
+          <a:bodyPr wrap="none">
+            <a:spAutoFit/>
+          </a:bodyPr>
+          <a:lstStyle/>
+          <a:p>
+            <a:pPr algn="ctr">
+              <a:spcBef>
+                <a:spcPts val="3147"/>
+              </a:spcBef>
+            </a:pPr>
+            <a:r>
+              <a:rPr sz="1600" b="1" i="0">
+                <a:solidFill>
+                  <a:srgbClr val="4A9EFF"/>
+                </a:solidFill>
+                <a:latin typeface="Meiryo UI"/>
+              </a:rPr>
+              <a:t>→</a:t>
+            </a:r>
+          </a:p>
+        </p:txBody>
+      </p:sp>
+      <p:sp>
+        <p:nvSpPr>
+          <p:cNvPr id="40" name="Rectangle 39"/>
+          <p:cNvSpPr/>
+          <p:nvPr/>
+        </p:nvSpPr>
+        <p:spPr>
+          <a:xfrm>
+            <a:off x="6359194" y="4356200"/>
+            <a:ext cx="4994910" cy="1332280"/>
+          </a:xfrm>
+          <a:prstGeom prst="rect">
+            <a:avLst/>
+          </a:prstGeom>
+          <a:solidFill>
+            <a:srgbClr val="FFFFFF"/>
+          </a:solidFill>
+          <a:ln>
+            <a:noFill/>
+          </a:ln>
+          <a:effectLst/>
+        </p:spPr>
+        <p:style>
+          <a:lnRef idx="1">
+            <a:schemeClr val="accent1"/>
+          </a:lnRef>
+          <a:fillRef idx="3">
+            <a:schemeClr val="accent1"/>
+          </a:fillRef>
+          <a:effectRef idx="2">
+            <a:schemeClr val="accent1"/>
+          </a:effectRef>
+          <a:fontRef idx="minor">
+            <a:schemeClr val="lt1"/>
+          </a:fontRef>
+        </p:style>
+        <p:txBody>
+          <a:bodyPr rtlCol="0" anchor="ctr"/>
+          <a:lstStyle/>
+          <a:p>
+            <a:pPr algn="ctr"/>
+          </a:p>
+        </p:txBody>
+      </p:sp>
+      <p:sp>
+        <p:nvSpPr>
+          <p:cNvPr id="41" name="Rectangle 40"/>
+          <p:cNvSpPr/>
+          <p:nvPr/>
+        </p:nvSpPr>
+        <p:spPr>
+          <a:xfrm>
+            <a:off x="6359194" y="4356200"/>
+            <a:ext cx="38100" cy="1332280"/>
+          </a:xfrm>
+          <a:prstGeom prst="rect">
+            <a:avLst/>
+          </a:prstGeom>
+          <a:solidFill>
+            <a:srgbClr val="1D3461"/>
+          </a:solidFill>
+          <a:ln>
+            <a:noFill/>
+          </a:ln>
+          <a:effectLst/>
+        </p:spPr>
+        <p:style>
+          <a:lnRef idx="1">
+            <a:schemeClr val="accent1"/>
+          </a:lnRef>
+          <a:fillRef idx="3">
+            <a:schemeClr val="accent1"/>
+          </a:fillRef>
+          <a:effectRef idx="2">
+            <a:schemeClr val="accent1"/>
+          </a:effectRef>
+          <a:fontRef idx="minor">
+            <a:schemeClr val="lt1"/>
+          </a:fontRef>
+        </p:style>
+        <p:txBody>
+          <a:bodyPr rtlCol="0" anchor="ctr"/>
+          <a:lstStyle/>
+          <a:p>
+            <a:pPr algn="ctr"/>
+          </a:p>
+        </p:txBody>
+      </p:sp>
+      <p:sp>
+        <p:nvSpPr>
+          <p:cNvPr id="42" name="Oval 41"/>
+          <p:cNvSpPr/>
+          <p:nvPr/>
+        </p:nvSpPr>
+        <p:spPr>
+          <a:xfrm>
+            <a:off x="6461302" y="4420208"/>
+            <a:ext cx="182880" cy="182880"/>
+          </a:xfrm>
+          <a:prstGeom prst="ellipse">
+            <a:avLst/>
+          </a:prstGeom>
+          <a:solidFill>
+            <a:srgbClr val="2A4E8A"/>
+          </a:solidFill>
+          <a:ln>
+            <a:noFill/>
+          </a:ln>
+          <a:effectLst/>
+        </p:spPr>
+        <p:style>
+          <a:lnRef idx="1">
+            <a:schemeClr val="accent1"/>
+          </a:lnRef>
+          <a:fillRef idx="3">
+            <a:schemeClr val="accent1"/>
+          </a:fillRef>
+          <a:effectRef idx="2">
+            <a:schemeClr val="accent1"/>
+          </a:effectRef>
+          <a:fontRef idx="minor">
+            <a:schemeClr val="lt1"/>
+          </a:fontRef>
+        </p:style>
+        <p:txBody>
+          <a:bodyPr rtlCol="0" anchor="ctr"/>
+          <a:lstStyle/>
+          <a:p>
+            <a:pPr algn="ctr">
+              <a:spcBef>
+                <a:spcPts val="100"/>
+              </a:spcBef>
+            </a:pPr>
+            <a:r>
+              <a:rPr sz="1200" b="1" i="0">
+                <a:solidFill>
+                  <a:srgbClr val="FFFFFF"/>
+                </a:solidFill>
+                <a:latin typeface="Meiryo UI"/>
+              </a:rPr>
+              <a:t>③</a:t>
+            </a:r>
+          </a:p>
+        </p:txBody>
+      </p:sp>
+      <p:sp>
+        <p:nvSpPr>
+          <p:cNvPr id="43" name="Rectangle 42"/>
+          <p:cNvSpPr/>
+          <p:nvPr/>
+        </p:nvSpPr>
+        <p:spPr>
+          <a:xfrm>
+            <a:off x="6689902" y="4420208"/>
+            <a:ext cx="868680" cy="182880"/>
+          </a:xfrm>
+          <a:prstGeom prst="rect">
+            <a:avLst/>
+          </a:prstGeom>
+          <a:solidFill>
+            <a:srgbClr val="4A9EFF"/>
+          </a:solidFill>
+          <a:ln>
+            <a:noFill/>
+          </a:ln>
+          <a:effectLst/>
+        </p:spPr>
+        <p:style>
+          <a:lnRef idx="1">
+            <a:schemeClr val="accent1"/>
+          </a:lnRef>
+          <a:fillRef idx="3">
+            <a:schemeClr val="accent1"/>
+          </a:fillRef>
+          <a:effectRef idx="2">
+            <a:schemeClr val="accent1"/>
+          </a:effectRef>
+          <a:fontRef idx="minor">
+            <a:schemeClr val="lt1"/>
+          </a:fontRef>
+        </p:style>
+        <p:txBody>
+          <a:bodyPr rtlCol="0" anchor="ctr"/>
+          <a:lstStyle/>
+          <a:p>
+            <a:pPr algn="ctr"/>
+          </a:p>
+        </p:txBody>
+      </p:sp>
+      <p:sp>
+        <p:nvSpPr>
+          <p:cNvPr id="44" name="TextBox 43"/>
+          <p:cNvSpPr txBox="1"/>
+          <p:nvPr/>
+        </p:nvSpPr>
+        <p:spPr>
+          <a:xfrm>
+            <a:off x="6689902" y="4420208"/>
+            <a:ext cx="868680" cy="182880"/>
+          </a:xfrm>
+          <a:prstGeom prst="rect">
+            <a:avLst/>
+          </a:prstGeom>
+          <a:noFill/>
+          <a:effectLst/>
+        </p:spPr>
+        <p:txBody>
+          <a:bodyPr wrap="none">
+            <a:spAutoFit/>
+          </a:bodyPr>
+          <a:lstStyle/>
+          <a:p>
+            <a:pPr algn="ctr">
+              <a:spcBef>
+                <a:spcPts val="100"/>
+              </a:spcBef>
+            </a:pPr>
+            <a:r>
+              <a:rPr sz="1200" b="0" i="0">
+                <a:solidFill>
+                  <a:srgbClr val="FFFFFF"/>
+                </a:solidFill>
+                <a:latin typeface="Meiryo UI"/>
+              </a:rPr>
+              <a:t>Buddy伴走</a:t>
+            </a:r>
+          </a:p>
+        </p:txBody>
+      </p:sp>
+      <p:sp>
+        <p:nvSpPr>
+          <p:cNvPr id="45" name="TextBox 44"/>
+          <p:cNvSpPr txBox="1"/>
+          <p:nvPr/>
+        </p:nvSpPr>
+        <p:spPr>
+          <a:xfrm>
+            <a:off x="6461302" y="4639664"/>
+            <a:ext cx="4828794" cy="237744"/>
+          </a:xfrm>
+          <a:prstGeom prst="rect">
+            <a:avLst/>
+          </a:prstGeom>
+          <a:noFill/>
+          <a:effectLst/>
+        </p:spPr>
+        <p:txBody>
+          <a:bodyPr wrap="square">
+            <a:spAutoFit/>
+          </a:bodyPr>
+          <a:lstStyle/>
+          <a:p>
+            <a:r>
+              <a:rPr sz="1200" b="1" i="0">
+                <a:solidFill>
+                  <a:srgbClr val="1D3461"/>
+                </a:solidFill>
+                <a:latin typeface="Meiryo UI"/>
+              </a:rPr>
+              <a:t>Buddy伴走：戦略と実行の断絶を埋める</a:t>
+            </a:r>
+          </a:p>
+        </p:txBody>
+      </p:sp>
+      <p:sp>
+        <p:nvSpPr>
+          <p:cNvPr id="46" name="TextBox 45"/>
+          <p:cNvSpPr txBox="1"/>
+          <p:nvPr/>
+        </p:nvSpPr>
+        <p:spPr>
+          <a:xfrm>
+            <a:off x="6461302" y="4895696"/>
+            <a:ext cx="4828794" cy="756208"/>
+          </a:xfrm>
+          <a:prstGeom prst="rect">
+            <a:avLst/>
+          </a:prstGeom>
+          <a:noFill/>
+          <a:effectLst/>
+        </p:spPr>
+        <p:txBody>
+          <a:bodyPr wrap="square">
+            <a:spAutoFit/>
+          </a:bodyPr>
+          <a:lstStyle/>
+          <a:p>
+            <a:r>
+              <a:rPr sz="1200" b="0" i="0">
+                <a:solidFill>
+                  <a:srgbClr val="4A9EFF"/>
+                </a:solidFill>
+                <a:latin typeface="Meiryo UI"/>
+              </a:rPr>
+              <a:t>– </a:t>
+            </a:r>
+            <a:r>
+              <a:rPr sz="1200" b="0" i="0">
+                <a:solidFill>
+                  <a:srgbClr val="555555"/>
+                </a:solidFill>
+                <a:latin typeface="Meiryo UI"/>
+              </a:rPr>
+              <a:t>朝会夕会×専任Buddy伴走で行動変容を支援</a:t>
+            </a:r>
+          </a:p>
+          <a:p>
+            <a:pPr>
+              <a:spcBef>
+                <a:spcPts val="200"/>
+              </a:spcBef>
+            </a:pPr>
+            <a:r>
+              <a:rPr sz="1200" b="0" i="0">
+                <a:solidFill>
+                  <a:srgbClr val="4A9EFF"/>
+                </a:solidFill>
+                <a:latin typeface="Meiryo UI"/>
+              </a:rPr>
+              <a:t>– </a:t>
+            </a:r>
+            <a:r>
+              <a:rPr sz="1200" b="0" i="0">
+                <a:solidFill>
+                  <a:srgbClr val="555555"/>
+                </a:solidFill>
+                <a:latin typeface="Meiryo UI"/>
+              </a:rPr>
+              <a:t>型を知る→実行できる→文化になるまで定着支援</a:t>
+            </a:r>
+          </a:p>
+        </p:txBody>
+      </p:sp>
+      <p:sp>
+        <p:nvSpPr>
+          <p:cNvPr id="47" name="Rectangle 46"/>
+          <p:cNvSpPr/>
+          <p:nvPr/>
+        </p:nvSpPr>
+        <p:spPr>
+          <a:xfrm>
+            <a:off x="838504" y="5779922"/>
+            <a:ext cx="10515600" cy="502920"/>
+          </a:xfrm>
+          <a:prstGeom prst="rect">
+            <a:avLst/>
+          </a:prstGeom>
+          <a:solidFill>
+            <a:srgbClr val="1D3461"/>
+          </a:solidFill>
+          <a:ln>
+            <a:noFill/>
+          </a:ln>
+          <a:effectLst/>
+        </p:spPr>
+        <p:style>
+          <a:lnRef idx="1">
+            <a:schemeClr val="accent1"/>
+          </a:lnRef>
+          <a:fillRef idx="3">
+            <a:schemeClr val="accent1"/>
+          </a:fillRef>
+          <a:effectRef idx="2">
+            <a:schemeClr val="accent1"/>
+          </a:effectRef>
+          <a:fontRef idx="minor">
+            <a:schemeClr val="lt1"/>
+          </a:fontRef>
+        </p:style>
+        <p:txBody>
+          <a:bodyPr rtlCol="0" anchor="ctr"/>
+          <a:lstStyle/>
+          <a:p>
+            <a:pPr algn="ctr"/>
+          </a:p>
+        </p:txBody>
+      </p:sp>
+      <p:sp>
+        <p:nvSpPr>
+          <p:cNvPr id="48" name="TextBox 47"/>
+          <p:cNvSpPr txBox="1"/>
+          <p:nvPr/>
+        </p:nvSpPr>
+        <p:spPr>
+          <a:xfrm>
+            <a:off x="1021384" y="5779922"/>
+            <a:ext cx="10149840" cy="502920"/>
+          </a:xfrm>
+          <a:prstGeom prst="rect">
+            <a:avLst/>
+          </a:prstGeom>
+          <a:noFill/>
+          <a:effectLst/>
+        </p:spPr>
+        <p:txBody>
+          <a:bodyPr wrap="square">
+            <a:spAutoFit/>
+          </a:bodyPr>
+          <a:lstStyle/>
+          <a:p>
             <a:pPr algn="ctr"/>
             <a:r>
               <a:rPr sz="1400" b="1" i="0">
@@ -6529,7 +7635,7 @@
       </p:sp>
       <p:pic>
         <p:nvPicPr>
-          <p:cNvPr id="13" name="Picture 12" descr="logo.png"/>
+          <p:cNvPr id="49" name="Picture 48" descr="logo.png"/>
           <p:cNvPicPr>
             <a:picLocks noChangeAspect="1"/>
           </p:cNvPicPr>
@@ -6553,7 +7659,7 @@
       </p:pic>
       <p:sp>
         <p:nvSpPr>
-          <p:cNvPr id="14" name="Rectangle 13"/>
+          <p:cNvPr id="50" name="Rectangle 49"/>
           <p:cNvSpPr/>
           <p:nvPr/>
         </p:nvSpPr>
@@ -6597,7 +7703,7 @@
       </p:sp>
       <p:sp>
         <p:nvSpPr>
-          <p:cNvPr id="15" name="TextBox 14"/>
+          <p:cNvPr id="51" name="TextBox 50"/>
           <p:cNvSpPr txBox="1"/>
           <p:nvPr/>
         </p:nvSpPr>
@@ -6631,7 +7737,7 @@
       </p:sp>
       <p:sp>
         <p:nvSpPr>
-          <p:cNvPr id="16" name="TextBox 15"/>
+          <p:cNvPr id="52" name="TextBox 51"/>
           <p:cNvSpPr txBox="1"/>
           <p:nvPr/>
         </p:nvSpPr>
